--- a/ML_Bubble_2026_Readmission_Risk.pptx
+++ b/ML_Bubble_2026_Readmission_Risk.pptx
@@ -20,9 +20,12 @@
     <p:sldId id="268" r:id="rId14"/>
     <p:sldId id="269" r:id="rId15"/>
     <p:sldId id="270" r:id="rId16"/>
+    <p:sldId id="271" r:id="rId17"/>
+    <p:sldId id="272" r:id="rId18"/>
+    <p:sldId id="273" r:id="rId19"/>
   </p:sldIdLst>
   <p:notesMasterIdLst>
-    <p:notesMasterId r:id="rId17"/>
+    <p:notesMasterId r:id="rId20"/>
   </p:notesMasterIdLst>
   <p:sldSz cx="12192000" cy="6858000"/>
   <p:notesSz cx="6858000" cy="12192000"/>
@@ -1047,7 +1050,7 @@
           <a:p>
             <a:r>
               <a:rPr lang="en-US" dirty="0"/>
-              <a:t>Per-patient reason codes ship with every score — a nurse needs the three facts behind a number, not the number alone.</a:t>
+              <a:t>Note that 'call everyone' is worse than doing nothing at this exchange rate: the false-alarm burden swamps the benefit. That is precisely the situation a triage model exists to fix. Vickers &amp; Elkin 2006 is the reference.</a:t>
             </a:r>
             <a:endParaRPr lang="en-US" dirty="0"/>
           </a:p>
@@ -1135,7 +1138,7 @@
           <a:p>
             <a:r>
               <a:rPr lang="en-US" dirty="0"/>
-              <a:t>Ensembling buying nothing tells you the three tree models make correlated errors — they read the same limited signal.</a:t>
+              <a:t>Per-patient reason codes ship with every score — a nurse needs the three facts behind a number, not the number alone.</a:t>
             </a:r>
             <a:endParaRPr lang="en-US" dirty="0"/>
           </a:p>
@@ -1223,7 +1226,7 @@
           <a:p>
             <a:r>
               <a:rPr lang="en-US" dirty="0"/>
-              <a:t>Protected attributes are kept as features on purpose. Dropping race does not remove its influence — it is reconstructable from other columns — it only removes the ability to measure the disparity.</a:t>
+              <a:t>Ensembling buying nothing tells you the three tree models make correlated errors — they read the same limited signal.</a:t>
             </a:r>
             <a:endParaRPr lang="en-US" dirty="0"/>
           </a:p>
@@ -1311,7 +1314,7 @@
           <a:p>
             <a:r>
               <a:rPr lang="en-US" dirty="0"/>
-              <a:t>The data is from 1999–2008. Recalibration on recent local data is mandatory before any real use, not optional.</a:t>
+              <a:t>This slide is the answer to 'how do you know that number is real'. It is also the slide where we correct ourselves: the ablation shows a method ceiling, the learning curve shows more patients would still help slightly. That points at a multi-hospital dataset, not a better booster, as the next real improvement.</a:t>
             </a:r>
             <a:endParaRPr lang="en-US" dirty="0"/>
           </a:p>
@@ -1399,7 +1402,7 @@
           <a:p>
             <a:r>
               <a:rPr lang="en-US" dirty="0"/>
-              <a:t>Close on credibility rather than on a number. The limitations slide is the one that separates a model that was measured from a model that was demoed.</a:t>
+              <a:t>Protected attributes are kept as features on purpose. Dropping race does not remove its influence — it is reconstructable from other columns — it only removes the ability to measure the disparity.</a:t>
             </a:r>
             <a:endParaRPr lang="en-US" dirty="0"/>
           </a:p>
@@ -1423,6 +1426,270 @@
             <a:fld id="{F7021451-1387-4CA6-816F-3879F97B5CBC}" type="slidenum">
               <a:rPr lang="en-US"/>
               <a:t>15</a:t>
+            </a:fld>
+            <a:endParaRPr lang="en-US"/>
+          </a:p>
+        </p:txBody>
+      </p:sp>
+    </p:spTree>
+    <p:extLst>
+      <p:ext uri="{BB962C8B-B14F-4D97-AF65-F5344CB8AC3E}">
+        <p14:creationId xmlns:p14="http://schemas.microsoft.com/office/powerpoint/2010/main" val="1024086991"/>
+      </p:ext>
+    </p:extLst>
+  </p:cSld>
+  <p:clrMapOvr>
+    <a:masterClrMapping/>
+  </p:clrMapOvr>
+</p:notes>
+</file>
+
+<file path=ppt/notesSlides/notesSlide16.xml><?xml version="1.0" encoding="utf-8"?>
+<p:notes xmlns:a="http://schemas.openxmlformats.org/drawingml/2006/main" xmlns:r="http://schemas.openxmlformats.org/officeDocument/2006/relationships" xmlns:p="http://schemas.openxmlformats.org/presentationml/2006/main">
+  <p:cSld>
+    <p:spTree>
+      <p:nvGrpSpPr>
+        <p:cNvPr id="1" name=""/>
+        <p:cNvGrpSpPr/>
+        <p:nvPr/>
+      </p:nvGrpSpPr>
+      <p:grpSpPr>
+        <a:xfrm>
+          <a:off x="0" y="0"/>
+          <a:ext cx="0" cy="0"/>
+          <a:chOff x="0" y="0"/>
+          <a:chExt cx="0" cy="0"/>
+        </a:xfrm>
+      </p:grpSpPr>
+      <p:sp>
+        <p:nvSpPr>
+          <p:cNvPr id="2" name="Slide Image Placeholder 1"/>
+          <p:cNvSpPr>
+            <a:spLocks noGrp="1" noRot="1" noChangeAspect="1"/>
+          </p:cNvSpPr>
+          <p:nvPr>
+            <p:ph type="sldImg"/>
+          </p:nvPr>
+        </p:nvSpPr>
+        <p:spPr/>
+      </p:sp>
+      <p:sp>
+        <p:nvSpPr>
+          <p:cNvPr id="3" name="Notes Placeholder 2"/>
+          <p:cNvSpPr>
+            <a:spLocks noGrp="1"/>
+          </p:cNvSpPr>
+          <p:nvPr>
+            <p:ph type="body" idx="1"/>
+          </p:nvPr>
+        </p:nvSpPr>
+        <p:spPr/>
+        <p:txBody>
+          <a:bodyPr/>
+          <a:lstStyle/>
+          <a:p>
+            <a:r>
+              <a:rPr lang="en-US" dirty="0"/>
+              <a:t>The honest framing: two definitions of fairness disagree here. Equal flag rate vs attention proportional to risk. We measured the trade and handed the choice to the hospital rather than picking one silently.</a:t>
+            </a:r>
+            <a:endParaRPr lang="en-US" dirty="0"/>
+          </a:p>
+        </p:txBody>
+      </p:sp>
+      <p:sp>
+        <p:nvSpPr>
+          <p:cNvPr id="4" name="Slide Number Placeholder 3"/>
+          <p:cNvSpPr>
+            <a:spLocks noGrp="1"/>
+          </p:cNvSpPr>
+          <p:nvPr>
+            <p:ph type="sldNum" sz="quarter" idx="10"/>
+          </p:nvPr>
+        </p:nvSpPr>
+        <p:spPr/>
+        <p:txBody>
+          <a:bodyPr/>
+          <a:lstStyle/>
+          <a:p>
+            <a:fld id="{F7021451-1387-4CA6-816F-3879F97B5CBC}" type="slidenum">
+              <a:rPr lang="en-US"/>
+              <a:t>16</a:t>
+            </a:fld>
+            <a:endParaRPr lang="en-US"/>
+          </a:p>
+        </p:txBody>
+      </p:sp>
+    </p:spTree>
+    <p:extLst>
+      <p:ext uri="{BB962C8B-B14F-4D97-AF65-F5344CB8AC3E}">
+        <p14:creationId xmlns:p14="http://schemas.microsoft.com/office/powerpoint/2010/main" val="1024086991"/>
+      </p:ext>
+    </p:extLst>
+  </p:cSld>
+  <p:clrMapOvr>
+    <a:masterClrMapping/>
+  </p:clrMapOvr>
+</p:notes>
+</file>
+
+<file path=ppt/notesSlides/notesSlide17.xml><?xml version="1.0" encoding="utf-8"?>
+<p:notes xmlns:a="http://schemas.openxmlformats.org/drawingml/2006/main" xmlns:r="http://schemas.openxmlformats.org/officeDocument/2006/relationships" xmlns:p="http://schemas.openxmlformats.org/presentationml/2006/main">
+  <p:cSld>
+    <p:spTree>
+      <p:nvGrpSpPr>
+        <p:cNvPr id="1" name=""/>
+        <p:cNvGrpSpPr/>
+        <p:nvPr/>
+      </p:nvGrpSpPr>
+      <p:grpSpPr>
+        <a:xfrm>
+          <a:off x="0" y="0"/>
+          <a:ext cx="0" cy="0"/>
+          <a:chOff x="0" y="0"/>
+          <a:chExt cx="0" cy="0"/>
+        </a:xfrm>
+      </p:grpSpPr>
+      <p:sp>
+        <p:nvSpPr>
+          <p:cNvPr id="2" name="Slide Image Placeholder 1"/>
+          <p:cNvSpPr>
+            <a:spLocks noGrp="1" noRot="1" noChangeAspect="1"/>
+          </p:cNvSpPr>
+          <p:nvPr>
+            <p:ph type="sldImg"/>
+          </p:nvPr>
+        </p:nvSpPr>
+        <p:spPr/>
+      </p:sp>
+      <p:sp>
+        <p:nvSpPr>
+          <p:cNvPr id="3" name="Notes Placeholder 2"/>
+          <p:cNvSpPr>
+            <a:spLocks noGrp="1"/>
+          </p:cNvSpPr>
+          <p:nvPr>
+            <p:ph type="body" idx="1"/>
+          </p:nvPr>
+        </p:nvSpPr>
+        <p:spPr/>
+        <p:txBody>
+          <a:bodyPr/>
+          <a:lstStyle/>
+          <a:p>
+            <a:r>
+              <a:rPr lang="en-US" dirty="0"/>
+              <a:t>The data is from 1999–2008. Recalibration on recent local data is mandatory before any real use, not optional.</a:t>
+            </a:r>
+            <a:endParaRPr lang="en-US" dirty="0"/>
+          </a:p>
+        </p:txBody>
+      </p:sp>
+      <p:sp>
+        <p:nvSpPr>
+          <p:cNvPr id="4" name="Slide Number Placeholder 3"/>
+          <p:cNvSpPr>
+            <a:spLocks noGrp="1"/>
+          </p:cNvSpPr>
+          <p:nvPr>
+            <p:ph type="sldNum" sz="quarter" idx="10"/>
+          </p:nvPr>
+        </p:nvSpPr>
+        <p:spPr/>
+        <p:txBody>
+          <a:bodyPr/>
+          <a:lstStyle/>
+          <a:p>
+            <a:fld id="{F7021451-1387-4CA6-816F-3879F97B5CBC}" type="slidenum">
+              <a:rPr lang="en-US"/>
+              <a:t>17</a:t>
+            </a:fld>
+            <a:endParaRPr lang="en-US"/>
+          </a:p>
+        </p:txBody>
+      </p:sp>
+    </p:spTree>
+    <p:extLst>
+      <p:ext uri="{BB962C8B-B14F-4D97-AF65-F5344CB8AC3E}">
+        <p14:creationId xmlns:p14="http://schemas.microsoft.com/office/powerpoint/2010/main" val="1024086991"/>
+      </p:ext>
+    </p:extLst>
+  </p:cSld>
+  <p:clrMapOvr>
+    <a:masterClrMapping/>
+  </p:clrMapOvr>
+</p:notes>
+</file>
+
+<file path=ppt/notesSlides/notesSlide18.xml><?xml version="1.0" encoding="utf-8"?>
+<p:notes xmlns:a="http://schemas.openxmlformats.org/drawingml/2006/main" xmlns:r="http://schemas.openxmlformats.org/officeDocument/2006/relationships" xmlns:p="http://schemas.openxmlformats.org/presentationml/2006/main">
+  <p:cSld>
+    <p:spTree>
+      <p:nvGrpSpPr>
+        <p:cNvPr id="1" name=""/>
+        <p:cNvGrpSpPr/>
+        <p:nvPr/>
+      </p:nvGrpSpPr>
+      <p:grpSpPr>
+        <a:xfrm>
+          <a:off x="0" y="0"/>
+          <a:ext cx="0" cy="0"/>
+          <a:chOff x="0" y="0"/>
+          <a:chExt cx="0" cy="0"/>
+        </a:xfrm>
+      </p:grpSpPr>
+      <p:sp>
+        <p:nvSpPr>
+          <p:cNvPr id="2" name="Slide Image Placeholder 1"/>
+          <p:cNvSpPr>
+            <a:spLocks noGrp="1" noRot="1" noChangeAspect="1"/>
+          </p:cNvSpPr>
+          <p:nvPr>
+            <p:ph type="sldImg"/>
+          </p:nvPr>
+        </p:nvSpPr>
+        <p:spPr/>
+      </p:sp>
+      <p:sp>
+        <p:nvSpPr>
+          <p:cNvPr id="3" name="Notes Placeholder 2"/>
+          <p:cNvSpPr>
+            <a:spLocks noGrp="1"/>
+          </p:cNvSpPr>
+          <p:nvPr>
+            <p:ph type="body" idx="1"/>
+          </p:nvPr>
+        </p:nvSpPr>
+        <p:spPr/>
+        <p:txBody>
+          <a:bodyPr/>
+          <a:lstStyle/>
+          <a:p>
+            <a:r>
+              <a:rPr lang="en-US" dirty="0"/>
+              <a:t>Close on credibility rather than on a number. The limitations slide is the one that separates a model that was measured from a model that was demoed.</a:t>
+            </a:r>
+            <a:endParaRPr lang="en-US" dirty="0"/>
+          </a:p>
+        </p:txBody>
+      </p:sp>
+      <p:sp>
+        <p:nvSpPr>
+          <p:cNvPr id="4" name="Slide Number Placeholder 3"/>
+          <p:cNvSpPr>
+            <a:spLocks noGrp="1"/>
+          </p:cNvSpPr>
+          <p:nvPr>
+            <p:ph type="sldNum" sz="quarter" idx="10"/>
+          </p:nvPr>
+        </p:nvSpPr>
+        <p:spPr/>
+        <p:txBody>
+          <a:bodyPr/>
+          <a:lstStyle/>
+          <a:p>
+            <a:fld id="{F7021451-1387-4CA6-816F-3879F97B5CBC}" type="slidenum">
+              <a:rPr lang="en-US"/>
+              <a:t>18</a:t>
             </a:fld>
             <a:endParaRPr lang="en-US"/>
           </a:p>
@@ -4598,7 +4865,7 @@
                 <a:ea typeface="Calibri" pitchFamily="34" charset="-122"/>
                 <a:cs typeface="Calibri" pitchFamily="34" charset="-120"/>
               </a:rPr>
-              <a:t>EXPLAINABILITY</a:t>
+              <a:t>CLINICAL VALUE</a:t>
             </a:r>
             <a:endParaRPr lang="en-US" sz="1100" dirty="0"/>
           </a:p>
@@ -4637,7 +4904,7 @@
                 <a:ea typeface="Cambria" pitchFamily="34" charset="-122"/>
                 <a:cs typeface="Cambria" pitchFamily="34" charset="-120"/>
               </a:rPr>
-              <a:t>What the model is actually reading</a:t>
+              <a:t>Is acting on it better than what they do today?</a:t>
             </a:r>
             <a:endParaRPr lang="en-US" sz="3200" dirty="0"/>
           </a:p>
@@ -4676,7 +4943,7 @@
                 <a:ea typeface="Calibri" pitchFamily="34" charset="-122"/>
                 <a:cs typeface="Calibri" pitchFamily="34" charset="-120"/>
               </a:rPr>
-              <a:t>Permutation importance on held-out data and SHAP agree on the top of the list.</a:t>
+              <a:t>Discrimination says the ranking is good. It does not say that using it beats calling everyone, or calling nobody.</a:t>
             </a:r>
             <a:endParaRPr lang="en-US" sz="1250" dirty="0"/>
           </a:p>
@@ -4684,7 +4951,7 @@
       </p:sp>
       <p:pic>
         <p:nvPicPr>
-          <p:cNvPr id="5" name="Image 0" descr="/Users/Shikhar/ML Bubble hackathon/reports/figures/shap_beeswarm.png">    </p:cNvPr>
+          <p:cNvPr id="5" name="Image 0" descr="/Users/Shikhar/ML Bubble hackathon/reports/figures/decision_curve.png">    </p:cNvPr>
           <p:cNvPicPr>
             <a:picLocks noChangeAspect="1"/>
           </p:cNvPicPr>
@@ -4699,7 +4966,7 @@
         <p:spPr>
           <a:xfrm>
             <a:off x="566928" y="1700784"/>
-            <a:ext cx="5029200" cy="3931920"/>
+            <a:ext cx="5806440" cy="3950208"/>
           </a:xfrm>
           <a:prstGeom prst="rect">
             <a:avLst/>
@@ -4714,12 +4981,12 @@
         </p:nvSpPr>
         <p:spPr>
           <a:xfrm>
-            <a:off x="5870448" y="1773936"/>
-            <a:ext cx="5760720" cy="841248"/>
+            <a:off x="6675120" y="1737360"/>
+            <a:ext cx="4956048" cy="1316736"/>
           </a:xfrm>
           <a:prstGeom prst="roundRect">
             <a:avLst>
-              <a:gd name="adj" fmla="val 8696"/>
+              <a:gd name="adj" fmla="val 5556"/>
             </a:avLst>
           </a:prstGeom>
           <a:solidFill>
@@ -4735,39 +5002,14 @@
       </p:sp>
       <p:sp>
         <p:nvSpPr>
-          <p:cNvPr id="7" name="Shape 4"/>
-          <p:cNvSpPr/>
-          <p:nvPr/>
-        </p:nvSpPr>
-        <p:spPr>
-          <a:xfrm>
-            <a:off x="6108192" y="2020824"/>
-            <a:ext cx="347472" cy="347472"/>
-          </a:xfrm>
-          <a:prstGeom prst="ellipse">
-            <a:avLst/>
-          </a:prstGeom>
-          <a:solidFill>
-            <a:srgbClr val="12556B"/>
-          </a:solidFill>
-          <a:ln w="12700">
-            <a:solidFill>
-              <a:srgbClr val="333333"/>
-            </a:solidFill>
-            <a:prstDash val="solid"/>
-          </a:ln>
-        </p:spPr>
-      </p:sp>
-      <p:sp>
-        <p:nvSpPr>
-          <p:cNvPr id="8" name="Text 5"/>
-          <p:cNvSpPr/>
-          <p:nvPr/>
-        </p:nvSpPr>
-        <p:spPr>
-          <a:xfrm>
-            <a:off x="6108192" y="2020824"/>
-            <a:ext cx="347472" cy="347472"/>
+          <p:cNvPr id="7" name="Text 4"/>
+          <p:cNvSpPr/>
+          <p:nvPr/>
+        </p:nvSpPr>
+        <p:spPr>
+          <a:xfrm>
+            <a:off x="6931152" y="1883664"/>
+            <a:ext cx="4443984" cy="292608"/>
           </a:xfrm>
           <a:prstGeom prst="rect">
             <a:avLst/>
@@ -4779,34 +5021,34 @@
           <a:bodyPr wrap="square" lIns="0" tIns="0" rIns="0" bIns="0" rtlCol="0" anchor="ctr"/>
           <a:lstStyle/>
           <a:p>
-            <a:pPr algn="ctr" indent="0" marL="0">
+            <a:pPr indent="0" marL="0">
               <a:buNone/>
             </a:pPr>
             <a:r>
-              <a:rPr lang="en-US" sz="1200" b="1" dirty="0">
-                <a:solidFill>
-                  <a:srgbClr val="FFFFFF"/>
+              <a:rPr lang="en-US" sz="1500" b="1" dirty="0">
+                <a:solidFill>
+                  <a:srgbClr val="0B2E3B"/>
                 </a:solidFill>
                 <a:latin typeface="Cambria" pitchFamily="34" charset="0"/>
                 <a:ea typeface="Cambria" pitchFamily="34" charset="-122"/>
                 <a:cs typeface="Cambria" pitchFamily="34" charset="-120"/>
               </a:rPr>
-              <a:t>1</a:t>
-            </a:r>
-            <a:endParaRPr lang="en-US" sz="1200" dirty="0"/>
-          </a:p>
-        </p:txBody>
-      </p:sp>
-      <p:sp>
-        <p:nvSpPr>
-          <p:cNvPr id="9" name="Text 6"/>
-          <p:cNvSpPr/>
-          <p:nvPr/>
-        </p:nvSpPr>
-        <p:spPr>
-          <a:xfrm>
-            <a:off x="6583680" y="1883664"/>
-            <a:ext cx="4846320" cy="310896"/>
+              <a:t>Decision curve analysis</a:t>
+            </a:r>
+            <a:endParaRPr lang="en-US" sz="1500" dirty="0"/>
+          </a:p>
+        </p:txBody>
+      </p:sp>
+      <p:sp>
+        <p:nvSpPr>
+          <p:cNvPr id="8" name="Text 5"/>
+          <p:cNvSpPr/>
+          <p:nvPr/>
+        </p:nvSpPr>
+        <p:spPr>
+          <a:xfrm>
+            <a:off x="6931152" y="2212848"/>
+            <a:ext cx="4443984" cy="786384"/>
           </a:xfrm>
           <a:prstGeom prst="rect">
             <a:avLst/>
@@ -4819,45 +5061,38 @@
           <a:lstStyle/>
           <a:p>
             <a:pPr indent="0" marL="0">
+              <a:lnSpc>
+                <a:spcPts val="1500"/>
+              </a:lnSpc>
               <a:buNone/>
             </a:pPr>
             <a:r>
-              <a:rPr lang="en-US" sz="1300" b="1" dirty="0">
-                <a:solidFill>
-                  <a:srgbClr val="0B2E3B"/>
+              <a:rPr lang="en-US" sz="1150" dirty="0">
+                <a:solidFill>
+                  <a:srgbClr val="34525E"/>
                 </a:solidFill>
                 <a:latin typeface="Calibri" pitchFamily="34" charset="0"/>
                 <a:ea typeface="Calibri" pitchFamily="34" charset="-122"/>
                 <a:cs typeface="Calibri" pitchFamily="34" charset="-120"/>
               </a:rPr>
-              <a:t>Prior inpatient admissions</a:t>
-            </a:r>
-            <a:endParaRPr lang="en-US" sz="1300" dirty="0"/>
-          </a:p>
-        </p:txBody>
-      </p:sp>
-      <p:sp>
-        <p:nvSpPr>
-          <p:cNvPr id="10" name="Text 7"/>
-          <p:cNvSpPr/>
-          <p:nvPr/>
-        </p:nvSpPr>
-        <p:spPr>
-          <a:xfrm>
-            <a:off x="6583680" y="2176272"/>
-            <a:ext cx="4846320" cy="347472"/>
-          </a:xfrm>
-          <a:prstGeom prst="rect">
-            <a:avLst/>
-          </a:prstGeom>
-          <a:noFill/>
-          <a:ln/>
-        </p:spPr>
-        <p:txBody>
-          <a:bodyPr wrap="square" lIns="0" tIns="0" rIns="0" bIns="0" rtlCol="0" anchor="ctr"/>
-          <a:lstStyle/>
+              <a:t>net benefit = TP/N − (FP/N) × pt/(1−pt)</a:t>
+            </a:r>
+            <a:endParaRPr lang="en-US" sz="1150" dirty="0"/>
+          </a:p>
           <a:p>
             <a:pPr indent="0" marL="0">
+              <a:lnSpc>
+                <a:spcPts val="1500"/>
+              </a:lnSpc>
+              <a:buNone/>
+            </a:pPr>
+            <a:endParaRPr lang="en-US" sz="1150" dirty="0"/>
+          </a:p>
+          <a:p>
+            <a:pPr indent="0" marL="0">
+              <a:lnSpc>
+                <a:spcPts val="1500"/>
+              </a:lnSpc>
               <a:buNone/>
             </a:pPr>
             <a:r>
@@ -4869,533 +5104,608 @@
                 <a:ea typeface="Calibri" pitchFamily="34" charset="-122"/>
                 <a:cs typeface="Calibri" pitchFamily="34" charset="-120"/>
               </a:rPr>
-              <a:t>Utilisation history beats anything measured during the stay.</a:t>
+              <a:t>pt is the risk at which a call becomes worthwhile — it encodes the cost ratio.</a:t>
             </a:r>
             <a:endParaRPr lang="en-US" sz="1150" dirty="0"/>
           </a:p>
         </p:txBody>
       </p:sp>
-      <p:sp>
-        <p:nvSpPr>
-          <p:cNvPr id="11" name="Shape 8"/>
-          <p:cNvSpPr/>
-          <p:nvPr/>
-        </p:nvSpPr>
-        <p:spPr>
-          <a:xfrm>
-            <a:off x="5870448" y="2743200"/>
-            <a:ext cx="5760720" cy="841248"/>
+      <p:graphicFrame>
+        <p:nvGraphicFramePr>
+          <p:cNvPr id="12" name="Table 0"/>
+          <p:cNvGraphicFramePr>
+            <a:graphicFrameLocks noGrp="1"/>
+          </p:cNvGraphicFramePr>
+          <p:nvPr>
+            <p:extLst>
+              <p:ext uri="{D42A27DB-BD31-4B8C-83A1-F6EECF244321}">
+                <p14:modId xmlns:p14="http://schemas.microsoft.com/office/powerpoint/2010/main" val="1579011935"/>
+              </p:ext>
+            </p:extLst>
+          </p:nvPr>
+        </p:nvGraphicFramePr>
+        <p:xfrm>
+          <a:off x="6675120" y="3218688"/>
+          <a:ext cx="4956048" cy="914400"/>
+        </p:xfrm>
+        <a:graphic>
+          <a:graphicData uri="http://schemas.openxmlformats.org/drawingml/2006/table">
+            <a:tbl>
+              <a:tblPr/>
+              <a:tblGrid>
+                <a:gridCol w="2926080"/>
+                <a:gridCol w="2029968"/>
+              </a:tblGrid>
+              <a:tr h="310896">
+                <a:tc>
+                  <a:txBody>
+                    <a:bodyPr/>
+                    <a:lstStyle/>
+                    <a:p>
+                      <a:pPr indent="0" marL="0">
+                        <a:buNone/>
+                      </a:pPr>
+                      <a:r>
+                        <a:rPr lang="en-US" sz="1250" dirty="0">
+                          <a:solidFill>
+                            <a:srgbClr val="1F3D49"/>
+                          </a:solidFill>
+                          <a:latin typeface="Calibri" pitchFamily="34" charset="0"/>
+                          <a:ea typeface="Calibri" pitchFamily="34" charset="-122"/>
+                          <a:cs typeface="Calibri" pitchFamily="34" charset="-120"/>
+                        </a:rPr>
+                        <a:t>Policy</a:t>
+                      </a:r>
+                      <a:endParaRPr lang="en-US" sz="1250" dirty="0">
+                        <a:latin typeface="Calibri" charset="0"/>
+                        <a:ea typeface="Calibri" charset="0"/>
+                        <a:cs typeface="Calibri" charset="0"/>
+                      </a:endParaRPr>
+                    </a:p>
+                  </a:txBody>
+                  <a:tcPr marL="91440" marR="91440" marT="45720" marB="45720">
+                    <a:lnL w="12700" cap="flat" cmpd="sng" algn="ctr">
+                      <a:solidFill>
+                        <a:srgbClr val="DCE7EB"/>
+                      </a:solidFill>
+                      <a:prstDash val="solid"/>
+                      <a:round/>
+                      <a:headEnd type="none" w="med" len="med"/>
+                      <a:tailEnd type="none" w="med" len="med"/>
+                    </a:lnL>
+                    <a:lnR w="12700" cap="flat" cmpd="sng" algn="ctr">
+                      <a:solidFill>
+                        <a:srgbClr val="DCE7EB"/>
+                      </a:solidFill>
+                      <a:prstDash val="solid"/>
+                      <a:round/>
+                      <a:headEnd type="none" w="med" len="med"/>
+                      <a:tailEnd type="none" w="med" len="med"/>
+                    </a:lnR>
+                    <a:lnT w="12700" cap="flat" cmpd="sng" algn="ctr">
+                      <a:solidFill>
+                        <a:srgbClr val="DCE7EB"/>
+                      </a:solidFill>
+                      <a:prstDash val="solid"/>
+                      <a:round/>
+                      <a:headEnd type="none" w="med" len="med"/>
+                      <a:tailEnd type="none" w="med" len="med"/>
+                    </a:lnT>
+                    <a:lnB w="12700" cap="flat" cmpd="sng" algn="ctr">
+                      <a:solidFill>
+                        <a:srgbClr val="DCE7EB"/>
+                      </a:solidFill>
+                      <a:prstDash val="solid"/>
+                      <a:round/>
+                      <a:headEnd type="none" w="med" len="med"/>
+                      <a:tailEnd type="none" w="med" len="med"/>
+                    </a:lnB>
+                    <a:solidFill>
+                      <a:srgbClr val="FFFFFF"/>
+                    </a:solidFill>
+                  </a:tcPr>
+                </a:tc>
+                <a:tc>
+                  <a:txBody>
+                    <a:bodyPr/>
+                    <a:lstStyle/>
+                    <a:p>
+                      <a:pPr indent="0" marL="0">
+                        <a:buNone/>
+                      </a:pPr>
+                      <a:r>
+                        <a:rPr lang="en-US" sz="1250" dirty="0">
+                          <a:solidFill>
+                            <a:srgbClr val="1F3D49"/>
+                          </a:solidFill>
+                          <a:latin typeface="Calibri" pitchFamily="34" charset="0"/>
+                          <a:ea typeface="Calibri" pitchFamily="34" charset="-122"/>
+                          <a:cs typeface="Calibri" pitchFamily="34" charset="-120"/>
+                        </a:rPr>
+                        <a:t>Net benefit</a:t>
+                      </a:r>
+                      <a:endParaRPr lang="en-US" sz="1250" dirty="0">
+                        <a:latin typeface="Calibri" charset="0"/>
+                        <a:ea typeface="Calibri" charset="0"/>
+                        <a:cs typeface="Calibri" charset="0"/>
+                      </a:endParaRPr>
+                    </a:p>
+                  </a:txBody>
+                  <a:tcPr marL="91440" marR="91440" marT="45720" marB="45720">
+                    <a:lnL w="12700" cap="flat" cmpd="sng" algn="ctr">
+                      <a:solidFill>
+                        <a:srgbClr val="DCE7EB"/>
+                      </a:solidFill>
+                      <a:prstDash val="solid"/>
+                      <a:round/>
+                      <a:headEnd type="none" w="med" len="med"/>
+                      <a:tailEnd type="none" w="med" len="med"/>
+                    </a:lnL>
+                    <a:lnR w="12700" cap="flat" cmpd="sng" algn="ctr">
+                      <a:solidFill>
+                        <a:srgbClr val="DCE7EB"/>
+                      </a:solidFill>
+                      <a:prstDash val="solid"/>
+                      <a:round/>
+                      <a:headEnd type="none" w="med" len="med"/>
+                      <a:tailEnd type="none" w="med" len="med"/>
+                    </a:lnR>
+                    <a:lnT w="12700" cap="flat" cmpd="sng" algn="ctr">
+                      <a:solidFill>
+                        <a:srgbClr val="DCE7EB"/>
+                      </a:solidFill>
+                      <a:prstDash val="solid"/>
+                      <a:round/>
+                      <a:headEnd type="none" w="med" len="med"/>
+                      <a:tailEnd type="none" w="med" len="med"/>
+                    </a:lnT>
+                    <a:lnB w="12700" cap="flat" cmpd="sng" algn="ctr">
+                      <a:solidFill>
+                        <a:srgbClr val="DCE7EB"/>
+                      </a:solidFill>
+                      <a:prstDash val="solid"/>
+                      <a:round/>
+                      <a:headEnd type="none" w="med" len="med"/>
+                      <a:tailEnd type="none" w="med" len="med"/>
+                    </a:lnB>
+                    <a:solidFill>
+                      <a:srgbClr val="FFFFFF"/>
+                    </a:solidFill>
+                  </a:tcPr>
+                </a:tc>
+              </a:tr>
+              <a:tr h="329184">
+                <a:tc>
+                  <a:txBody>
+                    <a:bodyPr/>
+                    <a:lstStyle/>
+                    <a:p>
+                      <a:pPr indent="0" marL="0">
+                        <a:buNone/>
+                      </a:pPr>
+                      <a:r>
+                        <a:rPr lang="en-US" sz="1250" dirty="0">
+                          <a:solidFill>
+                            <a:srgbClr val="1F3D49"/>
+                          </a:solidFill>
+                          <a:latin typeface="Calibri" pitchFamily="34" charset="0"/>
+                          <a:ea typeface="Calibri" pitchFamily="34" charset="-122"/>
+                          <a:cs typeface="Calibri" pitchFamily="34" charset="-120"/>
+                        </a:rPr>
+                        <a:t>Use the model</a:t>
+                      </a:r>
+                      <a:endParaRPr lang="en-US" sz="1250" dirty="0">
+                        <a:latin typeface="Calibri" charset="0"/>
+                        <a:ea typeface="Calibri" charset="0"/>
+                        <a:cs typeface="Calibri" charset="0"/>
+                      </a:endParaRPr>
+                    </a:p>
+                  </a:txBody>
+                  <a:tcPr marL="91440" marR="91440" marT="45720" marB="45720">
+                    <a:lnL w="12700" cap="flat" cmpd="sng" algn="ctr">
+                      <a:solidFill>
+                        <a:srgbClr val="DCE7EB"/>
+                      </a:solidFill>
+                      <a:prstDash val="solid"/>
+                      <a:round/>
+                      <a:headEnd type="none" w="med" len="med"/>
+                      <a:tailEnd type="none" w="med" len="med"/>
+                    </a:lnL>
+                    <a:lnR w="12700" cap="flat" cmpd="sng" algn="ctr">
+                      <a:solidFill>
+                        <a:srgbClr val="DCE7EB"/>
+                      </a:solidFill>
+                      <a:prstDash val="solid"/>
+                      <a:round/>
+                      <a:headEnd type="none" w="med" len="med"/>
+                      <a:tailEnd type="none" w="med" len="med"/>
+                    </a:lnR>
+                    <a:lnT w="12700" cap="flat" cmpd="sng" algn="ctr">
+                      <a:solidFill>
+                        <a:srgbClr val="DCE7EB"/>
+                      </a:solidFill>
+                      <a:prstDash val="solid"/>
+                      <a:round/>
+                      <a:headEnd type="none" w="med" len="med"/>
+                      <a:tailEnd type="none" w="med" len="med"/>
+                    </a:lnT>
+                    <a:lnB w="12700" cap="flat" cmpd="sng" algn="ctr">
+                      <a:solidFill>
+                        <a:srgbClr val="DCE7EB"/>
+                      </a:solidFill>
+                      <a:prstDash val="solid"/>
+                      <a:round/>
+                      <a:headEnd type="none" w="med" len="med"/>
+                      <a:tailEnd type="none" w="med" len="med"/>
+                    </a:lnB>
+                    <a:solidFill>
+                      <a:srgbClr val="FFFFFF"/>
+                    </a:solidFill>
+                  </a:tcPr>
+                </a:tc>
+                <a:tc>
+                  <a:txBody>
+                    <a:bodyPr/>
+                    <a:lstStyle/>
+                    <a:p>
+                      <a:pPr indent="0" marL="0">
+                        <a:buNone/>
+                      </a:pPr>
+                      <a:r>
+                        <a:rPr lang="en-US" sz="1250" dirty="0">
+                          <a:solidFill>
+                            <a:srgbClr val="1F3D49"/>
+                          </a:solidFill>
+                          <a:latin typeface="Calibri" pitchFamily="34" charset="0"/>
+                          <a:ea typeface="Calibri" pitchFamily="34" charset="-122"/>
+                          <a:cs typeface="Calibri" pitchFamily="34" charset="-120"/>
+                        </a:rPr>
+                        <a:t>+0.0157</a:t>
+                      </a:r>
+                      <a:endParaRPr lang="en-US" sz="1250" dirty="0">
+                        <a:latin typeface="Calibri" charset="0"/>
+                        <a:ea typeface="Calibri" charset="0"/>
+                        <a:cs typeface="Calibri" charset="0"/>
+                      </a:endParaRPr>
+                    </a:p>
+                  </a:txBody>
+                  <a:tcPr marL="91440" marR="91440" marT="45720" marB="45720">
+                    <a:lnL w="12700" cap="flat" cmpd="sng" algn="ctr">
+                      <a:solidFill>
+                        <a:srgbClr val="DCE7EB"/>
+                      </a:solidFill>
+                      <a:prstDash val="solid"/>
+                      <a:round/>
+                      <a:headEnd type="none" w="med" len="med"/>
+                      <a:tailEnd type="none" w="med" len="med"/>
+                    </a:lnL>
+                    <a:lnR w="12700" cap="flat" cmpd="sng" algn="ctr">
+                      <a:solidFill>
+                        <a:srgbClr val="DCE7EB"/>
+                      </a:solidFill>
+                      <a:prstDash val="solid"/>
+                      <a:round/>
+                      <a:headEnd type="none" w="med" len="med"/>
+                      <a:tailEnd type="none" w="med" len="med"/>
+                    </a:lnR>
+                    <a:lnT w="12700" cap="flat" cmpd="sng" algn="ctr">
+                      <a:solidFill>
+                        <a:srgbClr val="DCE7EB"/>
+                      </a:solidFill>
+                      <a:prstDash val="solid"/>
+                      <a:round/>
+                      <a:headEnd type="none" w="med" len="med"/>
+                      <a:tailEnd type="none" w="med" len="med"/>
+                    </a:lnT>
+                    <a:lnB w="12700" cap="flat" cmpd="sng" algn="ctr">
+                      <a:solidFill>
+                        <a:srgbClr val="DCE7EB"/>
+                      </a:solidFill>
+                      <a:prstDash val="solid"/>
+                      <a:round/>
+                      <a:headEnd type="none" w="med" len="med"/>
+                      <a:tailEnd type="none" w="med" len="med"/>
+                    </a:lnB>
+                    <a:solidFill>
+                      <a:srgbClr val="FFFFFF"/>
+                    </a:solidFill>
+                  </a:tcPr>
+                </a:tc>
+              </a:tr>
+              <a:tr h="329184">
+                <a:tc>
+                  <a:txBody>
+                    <a:bodyPr/>
+                    <a:lstStyle/>
+                    <a:p>
+                      <a:pPr indent="0" marL="0">
+                        <a:buNone/>
+                      </a:pPr>
+                      <a:r>
+                        <a:rPr lang="en-US" sz="1250" dirty="0">
+                          <a:solidFill>
+                            <a:srgbClr val="1F3D49"/>
+                          </a:solidFill>
+                          <a:latin typeface="Calibri" pitchFamily="34" charset="0"/>
+                          <a:ea typeface="Calibri" pitchFamily="34" charset="-122"/>
+                          <a:cs typeface="Calibri" pitchFamily="34" charset="-120"/>
+                        </a:rPr>
+                        <a:t>Call everyone</a:t>
+                      </a:r>
+                      <a:endParaRPr lang="en-US" sz="1250" dirty="0">
+                        <a:latin typeface="Calibri" charset="0"/>
+                        <a:ea typeface="Calibri" charset="0"/>
+                        <a:cs typeface="Calibri" charset="0"/>
+                      </a:endParaRPr>
+                    </a:p>
+                  </a:txBody>
+                  <a:tcPr marL="91440" marR="91440" marT="45720" marB="45720">
+                    <a:lnL w="12700" cap="flat" cmpd="sng" algn="ctr">
+                      <a:solidFill>
+                        <a:srgbClr val="DCE7EB"/>
+                      </a:solidFill>
+                      <a:prstDash val="solid"/>
+                      <a:round/>
+                      <a:headEnd type="none" w="med" len="med"/>
+                      <a:tailEnd type="none" w="med" len="med"/>
+                    </a:lnL>
+                    <a:lnR w="12700" cap="flat" cmpd="sng" algn="ctr">
+                      <a:solidFill>
+                        <a:srgbClr val="DCE7EB"/>
+                      </a:solidFill>
+                      <a:prstDash val="solid"/>
+                      <a:round/>
+                      <a:headEnd type="none" w="med" len="med"/>
+                      <a:tailEnd type="none" w="med" len="med"/>
+                    </a:lnR>
+                    <a:lnT w="12700" cap="flat" cmpd="sng" algn="ctr">
+                      <a:solidFill>
+                        <a:srgbClr val="DCE7EB"/>
+                      </a:solidFill>
+                      <a:prstDash val="solid"/>
+                      <a:round/>
+                      <a:headEnd type="none" w="med" len="med"/>
+                      <a:tailEnd type="none" w="med" len="med"/>
+                    </a:lnT>
+                    <a:lnB w="12700" cap="flat" cmpd="sng" algn="ctr">
+                      <a:solidFill>
+                        <a:srgbClr val="DCE7EB"/>
+                      </a:solidFill>
+                      <a:prstDash val="solid"/>
+                      <a:round/>
+                      <a:headEnd type="none" w="med" len="med"/>
+                      <a:tailEnd type="none" w="med" len="med"/>
+                    </a:lnB>
+                    <a:solidFill>
+                      <a:srgbClr val="FFFFFF"/>
+                    </a:solidFill>
+                  </a:tcPr>
+                </a:tc>
+                <a:tc>
+                  <a:txBody>
+                    <a:bodyPr/>
+                    <a:lstStyle/>
+                    <a:p>
+                      <a:pPr indent="0" marL="0">
+                        <a:buNone/>
+                      </a:pPr>
+                      <a:r>
+                        <a:rPr lang="en-US" sz="1250" dirty="0">
+                          <a:solidFill>
+                            <a:srgbClr val="1F3D49"/>
+                          </a:solidFill>
+                          <a:latin typeface="Calibri" pitchFamily="34" charset="0"/>
+                          <a:ea typeface="Calibri" pitchFamily="34" charset="-122"/>
+                          <a:cs typeface="Calibri" pitchFamily="34" charset="-120"/>
+                        </a:rPr>
+                        <a:t>−0.0617</a:t>
+                      </a:r>
+                      <a:endParaRPr lang="en-US" sz="1250" dirty="0">
+                        <a:latin typeface="Calibri" charset="0"/>
+                        <a:ea typeface="Calibri" charset="0"/>
+                        <a:cs typeface="Calibri" charset="0"/>
+                      </a:endParaRPr>
+                    </a:p>
+                  </a:txBody>
+                  <a:tcPr marL="91440" marR="91440" marT="45720" marB="45720">
+                    <a:lnL w="12700" cap="flat" cmpd="sng" algn="ctr">
+                      <a:solidFill>
+                        <a:srgbClr val="DCE7EB"/>
+                      </a:solidFill>
+                      <a:prstDash val="solid"/>
+                      <a:round/>
+                      <a:headEnd type="none" w="med" len="med"/>
+                      <a:tailEnd type="none" w="med" len="med"/>
+                    </a:lnL>
+                    <a:lnR w="12700" cap="flat" cmpd="sng" algn="ctr">
+                      <a:solidFill>
+                        <a:srgbClr val="DCE7EB"/>
+                      </a:solidFill>
+                      <a:prstDash val="solid"/>
+                      <a:round/>
+                      <a:headEnd type="none" w="med" len="med"/>
+                      <a:tailEnd type="none" w="med" len="med"/>
+                    </a:lnR>
+                    <a:lnT w="12700" cap="flat" cmpd="sng" algn="ctr">
+                      <a:solidFill>
+                        <a:srgbClr val="DCE7EB"/>
+                      </a:solidFill>
+                      <a:prstDash val="solid"/>
+                      <a:round/>
+                      <a:headEnd type="none" w="med" len="med"/>
+                      <a:tailEnd type="none" w="med" len="med"/>
+                    </a:lnT>
+                    <a:lnB w="12700" cap="flat" cmpd="sng" algn="ctr">
+                      <a:solidFill>
+                        <a:srgbClr val="DCE7EB"/>
+                      </a:solidFill>
+                      <a:prstDash val="solid"/>
+                      <a:round/>
+                      <a:headEnd type="none" w="med" len="med"/>
+                      <a:tailEnd type="none" w="med" len="med"/>
+                    </a:lnB>
+                    <a:solidFill>
+                      <a:srgbClr val="FFFFFF"/>
+                    </a:solidFill>
+                  </a:tcPr>
+                </a:tc>
+              </a:tr>
+              <a:tr h="329184">
+                <a:tc>
+                  <a:txBody>
+                    <a:bodyPr/>
+                    <a:lstStyle/>
+                    <a:p>
+                      <a:pPr indent="0" marL="0">
+                        <a:buNone/>
+                      </a:pPr>
+                      <a:r>
+                        <a:rPr lang="en-US" sz="1250" dirty="0">
+                          <a:solidFill>
+                            <a:srgbClr val="1F3D49"/>
+                          </a:solidFill>
+                          <a:latin typeface="Calibri" pitchFamily="34" charset="0"/>
+                          <a:ea typeface="Calibri" pitchFamily="34" charset="-122"/>
+                          <a:cs typeface="Calibri" pitchFamily="34" charset="-120"/>
+                        </a:rPr>
+                        <a:t>Call nobody</a:t>
+                      </a:r>
+                      <a:endParaRPr lang="en-US" sz="1250" dirty="0">
+                        <a:latin typeface="Calibri" charset="0"/>
+                        <a:ea typeface="Calibri" charset="0"/>
+                        <a:cs typeface="Calibri" charset="0"/>
+                      </a:endParaRPr>
+                    </a:p>
+                  </a:txBody>
+                  <a:tcPr marL="91440" marR="91440" marT="45720" marB="45720">
+                    <a:lnL w="12700" cap="flat" cmpd="sng" algn="ctr">
+                      <a:solidFill>
+                        <a:srgbClr val="DCE7EB"/>
+                      </a:solidFill>
+                      <a:prstDash val="solid"/>
+                      <a:round/>
+                      <a:headEnd type="none" w="med" len="med"/>
+                      <a:tailEnd type="none" w="med" len="med"/>
+                    </a:lnL>
+                    <a:lnR w="12700" cap="flat" cmpd="sng" algn="ctr">
+                      <a:solidFill>
+                        <a:srgbClr val="DCE7EB"/>
+                      </a:solidFill>
+                      <a:prstDash val="solid"/>
+                      <a:round/>
+                      <a:headEnd type="none" w="med" len="med"/>
+                      <a:tailEnd type="none" w="med" len="med"/>
+                    </a:lnR>
+                    <a:lnT w="12700" cap="flat" cmpd="sng" algn="ctr">
+                      <a:solidFill>
+                        <a:srgbClr val="DCE7EB"/>
+                      </a:solidFill>
+                      <a:prstDash val="solid"/>
+                      <a:round/>
+                      <a:headEnd type="none" w="med" len="med"/>
+                      <a:tailEnd type="none" w="med" len="med"/>
+                    </a:lnT>
+                    <a:lnB w="12700" cap="flat" cmpd="sng" algn="ctr">
+                      <a:solidFill>
+                        <a:srgbClr val="DCE7EB"/>
+                      </a:solidFill>
+                      <a:prstDash val="solid"/>
+                      <a:round/>
+                      <a:headEnd type="none" w="med" len="med"/>
+                      <a:tailEnd type="none" w="med" len="med"/>
+                    </a:lnB>
+                    <a:solidFill>
+                      <a:srgbClr val="FFFFFF"/>
+                    </a:solidFill>
+                  </a:tcPr>
+                </a:tc>
+                <a:tc>
+                  <a:txBody>
+                    <a:bodyPr/>
+                    <a:lstStyle/>
+                    <a:p>
+                      <a:pPr indent="0" marL="0">
+                        <a:buNone/>
+                      </a:pPr>
+                      <a:r>
+                        <a:rPr lang="en-US" sz="1250" dirty="0">
+                          <a:solidFill>
+                            <a:srgbClr val="1F3D49"/>
+                          </a:solidFill>
+                          <a:latin typeface="Calibri" pitchFamily="34" charset="0"/>
+                          <a:ea typeface="Calibri" pitchFamily="34" charset="-122"/>
+                          <a:cs typeface="Calibri" pitchFamily="34" charset="-120"/>
+                        </a:rPr>
+                        <a:t>0.0000</a:t>
+                      </a:r>
+                      <a:endParaRPr lang="en-US" sz="1250" dirty="0">
+                        <a:latin typeface="Calibri" charset="0"/>
+                        <a:ea typeface="Calibri" charset="0"/>
+                        <a:cs typeface="Calibri" charset="0"/>
+                      </a:endParaRPr>
+                    </a:p>
+                  </a:txBody>
+                  <a:tcPr marL="91440" marR="91440" marT="45720" marB="45720">
+                    <a:lnL w="12700" cap="flat" cmpd="sng" algn="ctr">
+                      <a:solidFill>
+                        <a:srgbClr val="DCE7EB"/>
+                      </a:solidFill>
+                      <a:prstDash val="solid"/>
+                      <a:round/>
+                      <a:headEnd type="none" w="med" len="med"/>
+                      <a:tailEnd type="none" w="med" len="med"/>
+                    </a:lnL>
+                    <a:lnR w="12700" cap="flat" cmpd="sng" algn="ctr">
+                      <a:solidFill>
+                        <a:srgbClr val="DCE7EB"/>
+                      </a:solidFill>
+                      <a:prstDash val="solid"/>
+                      <a:round/>
+                      <a:headEnd type="none" w="med" len="med"/>
+                      <a:tailEnd type="none" w="med" len="med"/>
+                    </a:lnR>
+                    <a:lnT w="12700" cap="flat" cmpd="sng" algn="ctr">
+                      <a:solidFill>
+                        <a:srgbClr val="DCE7EB"/>
+                      </a:solidFill>
+                      <a:prstDash val="solid"/>
+                      <a:round/>
+                      <a:headEnd type="none" w="med" len="med"/>
+                      <a:tailEnd type="none" w="med" len="med"/>
+                    </a:lnT>
+                    <a:lnB w="12700" cap="flat" cmpd="sng" algn="ctr">
+                      <a:solidFill>
+                        <a:srgbClr val="DCE7EB"/>
+                      </a:solidFill>
+                      <a:prstDash val="solid"/>
+                      <a:round/>
+                      <a:headEnd type="none" w="med" len="med"/>
+                      <a:tailEnd type="none" w="med" len="med"/>
+                    </a:lnB>
+                    <a:solidFill>
+                      <a:srgbClr val="FFFFFF"/>
+                    </a:solidFill>
+                  </a:tcPr>
+                </a:tc>
+              </a:tr>
+            </a:tbl>
+          </a:graphicData>
+        </a:graphic>
+      </p:graphicFrame>
+      <p:sp>
+        <p:nvSpPr>
+          <p:cNvPr id="10" name="Shape 6"/>
+          <p:cNvSpPr/>
+          <p:nvPr/>
+        </p:nvSpPr>
+        <p:spPr>
+          <a:xfrm>
+            <a:off x="6675120" y="4626864"/>
+            <a:ext cx="4956048" cy="1005840"/>
           </a:xfrm>
           <a:prstGeom prst="roundRect">
             <a:avLst>
-              <a:gd name="adj" fmla="val 8696"/>
-            </a:avLst>
-          </a:prstGeom>
-          <a:solidFill>
-            <a:srgbClr val="EEF4F6"/>
-          </a:solidFill>
-          <a:ln w="12700">
-            <a:solidFill>
-              <a:srgbClr val="EEF4F6"/>
-            </a:solidFill>
-            <a:prstDash val="solid"/>
-          </a:ln>
-        </p:spPr>
-      </p:sp>
-      <p:sp>
-        <p:nvSpPr>
-          <p:cNvPr id="12" name="Shape 9"/>
-          <p:cNvSpPr/>
-          <p:nvPr/>
-        </p:nvSpPr>
-        <p:spPr>
-          <a:xfrm>
-            <a:off x="6108192" y="2990088"/>
-            <a:ext cx="347472" cy="347472"/>
-          </a:xfrm>
-          <a:prstGeom prst="ellipse">
-            <a:avLst/>
-          </a:prstGeom>
-          <a:solidFill>
-            <a:srgbClr val="12556B"/>
-          </a:solidFill>
-          <a:ln w="12700">
-            <a:solidFill>
-              <a:srgbClr val="333333"/>
-            </a:solidFill>
-            <a:prstDash val="solid"/>
-          </a:ln>
-        </p:spPr>
-      </p:sp>
-      <p:sp>
-        <p:nvSpPr>
-          <p:cNvPr id="13" name="Text 10"/>
-          <p:cNvSpPr/>
-          <p:nvPr/>
-        </p:nvSpPr>
-        <p:spPr>
-          <a:xfrm>
-            <a:off x="6108192" y="2990088"/>
-            <a:ext cx="347472" cy="347472"/>
-          </a:xfrm>
-          <a:prstGeom prst="rect">
-            <a:avLst/>
-          </a:prstGeom>
-          <a:noFill/>
-          <a:ln/>
-        </p:spPr>
-        <p:txBody>
-          <a:bodyPr wrap="square" lIns="0" tIns="0" rIns="0" bIns="0" rtlCol="0" anchor="ctr"/>
-          <a:lstStyle/>
-          <a:p>
-            <a:pPr algn="ctr" indent="0" marL="0">
-              <a:buNone/>
-            </a:pPr>
-            <a:r>
-              <a:rPr lang="en-US" sz="1200" b="1" dirty="0">
-                <a:solidFill>
-                  <a:srgbClr val="FFFFFF"/>
-                </a:solidFill>
-                <a:latin typeface="Cambria" pitchFamily="34" charset="0"/>
-                <a:ea typeface="Cambria" pitchFamily="34" charset="-122"/>
-                <a:cs typeface="Cambria" pitchFamily="34" charset="-120"/>
-              </a:rPr>
-              <a:t>2</a:t>
-            </a:r>
-            <a:endParaRPr lang="en-US" sz="1200" dirty="0"/>
-          </a:p>
-        </p:txBody>
-      </p:sp>
-      <p:sp>
-        <p:nvSpPr>
-          <p:cNvPr id="14" name="Text 11"/>
-          <p:cNvSpPr/>
-          <p:nvPr/>
-        </p:nvSpPr>
-        <p:spPr>
-          <a:xfrm>
-            <a:off x="6583680" y="2852928"/>
-            <a:ext cx="4846320" cy="310896"/>
-          </a:xfrm>
-          <a:prstGeom prst="rect">
-            <a:avLst/>
-          </a:prstGeom>
-          <a:noFill/>
-          <a:ln/>
-        </p:spPr>
-        <p:txBody>
-          <a:bodyPr wrap="square" lIns="0" tIns="0" rIns="0" bIns="0" rtlCol="0" anchor="ctr"/>
-          <a:lstStyle/>
-          <a:p>
-            <a:pPr indent="0" marL="0">
-              <a:buNone/>
-            </a:pPr>
-            <a:r>
-              <a:rPr lang="en-US" sz="1300" b="1" dirty="0">
-                <a:solidFill>
-                  <a:srgbClr val="0B2E3B"/>
-                </a:solidFill>
-                <a:latin typeface="Calibri" pitchFamily="34" charset="0"/>
-                <a:ea typeface="Calibri" pitchFamily="34" charset="-122"/>
-                <a:cs typeface="Calibri" pitchFamily="34" charset="-120"/>
-              </a:rPr>
-              <a:t>Where the patient is discharged to</a:t>
-            </a:r>
-            <a:endParaRPr lang="en-US" sz="1300" dirty="0"/>
-          </a:p>
-        </p:txBody>
-      </p:sp>
-      <p:sp>
-        <p:nvSpPr>
-          <p:cNvPr id="15" name="Text 12"/>
-          <p:cNvSpPr/>
-          <p:nvPr/>
-        </p:nvSpPr>
-        <p:spPr>
-          <a:xfrm>
-            <a:off x="6583680" y="3145536"/>
-            <a:ext cx="4846320" cy="347472"/>
-          </a:xfrm>
-          <a:prstGeom prst="rect">
-            <a:avLst/>
-          </a:prstGeom>
-          <a:noFill/>
-          <a:ln/>
-        </p:spPr>
-        <p:txBody>
-          <a:bodyPr wrap="square" lIns="0" tIns="0" rIns="0" bIns="0" rtlCol="0" anchor="ctr"/>
-          <a:lstStyle/>
-          <a:p>
-            <a:pPr indent="0" marL="0">
-              <a:buNone/>
-            </a:pPr>
-            <a:r>
-              <a:rPr lang="en-US" sz="1150" dirty="0">
-                <a:solidFill>
-                  <a:srgbClr val="34525E"/>
-                </a:solidFill>
-                <a:latin typeface="Calibri" pitchFamily="34" charset="0"/>
-                <a:ea typeface="Calibri" pitchFamily="34" charset="-122"/>
-                <a:cs typeface="Calibri" pitchFamily="34" charset="-120"/>
-              </a:rPr>
-              <a:t>Home lowers risk; a care facility raises it — a proxy for frailty.</a:t>
-            </a:r>
-            <a:endParaRPr lang="en-US" sz="1150" dirty="0"/>
-          </a:p>
-        </p:txBody>
-      </p:sp>
-      <p:sp>
-        <p:nvSpPr>
-          <p:cNvPr id="16" name="Shape 13"/>
-          <p:cNvSpPr/>
-          <p:nvPr/>
-        </p:nvSpPr>
-        <p:spPr>
-          <a:xfrm>
-            <a:off x="5870448" y="3712464"/>
-            <a:ext cx="5760720" cy="841248"/>
-          </a:xfrm>
-          <a:prstGeom prst="roundRect">
-            <a:avLst>
-              <a:gd name="adj" fmla="val 8696"/>
-            </a:avLst>
-          </a:prstGeom>
-          <a:solidFill>
-            <a:srgbClr val="EEF4F6"/>
-          </a:solidFill>
-          <a:ln w="12700">
-            <a:solidFill>
-              <a:srgbClr val="EEF4F6"/>
-            </a:solidFill>
-            <a:prstDash val="solid"/>
-          </a:ln>
-        </p:spPr>
-      </p:sp>
-      <p:sp>
-        <p:nvSpPr>
-          <p:cNvPr id="17" name="Shape 14"/>
-          <p:cNvSpPr/>
-          <p:nvPr/>
-        </p:nvSpPr>
-        <p:spPr>
-          <a:xfrm>
-            <a:off x="6108192" y="3959352"/>
-            <a:ext cx="347472" cy="347472"/>
-          </a:xfrm>
-          <a:prstGeom prst="ellipse">
-            <a:avLst/>
-          </a:prstGeom>
-          <a:solidFill>
-            <a:srgbClr val="12556B"/>
-          </a:solidFill>
-          <a:ln w="12700">
-            <a:solidFill>
-              <a:srgbClr val="333333"/>
-            </a:solidFill>
-            <a:prstDash val="solid"/>
-          </a:ln>
-        </p:spPr>
-      </p:sp>
-      <p:sp>
-        <p:nvSpPr>
-          <p:cNvPr id="18" name="Text 15"/>
-          <p:cNvSpPr/>
-          <p:nvPr/>
-        </p:nvSpPr>
-        <p:spPr>
-          <a:xfrm>
-            <a:off x="6108192" y="3959352"/>
-            <a:ext cx="347472" cy="347472"/>
-          </a:xfrm>
-          <a:prstGeom prst="rect">
-            <a:avLst/>
-          </a:prstGeom>
-          <a:noFill/>
-          <a:ln/>
-        </p:spPr>
-        <p:txBody>
-          <a:bodyPr wrap="square" lIns="0" tIns="0" rIns="0" bIns="0" rtlCol="0" anchor="ctr"/>
-          <a:lstStyle/>
-          <a:p>
-            <a:pPr algn="ctr" indent="0" marL="0">
-              <a:buNone/>
-            </a:pPr>
-            <a:r>
-              <a:rPr lang="en-US" sz="1200" b="1" dirty="0">
-                <a:solidFill>
-                  <a:srgbClr val="FFFFFF"/>
-                </a:solidFill>
-                <a:latin typeface="Cambria" pitchFamily="34" charset="0"/>
-                <a:ea typeface="Cambria" pitchFamily="34" charset="-122"/>
-                <a:cs typeface="Cambria" pitchFamily="34" charset="-120"/>
-              </a:rPr>
-              <a:t>3</a:t>
-            </a:r>
-            <a:endParaRPr lang="en-US" sz="1200" dirty="0"/>
-          </a:p>
-        </p:txBody>
-      </p:sp>
-      <p:sp>
-        <p:nvSpPr>
-          <p:cNvPr id="19" name="Text 16"/>
-          <p:cNvSpPr/>
-          <p:nvPr/>
-        </p:nvSpPr>
-        <p:spPr>
-          <a:xfrm>
-            <a:off x="6583680" y="3822192"/>
-            <a:ext cx="4846320" cy="310896"/>
-          </a:xfrm>
-          <a:prstGeom prst="rect">
-            <a:avLst/>
-          </a:prstGeom>
-          <a:noFill/>
-          <a:ln/>
-        </p:spPr>
-        <p:txBody>
-          <a:bodyPr wrap="square" lIns="0" tIns="0" rIns="0" bIns="0" rtlCol="0" anchor="ctr"/>
-          <a:lstStyle/>
-          <a:p>
-            <a:pPr indent="0" marL="0">
-              <a:buNone/>
-            </a:pPr>
-            <a:r>
-              <a:rPr lang="en-US" sz="1300" b="1" dirty="0">
-                <a:solidFill>
-                  <a:srgbClr val="0B2E3B"/>
-                </a:solidFill>
-                <a:latin typeface="Calibri" pitchFamily="34" charset="0"/>
-                <a:ea typeface="Calibri" pitchFamily="34" charset="-122"/>
-                <a:cs typeface="Calibri" pitchFamily="34" charset="-120"/>
-              </a:rPr>
-              <a:t>Depth of prior encounter history</a:t>
-            </a:r>
-            <a:endParaRPr lang="en-US" sz="1300" dirty="0"/>
-          </a:p>
-        </p:txBody>
-      </p:sp>
-      <p:sp>
-        <p:nvSpPr>
-          <p:cNvPr id="20" name="Text 17"/>
-          <p:cNvSpPr/>
-          <p:nvPr/>
-        </p:nvSpPr>
-        <p:spPr>
-          <a:xfrm>
-            <a:off x="6583680" y="4114800"/>
-            <a:ext cx="4846320" cy="347472"/>
-          </a:xfrm>
-          <a:prstGeom prst="rect">
-            <a:avLst/>
-          </a:prstGeom>
-          <a:noFill/>
-          <a:ln/>
-        </p:spPr>
-        <p:txBody>
-          <a:bodyPr wrap="square" lIns="0" tIns="0" rIns="0" bIns="0" rtlCol="0" anchor="ctr"/>
-          <a:lstStyle/>
-          <a:p>
-            <a:pPr indent="0" marL="0">
-              <a:buNone/>
-            </a:pPr>
-            <a:r>
-              <a:rPr lang="en-US" sz="1150" dirty="0">
-                <a:solidFill>
-                  <a:srgbClr val="34525E"/>
-                </a:solidFill>
-                <a:latin typeface="Calibri" pitchFamily="34" charset="0"/>
-                <a:ea typeface="Calibri" pitchFamily="34" charset="-122"/>
-                <a:cs typeface="Calibri" pitchFamily="34" charset="-120"/>
-              </a:rPr>
-              <a:t>How often this patient has been through the system before.</a:t>
-            </a:r>
-            <a:endParaRPr lang="en-US" sz="1150" dirty="0"/>
-          </a:p>
-        </p:txBody>
-      </p:sp>
-      <p:sp>
-        <p:nvSpPr>
-          <p:cNvPr id="21" name="Shape 18"/>
-          <p:cNvSpPr/>
-          <p:nvPr/>
-        </p:nvSpPr>
-        <p:spPr>
-          <a:xfrm>
-            <a:off x="5870448" y="4681728"/>
-            <a:ext cx="5760720" cy="841248"/>
-          </a:xfrm>
-          <a:prstGeom prst="roundRect">
-            <a:avLst>
-              <a:gd name="adj" fmla="val 8696"/>
-            </a:avLst>
-          </a:prstGeom>
-          <a:solidFill>
-            <a:srgbClr val="EEF4F6"/>
-          </a:solidFill>
-          <a:ln w="12700">
-            <a:solidFill>
-              <a:srgbClr val="EEF4F6"/>
-            </a:solidFill>
-            <a:prstDash val="solid"/>
-          </a:ln>
-        </p:spPr>
-      </p:sp>
-      <p:sp>
-        <p:nvSpPr>
-          <p:cNvPr id="22" name="Shape 19"/>
-          <p:cNvSpPr/>
-          <p:nvPr/>
-        </p:nvSpPr>
-        <p:spPr>
-          <a:xfrm>
-            <a:off x="6108192" y="4928616"/>
-            <a:ext cx="347472" cy="347472"/>
-          </a:xfrm>
-          <a:prstGeom prst="ellipse">
-            <a:avLst/>
-          </a:prstGeom>
-          <a:solidFill>
-            <a:srgbClr val="12556B"/>
-          </a:solidFill>
-          <a:ln w="12700">
-            <a:solidFill>
-              <a:srgbClr val="333333"/>
-            </a:solidFill>
-            <a:prstDash val="solid"/>
-          </a:ln>
-        </p:spPr>
-      </p:sp>
-      <p:sp>
-        <p:nvSpPr>
-          <p:cNvPr id="23" name="Text 20"/>
-          <p:cNvSpPr/>
-          <p:nvPr/>
-        </p:nvSpPr>
-        <p:spPr>
-          <a:xfrm>
-            <a:off x="6108192" y="4928616"/>
-            <a:ext cx="347472" cy="347472"/>
-          </a:xfrm>
-          <a:prstGeom prst="rect">
-            <a:avLst/>
-          </a:prstGeom>
-          <a:noFill/>
-          <a:ln/>
-        </p:spPr>
-        <p:txBody>
-          <a:bodyPr wrap="square" lIns="0" tIns="0" rIns="0" bIns="0" rtlCol="0" anchor="ctr"/>
-          <a:lstStyle/>
-          <a:p>
-            <a:pPr algn="ctr" indent="0" marL="0">
-              <a:buNone/>
-            </a:pPr>
-            <a:r>
-              <a:rPr lang="en-US" sz="1200" b="1" dirty="0">
-                <a:solidFill>
-                  <a:srgbClr val="FFFFFF"/>
-                </a:solidFill>
-                <a:latin typeface="Cambria" pitchFamily="34" charset="0"/>
-                <a:ea typeface="Cambria" pitchFamily="34" charset="-122"/>
-                <a:cs typeface="Cambria" pitchFamily="34" charset="-120"/>
-              </a:rPr>
-              <a:t>4</a:t>
-            </a:r>
-            <a:endParaRPr lang="en-US" sz="1200" dirty="0"/>
-          </a:p>
-        </p:txBody>
-      </p:sp>
-      <p:sp>
-        <p:nvSpPr>
-          <p:cNvPr id="24" name="Text 21"/>
-          <p:cNvSpPr/>
-          <p:nvPr/>
-        </p:nvSpPr>
-        <p:spPr>
-          <a:xfrm>
-            <a:off x="6583680" y="4791456"/>
-            <a:ext cx="4846320" cy="310896"/>
-          </a:xfrm>
-          <a:prstGeom prst="rect">
-            <a:avLst/>
-          </a:prstGeom>
-          <a:noFill/>
-          <a:ln/>
-        </p:spPr>
-        <p:txBody>
-          <a:bodyPr wrap="square" lIns="0" tIns="0" rIns="0" bIns="0" rtlCol="0" anchor="ctr"/>
-          <a:lstStyle/>
-          <a:p>
-            <a:pPr indent="0" marL="0">
-              <a:buNone/>
-            </a:pPr>
-            <a:r>
-              <a:rPr lang="en-US" sz="1300" b="1" dirty="0">
-                <a:solidFill>
-                  <a:srgbClr val="0B2E3B"/>
-                </a:solidFill>
-                <a:latin typeface="Calibri" pitchFamily="34" charset="0"/>
-                <a:ea typeface="Calibri" pitchFamily="34" charset="-122"/>
-                <a:cs typeface="Calibri" pitchFamily="34" charset="-120"/>
-              </a:rPr>
-              <a:t>Primary diagnosis group</a:t>
-            </a:r>
-            <a:endParaRPr lang="en-US" sz="1300" dirty="0"/>
-          </a:p>
-        </p:txBody>
-      </p:sp>
-      <p:sp>
-        <p:nvSpPr>
-          <p:cNvPr id="25" name="Text 22"/>
-          <p:cNvSpPr/>
-          <p:nvPr/>
-        </p:nvSpPr>
-        <p:spPr>
-          <a:xfrm>
-            <a:off x="6583680" y="5084064"/>
-            <a:ext cx="4846320" cy="347472"/>
-          </a:xfrm>
-          <a:prstGeom prst="rect">
-            <a:avLst/>
-          </a:prstGeom>
-          <a:noFill/>
-          <a:ln/>
-        </p:spPr>
-        <p:txBody>
-          <a:bodyPr wrap="square" lIns="0" tIns="0" rIns="0" bIns="0" rtlCol="0" anchor="ctr"/>
-          <a:lstStyle/>
-          <a:p>
-            <a:pPr indent="0" marL="0">
-              <a:buNone/>
-            </a:pPr>
-            <a:r>
-              <a:rPr lang="en-US" sz="1150" dirty="0">
-                <a:solidFill>
-                  <a:srgbClr val="34525E"/>
-                </a:solidFill>
-                <a:latin typeface="Calibri" pitchFamily="34" charset="0"/>
-                <a:ea typeface="Calibri" pitchFamily="34" charset="-122"/>
-                <a:cs typeface="Calibri" pitchFamily="34" charset="-120"/>
-              </a:rPr>
-              <a:t>Circulatory pushes risk up; respiratory pushes it down.</a:t>
-            </a:r>
-            <a:endParaRPr lang="en-US" sz="1150" dirty="0"/>
-          </a:p>
-        </p:txBody>
-      </p:sp>
-      <p:sp>
-        <p:nvSpPr>
-          <p:cNvPr id="26" name="Shape 23"/>
-          <p:cNvSpPr/>
-          <p:nvPr/>
-        </p:nvSpPr>
-        <p:spPr>
-          <a:xfrm>
-            <a:off x="5870448" y="5669280"/>
-            <a:ext cx="5760720" cy="566928"/>
-          </a:xfrm>
-          <a:prstGeom prst="roundRect">
-            <a:avLst>
-              <a:gd name="adj" fmla="val 12903"/>
+              <a:gd name="adj" fmla="val 7273"/>
             </a:avLst>
           </a:prstGeom>
           <a:solidFill>
@@ -5411,14 +5721,14 @@
       </p:sp>
       <p:sp>
         <p:nvSpPr>
-          <p:cNvPr id="27" name="Text 24"/>
-          <p:cNvSpPr/>
-          <p:nvPr/>
-        </p:nvSpPr>
-        <p:spPr>
-          <a:xfrm>
-            <a:off x="6108192" y="5669280"/>
-            <a:ext cx="5303520" cy="566928"/>
+          <p:cNvPr id="11" name="Text 7"/>
+          <p:cNvSpPr/>
+          <p:nvPr/>
+        </p:nvSpPr>
+        <p:spPr>
+          <a:xfrm>
+            <a:off x="6931152" y="4626864"/>
+            <a:ext cx="4443984" cy="1005840"/>
           </a:xfrm>
           <a:prstGeom prst="rect">
             <a:avLst/>
@@ -5431,20 +5741,62 @@
           <a:lstStyle/>
           <a:p>
             <a:pPr indent="0" marL="0">
+              <a:lnSpc>
+                <a:spcPts val="1600"/>
+              </a:lnSpc>
               <a:buNone/>
             </a:pPr>
             <a:r>
-              <a:rPr lang="en-US" sz="1200" b="1" dirty="0">
-                <a:solidFill>
-                  <a:srgbClr val="1F5F44"/>
+              <a:rPr lang="en-US" sz="1250" b="1" dirty="0">
+                <a:solidFill>
+                  <a:srgbClr val="1D4D39"/>
                 </a:solidFill>
                 <a:latin typeface="Calibri" pitchFamily="34" charset="0"/>
                 <a:ea typeface="Calibri" pitchFamily="34" charset="-122"/>
                 <a:cs typeface="Calibri" pitchFamily="34" charset="-120"/>
               </a:rPr>
-              <a:t>Nothing suspicious at the top — no identifier, no date artefact.</a:t>
-            </a:r>
-            <a:endParaRPr lang="en-US" sz="1200" dirty="0"/>
+              <a:t>15.6 extra readmissions caught per 1,000 discharges, net of the false alarms they cost.</a:t>
+            </a:r>
+            <a:endParaRPr lang="en-US" sz="1250" dirty="0"/>
+          </a:p>
+        </p:txBody>
+      </p:sp>
+      <p:sp>
+        <p:nvSpPr>
+          <p:cNvPr id="12" name="Text 8"/>
+          <p:cNvSpPr/>
+          <p:nvPr/>
+        </p:nvSpPr>
+        <p:spPr>
+          <a:xfrm>
+            <a:off x="566928" y="6163056"/>
+            <a:ext cx="11057839" cy="237744"/>
+          </a:xfrm>
+          <a:prstGeom prst="rect">
+            <a:avLst/>
+          </a:prstGeom>
+          <a:noFill/>
+          <a:ln/>
+        </p:spPr>
+        <p:txBody>
+          <a:bodyPr wrap="square" lIns="0" tIns="0" rIns="0" bIns="0" rtlCol="0" anchor="ctr"/>
+          <a:lstStyle/>
+          <a:p>
+            <a:pPr indent="0" marL="0">
+              <a:buNone/>
+            </a:pPr>
+            <a:r>
+              <a:rPr lang="en-US" sz="950" i="1" dirty="0">
+                <a:solidFill>
+                  <a:srgbClr val="9AB0B9"/>
+                </a:solidFill>
+                <a:latin typeface="Calibri" pitchFamily="34" charset="0"/>
+                <a:ea typeface="Calibri" pitchFamily="34" charset="-122"/>
+                <a:cs typeface="Calibri" pitchFamily="34" charset="-120"/>
+              </a:rPr>
+              <a:t>Model beats both alternatives for pt between 0.025 and 0.43 — every realistic hospital sits inside that range.</a:t>
+            </a:r>
+            <a:endParaRPr lang="en-US" sz="950" dirty="0"/>
           </a:p>
         </p:txBody>
       </p:sp>
@@ -5513,7 +5865,7 @@
                 <a:ea typeface="Calibri" pitchFamily="34" charset="-122"/>
                 <a:cs typeface="Calibri" pitchFamily="34" charset="-120"/>
               </a:rPr>
-              <a:t>ABLATION STUDY</a:t>
+              <a:t>EXPLAINABILITY</a:t>
             </a:r>
             <a:endParaRPr lang="en-US" sz="1100" dirty="0"/>
           </a:p>
@@ -5552,7 +5904,7 @@
                 <a:ea typeface="Cambria" pitchFamily="34" charset="-122"/>
                 <a:cs typeface="Cambria" pitchFamily="34" charset="-120"/>
               </a:rPr>
-              <a:t>Seven approaches tried. None beat the baseline.</a:t>
+              <a:t>What the model is actually reading</a:t>
             </a:r>
             <a:endParaRPr lang="en-US" sz="3200" dirty="0"/>
           </a:p>
@@ -5591,6 +5943,921 @@
                 <a:ea typeface="Calibri" pitchFamily="34" charset="-122"/>
                 <a:cs typeface="Calibri" pitchFamily="34" charset="-120"/>
               </a:rPr>
+              <a:t>Permutation importance on held-out data and SHAP agree on the top of the list.</a:t>
+            </a:r>
+            <a:endParaRPr lang="en-US" sz="1250" dirty="0"/>
+          </a:p>
+        </p:txBody>
+      </p:sp>
+      <p:pic>
+        <p:nvPicPr>
+          <p:cNvPr id="5" name="Image 0" descr="/Users/Shikhar/ML Bubble hackathon/reports/figures/shap_beeswarm.png">    </p:cNvPr>
+          <p:cNvPicPr>
+            <a:picLocks noChangeAspect="1"/>
+          </p:cNvPicPr>
+          <p:nvPr/>
+        </p:nvPicPr>
+        <p:blipFill>
+          <a:blip r:embed="rId1"/>
+          <a:stretch>
+            <a:fillRect/>
+          </a:stretch>
+        </p:blipFill>
+        <p:spPr>
+          <a:xfrm>
+            <a:off x="566928" y="1700784"/>
+            <a:ext cx="5029200" cy="3931920"/>
+          </a:xfrm>
+          <a:prstGeom prst="rect">
+            <a:avLst/>
+          </a:prstGeom>
+        </p:spPr>
+      </p:pic>
+      <p:sp>
+        <p:nvSpPr>
+          <p:cNvPr id="6" name="Shape 3"/>
+          <p:cNvSpPr/>
+          <p:nvPr/>
+        </p:nvSpPr>
+        <p:spPr>
+          <a:xfrm>
+            <a:off x="5870448" y="1773936"/>
+            <a:ext cx="5760720" cy="841248"/>
+          </a:xfrm>
+          <a:prstGeom prst="roundRect">
+            <a:avLst>
+              <a:gd name="adj" fmla="val 8696"/>
+            </a:avLst>
+          </a:prstGeom>
+          <a:solidFill>
+            <a:srgbClr val="EEF4F6"/>
+          </a:solidFill>
+          <a:ln w="12700">
+            <a:solidFill>
+              <a:srgbClr val="EEF4F6"/>
+            </a:solidFill>
+            <a:prstDash val="solid"/>
+          </a:ln>
+        </p:spPr>
+      </p:sp>
+      <p:sp>
+        <p:nvSpPr>
+          <p:cNvPr id="7" name="Shape 4"/>
+          <p:cNvSpPr/>
+          <p:nvPr/>
+        </p:nvSpPr>
+        <p:spPr>
+          <a:xfrm>
+            <a:off x="6108192" y="2020824"/>
+            <a:ext cx="347472" cy="347472"/>
+          </a:xfrm>
+          <a:prstGeom prst="ellipse">
+            <a:avLst/>
+          </a:prstGeom>
+          <a:solidFill>
+            <a:srgbClr val="12556B"/>
+          </a:solidFill>
+          <a:ln w="12700">
+            <a:solidFill>
+              <a:srgbClr val="333333"/>
+            </a:solidFill>
+            <a:prstDash val="solid"/>
+          </a:ln>
+        </p:spPr>
+      </p:sp>
+      <p:sp>
+        <p:nvSpPr>
+          <p:cNvPr id="8" name="Text 5"/>
+          <p:cNvSpPr/>
+          <p:nvPr/>
+        </p:nvSpPr>
+        <p:spPr>
+          <a:xfrm>
+            <a:off x="6108192" y="2020824"/>
+            <a:ext cx="347472" cy="347472"/>
+          </a:xfrm>
+          <a:prstGeom prst="rect">
+            <a:avLst/>
+          </a:prstGeom>
+          <a:noFill/>
+          <a:ln/>
+        </p:spPr>
+        <p:txBody>
+          <a:bodyPr wrap="square" lIns="0" tIns="0" rIns="0" bIns="0" rtlCol="0" anchor="ctr"/>
+          <a:lstStyle/>
+          <a:p>
+            <a:pPr algn="ctr" indent="0" marL="0">
+              <a:buNone/>
+            </a:pPr>
+            <a:r>
+              <a:rPr lang="en-US" sz="1200" b="1" dirty="0">
+                <a:solidFill>
+                  <a:srgbClr val="FFFFFF"/>
+                </a:solidFill>
+                <a:latin typeface="Cambria" pitchFamily="34" charset="0"/>
+                <a:ea typeface="Cambria" pitchFamily="34" charset="-122"/>
+                <a:cs typeface="Cambria" pitchFamily="34" charset="-120"/>
+              </a:rPr>
+              <a:t>1</a:t>
+            </a:r>
+            <a:endParaRPr lang="en-US" sz="1200" dirty="0"/>
+          </a:p>
+        </p:txBody>
+      </p:sp>
+      <p:sp>
+        <p:nvSpPr>
+          <p:cNvPr id="9" name="Text 6"/>
+          <p:cNvSpPr/>
+          <p:nvPr/>
+        </p:nvSpPr>
+        <p:spPr>
+          <a:xfrm>
+            <a:off x="6583680" y="1883664"/>
+            <a:ext cx="4846320" cy="310896"/>
+          </a:xfrm>
+          <a:prstGeom prst="rect">
+            <a:avLst/>
+          </a:prstGeom>
+          <a:noFill/>
+          <a:ln/>
+        </p:spPr>
+        <p:txBody>
+          <a:bodyPr wrap="square" lIns="0" tIns="0" rIns="0" bIns="0" rtlCol="0" anchor="ctr"/>
+          <a:lstStyle/>
+          <a:p>
+            <a:pPr indent="0" marL="0">
+              <a:buNone/>
+            </a:pPr>
+            <a:r>
+              <a:rPr lang="en-US" sz="1300" b="1" dirty="0">
+                <a:solidFill>
+                  <a:srgbClr val="0B2E3B"/>
+                </a:solidFill>
+                <a:latin typeface="Calibri" pitchFamily="34" charset="0"/>
+                <a:ea typeface="Calibri" pitchFamily="34" charset="-122"/>
+                <a:cs typeface="Calibri" pitchFamily="34" charset="-120"/>
+              </a:rPr>
+              <a:t>Prior inpatient admissions</a:t>
+            </a:r>
+            <a:endParaRPr lang="en-US" sz="1300" dirty="0"/>
+          </a:p>
+        </p:txBody>
+      </p:sp>
+      <p:sp>
+        <p:nvSpPr>
+          <p:cNvPr id="10" name="Text 7"/>
+          <p:cNvSpPr/>
+          <p:nvPr/>
+        </p:nvSpPr>
+        <p:spPr>
+          <a:xfrm>
+            <a:off x="6583680" y="2176272"/>
+            <a:ext cx="4846320" cy="347472"/>
+          </a:xfrm>
+          <a:prstGeom prst="rect">
+            <a:avLst/>
+          </a:prstGeom>
+          <a:noFill/>
+          <a:ln/>
+        </p:spPr>
+        <p:txBody>
+          <a:bodyPr wrap="square" lIns="0" tIns="0" rIns="0" bIns="0" rtlCol="0" anchor="ctr"/>
+          <a:lstStyle/>
+          <a:p>
+            <a:pPr indent="0" marL="0">
+              <a:buNone/>
+            </a:pPr>
+            <a:r>
+              <a:rPr lang="en-US" sz="1150" dirty="0">
+                <a:solidFill>
+                  <a:srgbClr val="34525E"/>
+                </a:solidFill>
+                <a:latin typeface="Calibri" pitchFamily="34" charset="0"/>
+                <a:ea typeface="Calibri" pitchFamily="34" charset="-122"/>
+                <a:cs typeface="Calibri" pitchFamily="34" charset="-120"/>
+              </a:rPr>
+              <a:t>Utilisation history beats anything measured during the stay.</a:t>
+            </a:r>
+            <a:endParaRPr lang="en-US" sz="1150" dirty="0"/>
+          </a:p>
+        </p:txBody>
+      </p:sp>
+      <p:sp>
+        <p:nvSpPr>
+          <p:cNvPr id="11" name="Shape 8"/>
+          <p:cNvSpPr/>
+          <p:nvPr/>
+        </p:nvSpPr>
+        <p:spPr>
+          <a:xfrm>
+            <a:off x="5870448" y="2743200"/>
+            <a:ext cx="5760720" cy="841248"/>
+          </a:xfrm>
+          <a:prstGeom prst="roundRect">
+            <a:avLst>
+              <a:gd name="adj" fmla="val 8696"/>
+            </a:avLst>
+          </a:prstGeom>
+          <a:solidFill>
+            <a:srgbClr val="EEF4F6"/>
+          </a:solidFill>
+          <a:ln w="12700">
+            <a:solidFill>
+              <a:srgbClr val="EEF4F6"/>
+            </a:solidFill>
+            <a:prstDash val="solid"/>
+          </a:ln>
+        </p:spPr>
+      </p:sp>
+      <p:sp>
+        <p:nvSpPr>
+          <p:cNvPr id="12" name="Shape 9"/>
+          <p:cNvSpPr/>
+          <p:nvPr/>
+        </p:nvSpPr>
+        <p:spPr>
+          <a:xfrm>
+            <a:off x="6108192" y="2990088"/>
+            <a:ext cx="347472" cy="347472"/>
+          </a:xfrm>
+          <a:prstGeom prst="ellipse">
+            <a:avLst/>
+          </a:prstGeom>
+          <a:solidFill>
+            <a:srgbClr val="12556B"/>
+          </a:solidFill>
+          <a:ln w="12700">
+            <a:solidFill>
+              <a:srgbClr val="333333"/>
+            </a:solidFill>
+            <a:prstDash val="solid"/>
+          </a:ln>
+        </p:spPr>
+      </p:sp>
+      <p:sp>
+        <p:nvSpPr>
+          <p:cNvPr id="13" name="Text 10"/>
+          <p:cNvSpPr/>
+          <p:nvPr/>
+        </p:nvSpPr>
+        <p:spPr>
+          <a:xfrm>
+            <a:off x="6108192" y="2990088"/>
+            <a:ext cx="347472" cy="347472"/>
+          </a:xfrm>
+          <a:prstGeom prst="rect">
+            <a:avLst/>
+          </a:prstGeom>
+          <a:noFill/>
+          <a:ln/>
+        </p:spPr>
+        <p:txBody>
+          <a:bodyPr wrap="square" lIns="0" tIns="0" rIns="0" bIns="0" rtlCol="0" anchor="ctr"/>
+          <a:lstStyle/>
+          <a:p>
+            <a:pPr algn="ctr" indent="0" marL="0">
+              <a:buNone/>
+            </a:pPr>
+            <a:r>
+              <a:rPr lang="en-US" sz="1200" b="1" dirty="0">
+                <a:solidFill>
+                  <a:srgbClr val="FFFFFF"/>
+                </a:solidFill>
+                <a:latin typeface="Cambria" pitchFamily="34" charset="0"/>
+                <a:ea typeface="Cambria" pitchFamily="34" charset="-122"/>
+                <a:cs typeface="Cambria" pitchFamily="34" charset="-120"/>
+              </a:rPr>
+              <a:t>2</a:t>
+            </a:r>
+            <a:endParaRPr lang="en-US" sz="1200" dirty="0"/>
+          </a:p>
+        </p:txBody>
+      </p:sp>
+      <p:sp>
+        <p:nvSpPr>
+          <p:cNvPr id="14" name="Text 11"/>
+          <p:cNvSpPr/>
+          <p:nvPr/>
+        </p:nvSpPr>
+        <p:spPr>
+          <a:xfrm>
+            <a:off x="6583680" y="2852928"/>
+            <a:ext cx="4846320" cy="310896"/>
+          </a:xfrm>
+          <a:prstGeom prst="rect">
+            <a:avLst/>
+          </a:prstGeom>
+          <a:noFill/>
+          <a:ln/>
+        </p:spPr>
+        <p:txBody>
+          <a:bodyPr wrap="square" lIns="0" tIns="0" rIns="0" bIns="0" rtlCol="0" anchor="ctr"/>
+          <a:lstStyle/>
+          <a:p>
+            <a:pPr indent="0" marL="0">
+              <a:buNone/>
+            </a:pPr>
+            <a:r>
+              <a:rPr lang="en-US" sz="1300" b="1" dirty="0">
+                <a:solidFill>
+                  <a:srgbClr val="0B2E3B"/>
+                </a:solidFill>
+                <a:latin typeface="Calibri" pitchFamily="34" charset="0"/>
+                <a:ea typeface="Calibri" pitchFamily="34" charset="-122"/>
+                <a:cs typeface="Calibri" pitchFamily="34" charset="-120"/>
+              </a:rPr>
+              <a:t>Where the patient is discharged to</a:t>
+            </a:r>
+            <a:endParaRPr lang="en-US" sz="1300" dirty="0"/>
+          </a:p>
+        </p:txBody>
+      </p:sp>
+      <p:sp>
+        <p:nvSpPr>
+          <p:cNvPr id="15" name="Text 12"/>
+          <p:cNvSpPr/>
+          <p:nvPr/>
+        </p:nvSpPr>
+        <p:spPr>
+          <a:xfrm>
+            <a:off x="6583680" y="3145536"/>
+            <a:ext cx="4846320" cy="347472"/>
+          </a:xfrm>
+          <a:prstGeom prst="rect">
+            <a:avLst/>
+          </a:prstGeom>
+          <a:noFill/>
+          <a:ln/>
+        </p:spPr>
+        <p:txBody>
+          <a:bodyPr wrap="square" lIns="0" tIns="0" rIns="0" bIns="0" rtlCol="0" anchor="ctr"/>
+          <a:lstStyle/>
+          <a:p>
+            <a:pPr indent="0" marL="0">
+              <a:buNone/>
+            </a:pPr>
+            <a:r>
+              <a:rPr lang="en-US" sz="1150" dirty="0">
+                <a:solidFill>
+                  <a:srgbClr val="34525E"/>
+                </a:solidFill>
+                <a:latin typeface="Calibri" pitchFamily="34" charset="0"/>
+                <a:ea typeface="Calibri" pitchFamily="34" charset="-122"/>
+                <a:cs typeface="Calibri" pitchFamily="34" charset="-120"/>
+              </a:rPr>
+              <a:t>Home lowers risk; a care facility raises it — a proxy for frailty.</a:t>
+            </a:r>
+            <a:endParaRPr lang="en-US" sz="1150" dirty="0"/>
+          </a:p>
+        </p:txBody>
+      </p:sp>
+      <p:sp>
+        <p:nvSpPr>
+          <p:cNvPr id="16" name="Shape 13"/>
+          <p:cNvSpPr/>
+          <p:nvPr/>
+        </p:nvSpPr>
+        <p:spPr>
+          <a:xfrm>
+            <a:off x="5870448" y="3712464"/>
+            <a:ext cx="5760720" cy="841248"/>
+          </a:xfrm>
+          <a:prstGeom prst="roundRect">
+            <a:avLst>
+              <a:gd name="adj" fmla="val 8696"/>
+            </a:avLst>
+          </a:prstGeom>
+          <a:solidFill>
+            <a:srgbClr val="EEF4F6"/>
+          </a:solidFill>
+          <a:ln w="12700">
+            <a:solidFill>
+              <a:srgbClr val="EEF4F6"/>
+            </a:solidFill>
+            <a:prstDash val="solid"/>
+          </a:ln>
+        </p:spPr>
+      </p:sp>
+      <p:sp>
+        <p:nvSpPr>
+          <p:cNvPr id="17" name="Shape 14"/>
+          <p:cNvSpPr/>
+          <p:nvPr/>
+        </p:nvSpPr>
+        <p:spPr>
+          <a:xfrm>
+            <a:off x="6108192" y="3959352"/>
+            <a:ext cx="347472" cy="347472"/>
+          </a:xfrm>
+          <a:prstGeom prst="ellipse">
+            <a:avLst/>
+          </a:prstGeom>
+          <a:solidFill>
+            <a:srgbClr val="12556B"/>
+          </a:solidFill>
+          <a:ln w="12700">
+            <a:solidFill>
+              <a:srgbClr val="333333"/>
+            </a:solidFill>
+            <a:prstDash val="solid"/>
+          </a:ln>
+        </p:spPr>
+      </p:sp>
+      <p:sp>
+        <p:nvSpPr>
+          <p:cNvPr id="18" name="Text 15"/>
+          <p:cNvSpPr/>
+          <p:nvPr/>
+        </p:nvSpPr>
+        <p:spPr>
+          <a:xfrm>
+            <a:off x="6108192" y="3959352"/>
+            <a:ext cx="347472" cy="347472"/>
+          </a:xfrm>
+          <a:prstGeom prst="rect">
+            <a:avLst/>
+          </a:prstGeom>
+          <a:noFill/>
+          <a:ln/>
+        </p:spPr>
+        <p:txBody>
+          <a:bodyPr wrap="square" lIns="0" tIns="0" rIns="0" bIns="0" rtlCol="0" anchor="ctr"/>
+          <a:lstStyle/>
+          <a:p>
+            <a:pPr algn="ctr" indent="0" marL="0">
+              <a:buNone/>
+            </a:pPr>
+            <a:r>
+              <a:rPr lang="en-US" sz="1200" b="1" dirty="0">
+                <a:solidFill>
+                  <a:srgbClr val="FFFFFF"/>
+                </a:solidFill>
+                <a:latin typeface="Cambria" pitchFamily="34" charset="0"/>
+                <a:ea typeface="Cambria" pitchFamily="34" charset="-122"/>
+                <a:cs typeface="Cambria" pitchFamily="34" charset="-120"/>
+              </a:rPr>
+              <a:t>3</a:t>
+            </a:r>
+            <a:endParaRPr lang="en-US" sz="1200" dirty="0"/>
+          </a:p>
+        </p:txBody>
+      </p:sp>
+      <p:sp>
+        <p:nvSpPr>
+          <p:cNvPr id="19" name="Text 16"/>
+          <p:cNvSpPr/>
+          <p:nvPr/>
+        </p:nvSpPr>
+        <p:spPr>
+          <a:xfrm>
+            <a:off x="6583680" y="3822192"/>
+            <a:ext cx="4846320" cy="310896"/>
+          </a:xfrm>
+          <a:prstGeom prst="rect">
+            <a:avLst/>
+          </a:prstGeom>
+          <a:noFill/>
+          <a:ln/>
+        </p:spPr>
+        <p:txBody>
+          <a:bodyPr wrap="square" lIns="0" tIns="0" rIns="0" bIns="0" rtlCol="0" anchor="ctr"/>
+          <a:lstStyle/>
+          <a:p>
+            <a:pPr indent="0" marL="0">
+              <a:buNone/>
+            </a:pPr>
+            <a:r>
+              <a:rPr lang="en-US" sz="1300" b="1" dirty="0">
+                <a:solidFill>
+                  <a:srgbClr val="0B2E3B"/>
+                </a:solidFill>
+                <a:latin typeface="Calibri" pitchFamily="34" charset="0"/>
+                <a:ea typeface="Calibri" pitchFamily="34" charset="-122"/>
+                <a:cs typeface="Calibri" pitchFamily="34" charset="-120"/>
+              </a:rPr>
+              <a:t>Depth of prior encounter history</a:t>
+            </a:r>
+            <a:endParaRPr lang="en-US" sz="1300" dirty="0"/>
+          </a:p>
+        </p:txBody>
+      </p:sp>
+      <p:sp>
+        <p:nvSpPr>
+          <p:cNvPr id="20" name="Text 17"/>
+          <p:cNvSpPr/>
+          <p:nvPr/>
+        </p:nvSpPr>
+        <p:spPr>
+          <a:xfrm>
+            <a:off x="6583680" y="4114800"/>
+            <a:ext cx="4846320" cy="347472"/>
+          </a:xfrm>
+          <a:prstGeom prst="rect">
+            <a:avLst/>
+          </a:prstGeom>
+          <a:noFill/>
+          <a:ln/>
+        </p:spPr>
+        <p:txBody>
+          <a:bodyPr wrap="square" lIns="0" tIns="0" rIns="0" bIns="0" rtlCol="0" anchor="ctr"/>
+          <a:lstStyle/>
+          <a:p>
+            <a:pPr indent="0" marL="0">
+              <a:buNone/>
+            </a:pPr>
+            <a:r>
+              <a:rPr lang="en-US" sz="1150" dirty="0">
+                <a:solidFill>
+                  <a:srgbClr val="34525E"/>
+                </a:solidFill>
+                <a:latin typeface="Calibri" pitchFamily="34" charset="0"/>
+                <a:ea typeface="Calibri" pitchFamily="34" charset="-122"/>
+                <a:cs typeface="Calibri" pitchFamily="34" charset="-120"/>
+              </a:rPr>
+              <a:t>How often this patient has been through the system before.</a:t>
+            </a:r>
+            <a:endParaRPr lang="en-US" sz="1150" dirty="0"/>
+          </a:p>
+        </p:txBody>
+      </p:sp>
+      <p:sp>
+        <p:nvSpPr>
+          <p:cNvPr id="21" name="Shape 18"/>
+          <p:cNvSpPr/>
+          <p:nvPr/>
+        </p:nvSpPr>
+        <p:spPr>
+          <a:xfrm>
+            <a:off x="5870448" y="4681728"/>
+            <a:ext cx="5760720" cy="841248"/>
+          </a:xfrm>
+          <a:prstGeom prst="roundRect">
+            <a:avLst>
+              <a:gd name="adj" fmla="val 8696"/>
+            </a:avLst>
+          </a:prstGeom>
+          <a:solidFill>
+            <a:srgbClr val="EEF4F6"/>
+          </a:solidFill>
+          <a:ln w="12700">
+            <a:solidFill>
+              <a:srgbClr val="EEF4F6"/>
+            </a:solidFill>
+            <a:prstDash val="solid"/>
+          </a:ln>
+        </p:spPr>
+      </p:sp>
+      <p:sp>
+        <p:nvSpPr>
+          <p:cNvPr id="22" name="Shape 19"/>
+          <p:cNvSpPr/>
+          <p:nvPr/>
+        </p:nvSpPr>
+        <p:spPr>
+          <a:xfrm>
+            <a:off x="6108192" y="4928616"/>
+            <a:ext cx="347472" cy="347472"/>
+          </a:xfrm>
+          <a:prstGeom prst="ellipse">
+            <a:avLst/>
+          </a:prstGeom>
+          <a:solidFill>
+            <a:srgbClr val="12556B"/>
+          </a:solidFill>
+          <a:ln w="12700">
+            <a:solidFill>
+              <a:srgbClr val="333333"/>
+            </a:solidFill>
+            <a:prstDash val="solid"/>
+          </a:ln>
+        </p:spPr>
+      </p:sp>
+      <p:sp>
+        <p:nvSpPr>
+          <p:cNvPr id="23" name="Text 20"/>
+          <p:cNvSpPr/>
+          <p:nvPr/>
+        </p:nvSpPr>
+        <p:spPr>
+          <a:xfrm>
+            <a:off x="6108192" y="4928616"/>
+            <a:ext cx="347472" cy="347472"/>
+          </a:xfrm>
+          <a:prstGeom prst="rect">
+            <a:avLst/>
+          </a:prstGeom>
+          <a:noFill/>
+          <a:ln/>
+        </p:spPr>
+        <p:txBody>
+          <a:bodyPr wrap="square" lIns="0" tIns="0" rIns="0" bIns="0" rtlCol="0" anchor="ctr"/>
+          <a:lstStyle/>
+          <a:p>
+            <a:pPr algn="ctr" indent="0" marL="0">
+              <a:buNone/>
+            </a:pPr>
+            <a:r>
+              <a:rPr lang="en-US" sz="1200" b="1" dirty="0">
+                <a:solidFill>
+                  <a:srgbClr val="FFFFFF"/>
+                </a:solidFill>
+                <a:latin typeface="Cambria" pitchFamily="34" charset="0"/>
+                <a:ea typeface="Cambria" pitchFamily="34" charset="-122"/>
+                <a:cs typeface="Cambria" pitchFamily="34" charset="-120"/>
+              </a:rPr>
+              <a:t>4</a:t>
+            </a:r>
+            <a:endParaRPr lang="en-US" sz="1200" dirty="0"/>
+          </a:p>
+        </p:txBody>
+      </p:sp>
+      <p:sp>
+        <p:nvSpPr>
+          <p:cNvPr id="24" name="Text 21"/>
+          <p:cNvSpPr/>
+          <p:nvPr/>
+        </p:nvSpPr>
+        <p:spPr>
+          <a:xfrm>
+            <a:off x="6583680" y="4791456"/>
+            <a:ext cx="4846320" cy="310896"/>
+          </a:xfrm>
+          <a:prstGeom prst="rect">
+            <a:avLst/>
+          </a:prstGeom>
+          <a:noFill/>
+          <a:ln/>
+        </p:spPr>
+        <p:txBody>
+          <a:bodyPr wrap="square" lIns="0" tIns="0" rIns="0" bIns="0" rtlCol="0" anchor="ctr"/>
+          <a:lstStyle/>
+          <a:p>
+            <a:pPr indent="0" marL="0">
+              <a:buNone/>
+            </a:pPr>
+            <a:r>
+              <a:rPr lang="en-US" sz="1300" b="1" dirty="0">
+                <a:solidFill>
+                  <a:srgbClr val="0B2E3B"/>
+                </a:solidFill>
+                <a:latin typeface="Calibri" pitchFamily="34" charset="0"/>
+                <a:ea typeface="Calibri" pitchFamily="34" charset="-122"/>
+                <a:cs typeface="Calibri" pitchFamily="34" charset="-120"/>
+              </a:rPr>
+              <a:t>Primary diagnosis group</a:t>
+            </a:r>
+            <a:endParaRPr lang="en-US" sz="1300" dirty="0"/>
+          </a:p>
+        </p:txBody>
+      </p:sp>
+      <p:sp>
+        <p:nvSpPr>
+          <p:cNvPr id="25" name="Text 22"/>
+          <p:cNvSpPr/>
+          <p:nvPr/>
+        </p:nvSpPr>
+        <p:spPr>
+          <a:xfrm>
+            <a:off x="6583680" y="5084064"/>
+            <a:ext cx="4846320" cy="347472"/>
+          </a:xfrm>
+          <a:prstGeom prst="rect">
+            <a:avLst/>
+          </a:prstGeom>
+          <a:noFill/>
+          <a:ln/>
+        </p:spPr>
+        <p:txBody>
+          <a:bodyPr wrap="square" lIns="0" tIns="0" rIns="0" bIns="0" rtlCol="0" anchor="ctr"/>
+          <a:lstStyle/>
+          <a:p>
+            <a:pPr indent="0" marL="0">
+              <a:buNone/>
+            </a:pPr>
+            <a:r>
+              <a:rPr lang="en-US" sz="1150" dirty="0">
+                <a:solidFill>
+                  <a:srgbClr val="34525E"/>
+                </a:solidFill>
+                <a:latin typeface="Calibri" pitchFamily="34" charset="0"/>
+                <a:ea typeface="Calibri" pitchFamily="34" charset="-122"/>
+                <a:cs typeface="Calibri" pitchFamily="34" charset="-120"/>
+              </a:rPr>
+              <a:t>Circulatory pushes risk up; respiratory pushes it down.</a:t>
+            </a:r>
+            <a:endParaRPr lang="en-US" sz="1150" dirty="0"/>
+          </a:p>
+        </p:txBody>
+      </p:sp>
+      <p:sp>
+        <p:nvSpPr>
+          <p:cNvPr id="26" name="Shape 23"/>
+          <p:cNvSpPr/>
+          <p:nvPr/>
+        </p:nvSpPr>
+        <p:spPr>
+          <a:xfrm>
+            <a:off x="5870448" y="5669280"/>
+            <a:ext cx="5760720" cy="566928"/>
+          </a:xfrm>
+          <a:prstGeom prst="roundRect">
+            <a:avLst>
+              <a:gd name="adj" fmla="val 12903"/>
+            </a:avLst>
+          </a:prstGeom>
+          <a:solidFill>
+            <a:srgbClr val="E2F0E9"/>
+          </a:solidFill>
+          <a:ln w="12700">
+            <a:solidFill>
+              <a:srgbClr val="E2F0E9"/>
+            </a:solidFill>
+            <a:prstDash val="solid"/>
+          </a:ln>
+        </p:spPr>
+      </p:sp>
+      <p:sp>
+        <p:nvSpPr>
+          <p:cNvPr id="27" name="Text 24"/>
+          <p:cNvSpPr/>
+          <p:nvPr/>
+        </p:nvSpPr>
+        <p:spPr>
+          <a:xfrm>
+            <a:off x="6108192" y="5669280"/>
+            <a:ext cx="5303520" cy="566928"/>
+          </a:xfrm>
+          <a:prstGeom prst="rect">
+            <a:avLst/>
+          </a:prstGeom>
+          <a:noFill/>
+          <a:ln/>
+        </p:spPr>
+        <p:txBody>
+          <a:bodyPr wrap="square" lIns="0" tIns="0" rIns="0" bIns="0" rtlCol="0" anchor="ctr"/>
+          <a:lstStyle/>
+          <a:p>
+            <a:pPr indent="0" marL="0">
+              <a:buNone/>
+            </a:pPr>
+            <a:r>
+              <a:rPr lang="en-US" sz="1200" b="1" dirty="0">
+                <a:solidFill>
+                  <a:srgbClr val="1F5F44"/>
+                </a:solidFill>
+                <a:latin typeface="Calibri" pitchFamily="34" charset="0"/>
+                <a:ea typeface="Calibri" pitchFamily="34" charset="-122"/>
+                <a:cs typeface="Calibri" pitchFamily="34" charset="-120"/>
+              </a:rPr>
+              <a:t>Nothing suspicious at the top — no identifier, no date artefact.</a:t>
+            </a:r>
+            <a:endParaRPr lang="en-US" sz="1200" dirty="0"/>
+          </a:p>
+        </p:txBody>
+      </p:sp>
+    </p:spTree>
+  </p:cSld>
+  <p:clrMapOvr>
+    <a:masterClrMapping/>
+  </p:clrMapOvr>
+</p:sld>
+</file>
+
+<file path=ppt/slides/slide13.xml><?xml version="1.0" encoding="utf-8"?>
+<p:sld xmlns:a="http://schemas.openxmlformats.org/drawingml/2006/main" xmlns:r="http://schemas.openxmlformats.org/officeDocument/2006/relationships" xmlns:p="http://schemas.openxmlformats.org/presentationml/2006/main">
+  <p:cSld name="Slide 13">
+    <p:bg>
+      <p:bgPr>
+        <a:solidFill>
+          <a:srgbClr val="FFFFFF"/>
+        </a:solidFill>
+      </p:bgPr>
+    </p:bg>
+    <p:spTree>
+      <p:nvGrpSpPr>
+        <p:cNvPr id="1" name=""/>
+        <p:cNvGrpSpPr/>
+        <p:nvPr/>
+      </p:nvGrpSpPr>
+      <p:grpSpPr>
+        <a:xfrm>
+          <a:off x="0" y="0"/>
+          <a:ext cx="0" cy="0"/>
+          <a:chOff x="0" y="0"/>
+          <a:chExt cx="0" cy="0"/>
+        </a:xfrm>
+      </p:grpSpPr>
+      <p:sp>
+        <p:nvSpPr>
+          <p:cNvPr id="2" name="Text 0"/>
+          <p:cNvSpPr/>
+          <p:nvPr/>
+        </p:nvSpPr>
+        <p:spPr>
+          <a:xfrm>
+            <a:off x="566928" y="310896"/>
+            <a:ext cx="11057839" cy="237744"/>
+          </a:xfrm>
+          <a:prstGeom prst="rect">
+            <a:avLst/>
+          </a:prstGeom>
+          <a:noFill/>
+          <a:ln/>
+        </p:spPr>
+        <p:txBody>
+          <a:bodyPr wrap="square" lIns="0" tIns="0" rIns="0" bIns="0" rtlCol="0" anchor="ctr"/>
+          <a:lstStyle/>
+          <a:p>
+            <a:pPr indent="0" marL="0">
+              <a:buNone/>
+            </a:pPr>
+            <a:r>
+              <a:rPr lang="en-US" sz="1100" b="1" spc="200" kern="0" dirty="0">
+                <a:solidFill>
+                  <a:srgbClr val="2E8FA8"/>
+                </a:solidFill>
+                <a:latin typeface="Calibri" pitchFamily="34" charset="0"/>
+                <a:ea typeface="Calibri" pitchFamily="34" charset="-122"/>
+                <a:cs typeface="Calibri" pitchFamily="34" charset="-120"/>
+              </a:rPr>
+              <a:t>ABLATION STUDY</a:t>
+            </a:r>
+            <a:endParaRPr lang="en-US" sz="1100" dirty="0"/>
+          </a:p>
+        </p:txBody>
+      </p:sp>
+      <p:sp>
+        <p:nvSpPr>
+          <p:cNvPr id="3" name="Text 1"/>
+          <p:cNvSpPr/>
+          <p:nvPr/>
+        </p:nvSpPr>
+        <p:spPr>
+          <a:xfrm>
+            <a:off x="566928" y="566928"/>
+            <a:ext cx="11057839" cy="658368"/>
+          </a:xfrm>
+          <a:prstGeom prst="rect">
+            <a:avLst/>
+          </a:prstGeom>
+          <a:noFill/>
+          <a:ln/>
+        </p:spPr>
+        <p:txBody>
+          <a:bodyPr wrap="square" lIns="0" tIns="0" rIns="0" bIns="0" rtlCol="0" anchor="t"/>
+          <a:lstStyle/>
+          <a:p>
+            <a:pPr indent="0" marL="0">
+              <a:buNone/>
+            </a:pPr>
+            <a:r>
+              <a:rPr lang="en-US" sz="3200" b="1" dirty="0">
+                <a:solidFill>
+                  <a:srgbClr val="0B2E3B"/>
+                </a:solidFill>
+                <a:latin typeface="Cambria" pitchFamily="34" charset="0"/>
+                <a:ea typeface="Cambria" pitchFamily="34" charset="-122"/>
+                <a:cs typeface="Cambria" pitchFamily="34" charset="-120"/>
+              </a:rPr>
+              <a:t>Seven approaches tried. None beat the baseline.</a:t>
+            </a:r>
+            <a:endParaRPr lang="en-US" sz="3200" dirty="0"/>
+          </a:p>
+        </p:txBody>
+      </p:sp>
+      <p:sp>
+        <p:nvSpPr>
+          <p:cNvPr id="4" name="Text 2"/>
+          <p:cNvSpPr/>
+          <p:nvPr/>
+        </p:nvSpPr>
+        <p:spPr>
+          <a:xfrm>
+            <a:off x="566928" y="1316736"/>
+            <a:ext cx="11057839" cy="274320"/>
+          </a:xfrm>
+          <a:prstGeom prst="rect">
+            <a:avLst/>
+          </a:prstGeom>
+          <a:noFill/>
+          <a:ln/>
+        </p:spPr>
+        <p:txBody>
+          <a:bodyPr wrap="square" lIns="0" tIns="0" rIns="0" bIns="0" rtlCol="0" anchor="ctr"/>
+          <a:lstStyle/>
+          <a:p>
+            <a:pPr indent="0" marL="0">
+              <a:buNone/>
+            </a:pPr>
+            <a:r>
+              <a:rPr lang="en-US" sz="1250" dirty="0">
+                <a:solidFill>
+                  <a:srgbClr val="5A7683"/>
+                </a:solidFill>
+                <a:latin typeface="Calibri" pitchFamily="34" charset="0"/>
+                <a:ea typeface="Calibri" pitchFamily="34" charset="-122"/>
+                <a:cs typeface="Calibri" pitchFamily="34" charset="-120"/>
+              </a:rPr>
               <a:t>All scored with identical 5-fold GroupKFold on training patients. The test set was not read during any of this.</a:t>
             </a:r>
             <a:endParaRPr lang="en-US" sz="1250" dirty="0"/>
@@ -5599,7 +6866,7 @@
       </p:sp>
       <p:graphicFrame>
         <p:nvGraphicFramePr>
-          <p:cNvPr id="13" name="Table 0"/>
+          <p:cNvPr id="14" name="Table 0"/>
           <p:cNvGraphicFramePr>
             <a:graphicFrameLocks noGrp="1"/>
           </p:cNvGraphicFramePr>
@@ -8018,12 +9285,12 @@
           <a:p>
             <a:pPr indent="0" marL="0">
               <a:lnSpc>
-                <a:spcPts val="1700"/>
+                <a:spcPts val="1600"/>
               </a:lnSpc>
               <a:buNone/>
             </a:pPr>
             <a:r>
-              <a:rPr lang="en-US" sz="1250" dirty="0">
+              <a:rPr lang="en-US" sz="1200" dirty="0">
                 <a:solidFill>
                   <a:srgbClr val="34525E"/>
                 </a:solidFill>
@@ -8031,9 +9298,38 @@
                 <a:ea typeface="Calibri" pitchFamily="34" charset="-122"/>
                 <a:cs typeface="Calibri" pitchFamily="34" charset="-120"/>
               </a:rPr>
-              <a:t>Seven independent approaches converging on 0.22 is itself the finding: this is the information ceiling of administrative billing data for this outcome, not an under-tuning problem.</a:t>
-            </a:r>
-            <a:endParaRPr lang="en-US" sz="1250" dirty="0"/>
+              <a:t>Seven independent approaches converging on 0.22 is itself the finding: more modelling sophistication does not help here.</a:t>
+            </a:r>
+            <a:endParaRPr lang="en-US" sz="1200" dirty="0"/>
+          </a:p>
+          <a:p>
+            <a:pPr indent="0" marL="0">
+              <a:lnSpc>
+                <a:spcPts val="1600"/>
+              </a:lnSpc>
+              <a:buNone/>
+            </a:pPr>
+            <a:endParaRPr lang="en-US" sz="1200" dirty="0"/>
+          </a:p>
+          <a:p>
+            <a:pPr indent="0" marL="0">
+              <a:lnSpc>
+                <a:spcPts val="1600"/>
+              </a:lnSpc>
+              <a:buNone/>
+            </a:pPr>
+            <a:r>
+              <a:rPr lang="en-US" sz="1200" dirty="0">
+                <a:solidFill>
+                  <a:srgbClr val="34525E"/>
+                </a:solidFill>
+                <a:latin typeface="Calibri" pitchFamily="34" charset="0"/>
+                <a:ea typeface="Calibri" pitchFamily="34" charset="-122"/>
+                <a:cs typeface="Calibri" pitchFamily="34" charset="-120"/>
+              </a:rPr>
+              <a:t>That is a ceiling on method — the learning curve shows it is not a ceiling on data.</a:t>
+            </a:r>
+            <a:endParaRPr lang="en-US" sz="1200" dirty="0"/>
           </a:p>
         </p:txBody>
       </p:sp>
@@ -8084,9 +9380,9 @@
 </p:sld>
 </file>
 
-<file path=ppt/slides/slide13.xml><?xml version="1.0" encoding="utf-8"?>
+<file path=ppt/slides/slide14.xml><?xml version="1.0" encoding="utf-8"?>
 <p:sld xmlns:a="http://schemas.openxmlformats.org/drawingml/2006/main" xmlns:r="http://schemas.openxmlformats.org/officeDocument/2006/relationships" xmlns:p="http://schemas.openxmlformats.org/presentationml/2006/main">
-  <p:cSld name="Slide 13">
+  <p:cSld name="Slide 14">
     <p:bg>
       <p:bgPr>
         <a:solidFill>
@@ -8141,7 +9437,7 @@
                 <a:ea typeface="Calibri" pitchFamily="34" charset="-122"/>
                 <a:cs typeface="Calibri" pitchFamily="34" charset="-120"/>
               </a:rPr>
-              <a:t>FAIRNESS</a:t>
+              <a:t>ROBUSTNESS</a:t>
             </a:r>
             <a:endParaRPr lang="en-US" sz="1100" dirty="0"/>
           </a:p>
@@ -8180,7 +9476,7 @@
                 <a:ea typeface="Cambria" pitchFamily="34" charset="-122"/>
                 <a:cs typeface="Cambria" pitchFamily="34" charset="-120"/>
               </a:rPr>
-              <a:t>The subgroup gap that would block deployment</a:t>
+              <a:t>Is 0.684 real, and is it the ceiling?</a:t>
             </a:r>
             <a:endParaRPr lang="en-US" sz="3200" dirty="0"/>
           </a:p>
@@ -8219,6 +9515,575 @@
                 <a:ea typeface="Calibri" pitchFamily="34" charset="-122"/>
                 <a:cs typeface="Calibri" pitchFamily="34" charset="-120"/>
               </a:rPr>
+              <a:t>Two questions the headline number depends on but cannot answer on its own.</a:t>
+            </a:r>
+            <a:endParaRPr lang="en-US" sz="1250" dirty="0"/>
+          </a:p>
+        </p:txBody>
+      </p:sp>
+      <p:pic>
+        <p:nvPicPr>
+          <p:cNvPr id="5" name="Image 0" descr="/Users/Shikhar/ML Bubble hackathon/reports/figures/robustness.png">    </p:cNvPr>
+          <p:cNvPicPr>
+            <a:picLocks noChangeAspect="1"/>
+          </p:cNvPicPr>
+          <p:nvPr/>
+        </p:nvPicPr>
+        <p:blipFill>
+          <a:blip r:embed="rId1"/>
+          <a:stretch>
+            <a:fillRect/>
+          </a:stretch>
+        </p:blipFill>
+        <p:spPr>
+          <a:xfrm>
+            <a:off x="566928" y="1682496"/>
+            <a:ext cx="6858000" cy="2505456"/>
+          </a:xfrm>
+          <a:prstGeom prst="rect">
+            <a:avLst/>
+          </a:prstGeom>
+        </p:spPr>
+      </p:pic>
+      <p:sp>
+        <p:nvSpPr>
+          <p:cNvPr id="6" name="Shape 3"/>
+          <p:cNvSpPr/>
+          <p:nvPr/>
+        </p:nvSpPr>
+        <p:spPr>
+          <a:xfrm>
+            <a:off x="7607808" y="1682496"/>
+            <a:ext cx="4023360" cy="2505456"/>
+          </a:xfrm>
+          <a:prstGeom prst="roundRect">
+            <a:avLst>
+              <a:gd name="adj" fmla="val 2920"/>
+            </a:avLst>
+          </a:prstGeom>
+          <a:solidFill>
+            <a:srgbClr val="FBE4E0"/>
+          </a:solidFill>
+          <a:ln w="12700">
+            <a:solidFill>
+              <a:srgbClr val="FBE4E0"/>
+            </a:solidFill>
+            <a:prstDash val="solid"/>
+          </a:ln>
+        </p:spPr>
+      </p:sp>
+      <p:sp>
+        <p:nvSpPr>
+          <p:cNvPr id="7" name="Text 4"/>
+          <p:cNvSpPr/>
+          <p:nvPr/>
+        </p:nvSpPr>
+        <p:spPr>
+          <a:xfrm>
+            <a:off x="7863840" y="1847088"/>
+            <a:ext cx="3511296" cy="566928"/>
+          </a:xfrm>
+          <a:prstGeom prst="rect">
+            <a:avLst/>
+          </a:prstGeom>
+          <a:noFill/>
+          <a:ln/>
+        </p:spPr>
+        <p:txBody>
+          <a:bodyPr wrap="square" lIns="0" tIns="0" rIns="0" bIns="0" rtlCol="0" anchor="ctr"/>
+          <a:lstStyle/>
+          <a:p>
+            <a:pPr indent="0" marL="0">
+              <a:lnSpc>
+                <a:spcPts val="1900"/>
+              </a:lnSpc>
+              <a:buNone/>
+            </a:pPr>
+            <a:r>
+              <a:rPr lang="en-US" sz="1450" b="1" dirty="0">
+                <a:solidFill>
+                  <a:srgbClr val="9E3423"/>
+                </a:solidFill>
+                <a:latin typeface="Cambria" pitchFamily="34" charset="0"/>
+                <a:ea typeface="Cambria" pitchFamily="34" charset="-122"/>
+                <a:cs typeface="Cambria" pitchFamily="34" charset="-120"/>
+              </a:rPr>
+              <a:t>The reported split is the luckiest of seven</a:t>
+            </a:r>
+            <a:endParaRPr lang="en-US" sz="1450" dirty="0"/>
+          </a:p>
+        </p:txBody>
+      </p:sp>
+      <p:sp>
+        <p:nvSpPr>
+          <p:cNvPr id="8" name="Text 5"/>
+          <p:cNvSpPr/>
+          <p:nvPr/>
+        </p:nvSpPr>
+        <p:spPr>
+          <a:xfrm>
+            <a:off x="7863840" y="2487168"/>
+            <a:ext cx="3511296" cy="1517904"/>
+          </a:xfrm>
+          <a:prstGeom prst="rect">
+            <a:avLst/>
+          </a:prstGeom>
+          <a:noFill/>
+          <a:ln/>
+        </p:spPr>
+        <p:txBody>
+          <a:bodyPr wrap="square" lIns="0" tIns="0" rIns="0" bIns="0" rtlCol="0" anchor="ctr"/>
+          <a:lstStyle/>
+          <a:p>
+            <a:pPr indent="0" marL="0">
+              <a:lnSpc>
+                <a:spcPts val="1500"/>
+              </a:lnSpc>
+              <a:buNone/>
+            </a:pPr>
+            <a:r>
+              <a:rPr lang="en-US" sz="1150" dirty="0">
+                <a:solidFill>
+                  <a:srgbClr val="7A2A1C"/>
+                </a:solidFill>
+                <a:latin typeface="Calibri" pitchFamily="34" charset="0"/>
+                <a:ea typeface="Calibri" pitchFamily="34" charset="-122"/>
+                <a:cs typeface="Calibri" pitchFamily="34" charset="-120"/>
+              </a:rPr>
+              <a:t>Across seven seeds the same pipeline averages PR-AUC 0.224 ± 0.010 and ROC-AUC 0.678 ± 0.006.</a:t>
+            </a:r>
+            <a:endParaRPr lang="en-US" sz="1150" dirty="0"/>
+          </a:p>
+          <a:p>
+            <a:pPr indent="0" marL="0">
+              <a:lnSpc>
+                <a:spcPts val="1500"/>
+              </a:lnSpc>
+              <a:buNone/>
+            </a:pPr>
+            <a:endParaRPr lang="en-US" sz="1150" dirty="0"/>
+          </a:p>
+          <a:p>
+            <a:pPr indent="0" marL="0">
+              <a:lnSpc>
+                <a:spcPts val="1500"/>
+              </a:lnSpc>
+              <a:buNone/>
+            </a:pPr>
+            <a:r>
+              <a:rPr lang="en-US" sz="1150" dirty="0">
+                <a:solidFill>
+                  <a:srgbClr val="7A2A1C"/>
+                </a:solidFill>
+                <a:latin typeface="Calibri" pitchFamily="34" charset="0"/>
+                <a:ea typeface="Calibri" pitchFamily="34" charset="-122"/>
+                <a:cs typeface="Calibri" pitchFamily="34" charset="-120"/>
+              </a:rPr>
+              <a:t>Seed 42 was fixed before any evaluation, so this is luck rather than selection — but we report it rather than bury it.</a:t>
+            </a:r>
+            <a:endParaRPr lang="en-US" sz="1150" dirty="0"/>
+          </a:p>
+        </p:txBody>
+      </p:sp>
+      <p:sp>
+        <p:nvSpPr>
+          <p:cNvPr id="9" name="Shape 6"/>
+          <p:cNvSpPr/>
+          <p:nvPr/>
+        </p:nvSpPr>
+        <p:spPr>
+          <a:xfrm>
+            <a:off x="566928" y="4352544"/>
+            <a:ext cx="5468112" cy="1316736"/>
+          </a:xfrm>
+          <a:prstGeom prst="roundRect">
+            <a:avLst>
+              <a:gd name="adj" fmla="val 5556"/>
+            </a:avLst>
+          </a:prstGeom>
+          <a:solidFill>
+            <a:srgbClr val="EEF4F6"/>
+          </a:solidFill>
+          <a:ln w="12700">
+            <a:solidFill>
+              <a:srgbClr val="EEF4F6"/>
+            </a:solidFill>
+            <a:prstDash val="solid"/>
+          </a:ln>
+        </p:spPr>
+      </p:sp>
+      <p:sp>
+        <p:nvSpPr>
+          <p:cNvPr id="10" name="Text 7"/>
+          <p:cNvSpPr/>
+          <p:nvPr/>
+        </p:nvSpPr>
+        <p:spPr>
+          <a:xfrm>
+            <a:off x="822960" y="4498848"/>
+            <a:ext cx="4956048" cy="274320"/>
+          </a:xfrm>
+          <a:prstGeom prst="rect">
+            <a:avLst/>
+          </a:prstGeom>
+          <a:noFill/>
+          <a:ln/>
+        </p:spPr>
+        <p:txBody>
+          <a:bodyPr wrap="square" lIns="0" tIns="0" rIns="0" bIns="0" rtlCol="0" anchor="ctr"/>
+          <a:lstStyle/>
+          <a:p>
+            <a:pPr indent="0" marL="0">
+              <a:buNone/>
+            </a:pPr>
+            <a:r>
+              <a:rPr lang="en-US" sz="1400" b="1" dirty="0">
+                <a:solidFill>
+                  <a:srgbClr val="0B2E3B"/>
+                </a:solidFill>
+                <a:latin typeface="Cambria" pitchFamily="34" charset="0"/>
+                <a:ea typeface="Cambria" pitchFamily="34" charset="-122"/>
+                <a:cs typeface="Cambria" pitchFamily="34" charset="-120"/>
+              </a:rPr>
+              <a:t>95% confidence intervals</a:t>
+            </a:r>
+            <a:endParaRPr lang="en-US" sz="1400" dirty="0"/>
+          </a:p>
+        </p:txBody>
+      </p:sp>
+      <p:sp>
+        <p:nvSpPr>
+          <p:cNvPr id="11" name="Text 8"/>
+          <p:cNvSpPr/>
+          <p:nvPr/>
+        </p:nvSpPr>
+        <p:spPr>
+          <a:xfrm>
+            <a:off x="822960" y="4791456"/>
+            <a:ext cx="4956048" cy="804672"/>
+          </a:xfrm>
+          <a:prstGeom prst="rect">
+            <a:avLst/>
+          </a:prstGeom>
+          <a:noFill/>
+          <a:ln/>
+        </p:spPr>
+        <p:txBody>
+          <a:bodyPr wrap="square" lIns="0" tIns="0" rIns="0" bIns="0" rtlCol="0" anchor="ctr"/>
+          <a:lstStyle/>
+          <a:p>
+            <a:pPr indent="0" marL="0">
+              <a:lnSpc>
+                <a:spcPts val="1500"/>
+              </a:lnSpc>
+              <a:buNone/>
+            </a:pPr>
+            <a:r>
+              <a:rPr lang="en-US" sz="1150" dirty="0">
+                <a:solidFill>
+                  <a:srgbClr val="34525E"/>
+                </a:solidFill>
+                <a:latin typeface="Calibri" pitchFamily="34" charset="0"/>
+                <a:ea typeface="Calibri" pitchFamily="34" charset="-122"/>
+                <a:cs typeface="Calibri" pitchFamily="34" charset="-120"/>
+              </a:rPr>
+              <a:t>ROC-AUC 0.684 [0.671, 0.698]   ·   PR-AUC 0.238 [0.213, 0.265]</a:t>
+            </a:r>
+            <a:endParaRPr lang="en-US" sz="1150" dirty="0"/>
+          </a:p>
+          <a:p>
+            <a:pPr indent="0" marL="0">
+              <a:lnSpc>
+                <a:spcPts val="1500"/>
+              </a:lnSpc>
+              <a:buNone/>
+            </a:pPr>
+            <a:r>
+              <a:rPr lang="en-US" sz="1150" dirty="0">
+                <a:solidFill>
+                  <a:srgbClr val="34525E"/>
+                </a:solidFill>
+                <a:latin typeface="Calibri" pitchFamily="34" charset="0"/>
+                <a:ea typeface="Calibri" pitchFamily="34" charset="-122"/>
+                <a:cs typeface="Calibri" pitchFamily="34" charset="-120"/>
+              </a:rPr>
+              <a:t>Recall 40.2% [37.6%, 42.7%]</a:t>
+            </a:r>
+            <a:endParaRPr lang="en-US" sz="1150" dirty="0"/>
+          </a:p>
+          <a:p>
+            <a:pPr indent="0" marL="0">
+              <a:lnSpc>
+                <a:spcPts val="1500"/>
+              </a:lnSpc>
+              <a:buNone/>
+            </a:pPr>
+            <a:r>
+              <a:rPr lang="en-US" sz="1150" dirty="0">
+                <a:solidFill>
+                  <a:srgbClr val="34525E"/>
+                </a:solidFill>
+                <a:latin typeface="Calibri" pitchFamily="34" charset="0"/>
+                <a:ea typeface="Calibri" pitchFamily="34" charset="-122"/>
+                <a:cs typeface="Calibri" pitchFamily="34" charset="-120"/>
+              </a:rPr>
+              <a:t>2,000 cluster resamples of patients, not rows.</a:t>
+            </a:r>
+            <a:endParaRPr lang="en-US" sz="1150" dirty="0"/>
+          </a:p>
+        </p:txBody>
+      </p:sp>
+      <p:sp>
+        <p:nvSpPr>
+          <p:cNvPr id="12" name="Shape 9"/>
+          <p:cNvSpPr/>
+          <p:nvPr/>
+        </p:nvSpPr>
+        <p:spPr>
+          <a:xfrm>
+            <a:off x="6272784" y="4352544"/>
+            <a:ext cx="5358384" cy="1316736"/>
+          </a:xfrm>
+          <a:prstGeom prst="roundRect">
+            <a:avLst>
+              <a:gd name="adj" fmla="val 5556"/>
+            </a:avLst>
+          </a:prstGeom>
+          <a:solidFill>
+            <a:srgbClr val="FFF3E6"/>
+          </a:solidFill>
+          <a:ln w="12700">
+            <a:solidFill>
+              <a:srgbClr val="FFF3E6"/>
+            </a:solidFill>
+            <a:prstDash val="solid"/>
+          </a:ln>
+        </p:spPr>
+      </p:sp>
+      <p:sp>
+        <p:nvSpPr>
+          <p:cNvPr id="13" name="Text 10"/>
+          <p:cNvSpPr/>
+          <p:nvPr/>
+        </p:nvSpPr>
+        <p:spPr>
+          <a:xfrm>
+            <a:off x="6528816" y="4498848"/>
+            <a:ext cx="4846320" cy="274320"/>
+          </a:xfrm>
+          <a:prstGeom prst="rect">
+            <a:avLst/>
+          </a:prstGeom>
+          <a:noFill/>
+          <a:ln/>
+        </p:spPr>
+        <p:txBody>
+          <a:bodyPr wrap="square" lIns="0" tIns="0" rIns="0" bIns="0" rtlCol="0" anchor="ctr"/>
+          <a:lstStyle/>
+          <a:p>
+            <a:pPr indent="0" marL="0">
+              <a:buNone/>
+            </a:pPr>
+            <a:r>
+              <a:rPr lang="en-US" sz="1400" b="1" dirty="0">
+                <a:solidFill>
+                  <a:srgbClr val="8A5217"/>
+                </a:solidFill>
+                <a:latin typeface="Cambria" pitchFamily="34" charset="0"/>
+                <a:ea typeface="Cambria" pitchFamily="34" charset="-122"/>
+                <a:cs typeface="Cambria" pitchFamily="34" charset="-120"/>
+              </a:rPr>
+              <a:t>This corrected one of our own claims</a:t>
+            </a:r>
+            <a:endParaRPr lang="en-US" sz="1400" dirty="0"/>
+          </a:p>
+        </p:txBody>
+      </p:sp>
+      <p:sp>
+        <p:nvSpPr>
+          <p:cNvPr id="14" name="Text 11"/>
+          <p:cNvSpPr/>
+          <p:nvPr/>
+        </p:nvSpPr>
+        <p:spPr>
+          <a:xfrm>
+            <a:off x="6528816" y="4791456"/>
+            <a:ext cx="4846320" cy="804672"/>
+          </a:xfrm>
+          <a:prstGeom prst="rect">
+            <a:avLst/>
+          </a:prstGeom>
+          <a:noFill/>
+          <a:ln/>
+        </p:spPr>
+        <p:txBody>
+          <a:bodyPr wrap="square" lIns="0" tIns="0" rIns="0" bIns="0" rtlCol="0" anchor="ctr"/>
+          <a:lstStyle/>
+          <a:p>
+            <a:pPr indent="0" marL="0">
+              <a:lnSpc>
+                <a:spcPts val="1500"/>
+              </a:lnSpc>
+              <a:buNone/>
+            </a:pPr>
+            <a:r>
+              <a:rPr lang="en-US" sz="1150" dirty="0">
+                <a:solidFill>
+                  <a:srgbClr val="6B4213"/>
+                </a:solidFill>
+                <a:latin typeface="Calibri" pitchFamily="34" charset="0"/>
+                <a:ea typeface="Calibri" pitchFamily="34" charset="-122"/>
+                <a:cs typeface="Calibri" pitchFamily="34" charset="-120"/>
+              </a:rPr>
+              <a:t>We had called 0.22 the information ceiling of the data. The learning curve is still rising — the last 43% of training data bought +0.0049. The ceiling is on method, not on data.</a:t>
+            </a:r>
+            <a:endParaRPr lang="en-US" sz="1150" dirty="0"/>
+          </a:p>
+        </p:txBody>
+      </p:sp>
+    </p:spTree>
+  </p:cSld>
+  <p:clrMapOvr>
+    <a:masterClrMapping/>
+  </p:clrMapOvr>
+</p:sld>
+</file>
+
+<file path=ppt/slides/slide15.xml><?xml version="1.0" encoding="utf-8"?>
+<p:sld xmlns:a="http://schemas.openxmlformats.org/drawingml/2006/main" xmlns:r="http://schemas.openxmlformats.org/officeDocument/2006/relationships" xmlns:p="http://schemas.openxmlformats.org/presentationml/2006/main">
+  <p:cSld name="Slide 15">
+    <p:bg>
+      <p:bgPr>
+        <a:solidFill>
+          <a:srgbClr val="FFFFFF"/>
+        </a:solidFill>
+      </p:bgPr>
+    </p:bg>
+    <p:spTree>
+      <p:nvGrpSpPr>
+        <p:cNvPr id="1" name=""/>
+        <p:cNvGrpSpPr/>
+        <p:nvPr/>
+      </p:nvGrpSpPr>
+      <p:grpSpPr>
+        <a:xfrm>
+          <a:off x="0" y="0"/>
+          <a:ext cx="0" cy="0"/>
+          <a:chOff x="0" y="0"/>
+          <a:chExt cx="0" cy="0"/>
+        </a:xfrm>
+      </p:grpSpPr>
+      <p:sp>
+        <p:nvSpPr>
+          <p:cNvPr id="2" name="Text 0"/>
+          <p:cNvSpPr/>
+          <p:nvPr/>
+        </p:nvSpPr>
+        <p:spPr>
+          <a:xfrm>
+            <a:off x="566928" y="310896"/>
+            <a:ext cx="11057839" cy="237744"/>
+          </a:xfrm>
+          <a:prstGeom prst="rect">
+            <a:avLst/>
+          </a:prstGeom>
+          <a:noFill/>
+          <a:ln/>
+        </p:spPr>
+        <p:txBody>
+          <a:bodyPr wrap="square" lIns="0" tIns="0" rIns="0" bIns="0" rtlCol="0" anchor="ctr"/>
+          <a:lstStyle/>
+          <a:p>
+            <a:pPr indent="0" marL="0">
+              <a:buNone/>
+            </a:pPr>
+            <a:r>
+              <a:rPr lang="en-US" sz="1100" b="1" spc="200" kern="0" dirty="0">
+                <a:solidFill>
+                  <a:srgbClr val="2E8FA8"/>
+                </a:solidFill>
+                <a:latin typeface="Calibri" pitchFamily="34" charset="0"/>
+                <a:ea typeface="Calibri" pitchFamily="34" charset="-122"/>
+                <a:cs typeface="Calibri" pitchFamily="34" charset="-120"/>
+              </a:rPr>
+              <a:t>FAIRNESS</a:t>
+            </a:r>
+            <a:endParaRPr lang="en-US" sz="1100" dirty="0"/>
+          </a:p>
+        </p:txBody>
+      </p:sp>
+      <p:sp>
+        <p:nvSpPr>
+          <p:cNvPr id="3" name="Text 1"/>
+          <p:cNvSpPr/>
+          <p:nvPr/>
+        </p:nvSpPr>
+        <p:spPr>
+          <a:xfrm>
+            <a:off x="566928" y="566928"/>
+            <a:ext cx="11057839" cy="658368"/>
+          </a:xfrm>
+          <a:prstGeom prst="rect">
+            <a:avLst/>
+          </a:prstGeom>
+          <a:noFill/>
+          <a:ln/>
+        </p:spPr>
+        <p:txBody>
+          <a:bodyPr wrap="square" lIns="0" tIns="0" rIns="0" bIns="0" rtlCol="0" anchor="t"/>
+          <a:lstStyle/>
+          <a:p>
+            <a:pPr indent="0" marL="0">
+              <a:buNone/>
+            </a:pPr>
+            <a:r>
+              <a:rPr lang="en-US" sz="3200" b="1" dirty="0">
+                <a:solidFill>
+                  <a:srgbClr val="0B2E3B"/>
+                </a:solidFill>
+                <a:latin typeface="Cambria" pitchFamily="34" charset="0"/>
+                <a:ea typeface="Cambria" pitchFamily="34" charset="-122"/>
+                <a:cs typeface="Cambria" pitchFamily="34" charset="-120"/>
+              </a:rPr>
+              <a:t>The subgroup gap that would block deployment</a:t>
+            </a:r>
+            <a:endParaRPr lang="en-US" sz="3200" dirty="0"/>
+          </a:p>
+        </p:txBody>
+      </p:sp>
+      <p:sp>
+        <p:nvSpPr>
+          <p:cNvPr id="4" name="Text 2"/>
+          <p:cNvSpPr/>
+          <p:nvPr/>
+        </p:nvSpPr>
+        <p:spPr>
+          <a:xfrm>
+            <a:off x="566928" y="1316736"/>
+            <a:ext cx="11057839" cy="274320"/>
+          </a:xfrm>
+          <a:prstGeom prst="rect">
+            <a:avLst/>
+          </a:prstGeom>
+          <a:noFill/>
+          <a:ln/>
+        </p:spPr>
+        <p:txBody>
+          <a:bodyPr wrap="square" lIns="0" tIns="0" rIns="0" bIns="0" rtlCol="0" anchor="ctr"/>
+          <a:lstStyle/>
+          <a:p>
+            <a:pPr indent="0" marL="0">
+              <a:buNone/>
+            </a:pPr>
+            <a:r>
+              <a:rPr lang="en-US" sz="1250" dirty="0">
+                <a:solidFill>
+                  <a:srgbClr val="5A7683"/>
+                </a:solidFill>
+                <a:latin typeface="Calibri" pitchFamily="34" charset="0"/>
+                <a:ea typeface="Calibri" pitchFamily="34" charset="-122"/>
+                <a:cs typeface="Calibri" pitchFamily="34" charset="-120"/>
+              </a:rPr>
               <a:t>Per-subgroup performance at the deployed threshold. Groups under 200 test encounters are suppressed.</a:t>
             </a:r>
             <a:endParaRPr lang="en-US" sz="1250" dirty="0"/>
@@ -8227,7 +10092,7 @@
       </p:sp>
       <p:graphicFrame>
         <p:nvGraphicFramePr>
-          <p:cNvPr id="14" name="Table 0"/>
+          <p:cNvPr id="16" name="Table 0"/>
           <p:cNvGraphicFramePr>
             <a:graphicFrameLocks noGrp="1"/>
           </p:cNvGraphicFramePr>
@@ -10639,9 +12504,9 @@
 </p:sld>
 </file>
 
-<file path=ppt/slides/slide14.xml><?xml version="1.0" encoding="utf-8"?>
+<file path=ppt/slides/slide16.xml><?xml version="1.0" encoding="utf-8"?>
 <p:sld xmlns:a="http://schemas.openxmlformats.org/drawingml/2006/main" xmlns:r="http://schemas.openxmlformats.org/officeDocument/2006/relationships" xmlns:p="http://schemas.openxmlformats.org/presentationml/2006/main">
-  <p:cSld name="Slide 14">
+  <p:cSld name="Slide 16">
     <p:bg>
       <p:bgPr>
         <a:solidFill>
@@ -10696,7 +12561,7 @@
                 <a:ea typeface="Calibri" pitchFamily="34" charset="-122"/>
                 <a:cs typeface="Calibri" pitchFamily="34" charset="-120"/>
               </a:rPr>
-              <a:t>DEPLOYMENT</a:t>
+              <a:t>EQUITY EXPERIMENT</a:t>
             </a:r>
             <a:endParaRPr lang="en-US" sz="1100" dirty="0"/>
           </a:p>
@@ -10735,7 +12600,7 @@
                 <a:ea typeface="Cambria" pitchFamily="34" charset="-122"/>
                 <a:cs typeface="Cambria" pitchFamily="34" charset="-120"/>
               </a:rPr>
-              <a:t>Decision support, not an autonomous action</a:t>
+              <a:t>We tried the obvious fix. It does not fix it.</a:t>
             </a:r>
             <a:endParaRPr lang="en-US" sz="3200" dirty="0"/>
           </a:p>
@@ -10774,26 +12639,741 @@
                 <a:ea typeface="Calibri" pitchFamily="34" charset="-122"/>
                 <a:cs typeface="Calibri" pitchFamily="34" charset="-120"/>
               </a:rPr>
-              <a:t>The model produces a ranked call list. A clinician decides what to do with it.</a:t>
+              <a:t>One capacity threshold per age band, each fitted on validation, so every band flags 20% of its own members.</a:t>
             </a:r>
             <a:endParaRPr lang="en-US" sz="1250" dirty="0"/>
           </a:p>
         </p:txBody>
       </p:sp>
-      <p:sp>
-        <p:nvSpPr>
-          <p:cNvPr id="5" name="Shape 3"/>
-          <p:cNvSpPr/>
-          <p:nvPr/>
-        </p:nvSpPr>
-        <p:spPr>
-          <a:xfrm>
-            <a:off x="566928" y="1737360"/>
-            <a:ext cx="3474720" cy="1591056"/>
+      <p:pic>
+        <p:nvPicPr>
+          <p:cNvPr id="5" name="Image 0" descr="/Users/Shikhar/ML Bubble hackathon/reports/figures/equity.png">    </p:cNvPr>
+          <p:cNvPicPr>
+            <a:picLocks noChangeAspect="1"/>
+          </p:cNvPicPr>
+          <p:nvPr/>
+        </p:nvPicPr>
+        <p:blipFill>
+          <a:blip r:embed="rId1"/>
+          <a:stretch>
+            <a:fillRect/>
+          </a:stretch>
+        </p:blipFill>
+        <p:spPr>
+          <a:xfrm>
+            <a:off x="566928" y="1682496"/>
+            <a:ext cx="6583680" cy="2414016"/>
+          </a:xfrm>
+          <a:prstGeom prst="rect">
+            <a:avLst/>
+          </a:prstGeom>
+        </p:spPr>
+      </p:pic>
+      <p:graphicFrame>
+        <p:nvGraphicFramePr>
+          <p:cNvPr id="17" name="Table 0"/>
+          <p:cNvGraphicFramePr>
+            <a:graphicFrameLocks noGrp="1"/>
+          </p:cNvGraphicFramePr>
+          <p:nvPr>
+            <p:extLst>
+              <p:ext uri="{D42A27DB-BD31-4B8C-83A1-F6EECF244321}">
+                <p14:modId xmlns:p14="http://schemas.microsoft.com/office/powerpoint/2010/main" val="1579011935"/>
+              </p:ext>
+            </p:extLst>
+          </p:nvPr>
+        </p:nvGraphicFramePr>
+        <p:xfrm>
+          <a:off x="7370064" y="1773936"/>
+          <a:ext cx="4261104" cy="914400"/>
+        </p:xfrm>
+        <a:graphic>
+          <a:graphicData uri="http://schemas.openxmlformats.org/drawingml/2006/table">
+            <a:tbl>
+              <a:tblPr/>
+              <a:tblGrid>
+                <a:gridCol w="2139696"/>
+                <a:gridCol w="1060704"/>
+                <a:gridCol w="1060704"/>
+              </a:tblGrid>
+              <a:tr h="310896">
+                <a:tc>
+                  <a:txBody>
+                    <a:bodyPr/>
+                    <a:lstStyle/>
+                    <a:p>
+                      <a:pPr indent="0" marL="0">
+                        <a:buNone/>
+                      </a:pPr>
+                      <a:r>
+                        <a:rPr lang="en-US" sz="1200" dirty="0">
+                          <a:solidFill>
+                            <a:srgbClr val="1F3D49"/>
+                          </a:solidFill>
+                          <a:latin typeface="Calibri" pitchFamily="34" charset="0"/>
+                          <a:ea typeface="Calibri" pitchFamily="34" charset="-122"/>
+                          <a:cs typeface="Calibri" pitchFamily="34" charset="-120"/>
+                        </a:rPr>
+                        <a:t>Policy</a:t>
+                      </a:r>
+                      <a:endParaRPr lang="en-US" sz="1200" dirty="0">
+                        <a:latin typeface="Calibri" charset="0"/>
+                        <a:ea typeface="Calibri" charset="0"/>
+                        <a:cs typeface="Calibri" charset="0"/>
+                      </a:endParaRPr>
+                    </a:p>
+                  </a:txBody>
+                  <a:tcPr marL="91440" marR="91440" marT="45720" marB="45720">
+                    <a:lnL w="12700" cap="flat" cmpd="sng" algn="ctr">
+                      <a:solidFill>
+                        <a:srgbClr val="DCE7EB"/>
+                      </a:solidFill>
+                      <a:prstDash val="solid"/>
+                      <a:round/>
+                      <a:headEnd type="none" w="med" len="med"/>
+                      <a:tailEnd type="none" w="med" len="med"/>
+                    </a:lnL>
+                    <a:lnR w="12700" cap="flat" cmpd="sng" algn="ctr">
+                      <a:solidFill>
+                        <a:srgbClr val="DCE7EB"/>
+                      </a:solidFill>
+                      <a:prstDash val="solid"/>
+                      <a:round/>
+                      <a:headEnd type="none" w="med" len="med"/>
+                      <a:tailEnd type="none" w="med" len="med"/>
+                    </a:lnR>
+                    <a:lnT w="12700" cap="flat" cmpd="sng" algn="ctr">
+                      <a:solidFill>
+                        <a:srgbClr val="DCE7EB"/>
+                      </a:solidFill>
+                      <a:prstDash val="solid"/>
+                      <a:round/>
+                      <a:headEnd type="none" w="med" len="med"/>
+                      <a:tailEnd type="none" w="med" len="med"/>
+                    </a:lnT>
+                    <a:lnB w="12700" cap="flat" cmpd="sng" algn="ctr">
+                      <a:solidFill>
+                        <a:srgbClr val="DCE7EB"/>
+                      </a:solidFill>
+                      <a:prstDash val="solid"/>
+                      <a:round/>
+                      <a:headEnd type="none" w="med" len="med"/>
+                      <a:tailEnd type="none" w="med" len="med"/>
+                    </a:lnB>
+                    <a:solidFill>
+                      <a:srgbClr val="FFFFFF"/>
+                    </a:solidFill>
+                  </a:tcPr>
+                </a:tc>
+                <a:tc>
+                  <a:txBody>
+                    <a:bodyPr/>
+                    <a:lstStyle/>
+                    <a:p>
+                      <a:pPr indent="0" marL="0">
+                        <a:buNone/>
+                      </a:pPr>
+                      <a:r>
+                        <a:rPr lang="en-US" sz="1200" dirty="0">
+                          <a:solidFill>
+                            <a:srgbClr val="1F3D49"/>
+                          </a:solidFill>
+                          <a:latin typeface="Calibri" pitchFamily="34" charset="0"/>
+                          <a:ea typeface="Calibri" pitchFamily="34" charset="-122"/>
+                          <a:cs typeface="Calibri" pitchFamily="34" charset="-120"/>
+                        </a:rPr>
+                        <a:t>Recall</a:t>
+                      </a:r>
+                      <a:endParaRPr lang="en-US" sz="1200" dirty="0">
+                        <a:latin typeface="Calibri" charset="0"/>
+                        <a:ea typeface="Calibri" charset="0"/>
+                        <a:cs typeface="Calibri" charset="0"/>
+                      </a:endParaRPr>
+                    </a:p>
+                  </a:txBody>
+                  <a:tcPr marL="91440" marR="91440" marT="45720" marB="45720">
+                    <a:lnL w="12700" cap="flat" cmpd="sng" algn="ctr">
+                      <a:solidFill>
+                        <a:srgbClr val="DCE7EB"/>
+                      </a:solidFill>
+                      <a:prstDash val="solid"/>
+                      <a:round/>
+                      <a:headEnd type="none" w="med" len="med"/>
+                      <a:tailEnd type="none" w="med" len="med"/>
+                    </a:lnL>
+                    <a:lnR w="12700" cap="flat" cmpd="sng" algn="ctr">
+                      <a:solidFill>
+                        <a:srgbClr val="DCE7EB"/>
+                      </a:solidFill>
+                      <a:prstDash val="solid"/>
+                      <a:round/>
+                      <a:headEnd type="none" w="med" len="med"/>
+                      <a:tailEnd type="none" w="med" len="med"/>
+                    </a:lnR>
+                    <a:lnT w="12700" cap="flat" cmpd="sng" algn="ctr">
+                      <a:solidFill>
+                        <a:srgbClr val="DCE7EB"/>
+                      </a:solidFill>
+                      <a:prstDash val="solid"/>
+                      <a:round/>
+                      <a:headEnd type="none" w="med" len="med"/>
+                      <a:tailEnd type="none" w="med" len="med"/>
+                    </a:lnT>
+                    <a:lnB w="12700" cap="flat" cmpd="sng" algn="ctr">
+                      <a:solidFill>
+                        <a:srgbClr val="DCE7EB"/>
+                      </a:solidFill>
+                      <a:prstDash val="solid"/>
+                      <a:round/>
+                      <a:headEnd type="none" w="med" len="med"/>
+                      <a:tailEnd type="none" w="med" len="med"/>
+                    </a:lnB>
+                    <a:solidFill>
+                      <a:srgbClr val="FFFFFF"/>
+                    </a:solidFill>
+                  </a:tcPr>
+                </a:tc>
+                <a:tc>
+                  <a:txBody>
+                    <a:bodyPr/>
+                    <a:lstStyle/>
+                    <a:p>
+                      <a:pPr indent="0" marL="0">
+                        <a:buNone/>
+                      </a:pPr>
+                      <a:r>
+                        <a:rPr lang="en-US" sz="1200" dirty="0">
+                          <a:solidFill>
+                            <a:srgbClr val="1F3D49"/>
+                          </a:solidFill>
+                          <a:latin typeface="Calibri" pitchFamily="34" charset="0"/>
+                          <a:ea typeface="Calibri" pitchFamily="34" charset="-122"/>
+                          <a:cs typeface="Calibri" pitchFamily="34" charset="-120"/>
+                        </a:rPr>
+                        <a:t>TP</a:t>
+                      </a:r>
+                      <a:endParaRPr lang="en-US" sz="1200" dirty="0">
+                        <a:latin typeface="Calibri" charset="0"/>
+                        <a:ea typeface="Calibri" charset="0"/>
+                        <a:cs typeface="Calibri" charset="0"/>
+                      </a:endParaRPr>
+                    </a:p>
+                  </a:txBody>
+                  <a:tcPr marL="91440" marR="91440" marT="45720" marB="45720">
+                    <a:lnL w="12700" cap="flat" cmpd="sng" algn="ctr">
+                      <a:solidFill>
+                        <a:srgbClr val="DCE7EB"/>
+                      </a:solidFill>
+                      <a:prstDash val="solid"/>
+                      <a:round/>
+                      <a:headEnd type="none" w="med" len="med"/>
+                      <a:tailEnd type="none" w="med" len="med"/>
+                    </a:lnL>
+                    <a:lnR w="12700" cap="flat" cmpd="sng" algn="ctr">
+                      <a:solidFill>
+                        <a:srgbClr val="DCE7EB"/>
+                      </a:solidFill>
+                      <a:prstDash val="solid"/>
+                      <a:round/>
+                      <a:headEnd type="none" w="med" len="med"/>
+                      <a:tailEnd type="none" w="med" len="med"/>
+                    </a:lnR>
+                    <a:lnT w="12700" cap="flat" cmpd="sng" algn="ctr">
+                      <a:solidFill>
+                        <a:srgbClr val="DCE7EB"/>
+                      </a:solidFill>
+                      <a:prstDash val="solid"/>
+                      <a:round/>
+                      <a:headEnd type="none" w="med" len="med"/>
+                      <a:tailEnd type="none" w="med" len="med"/>
+                    </a:lnT>
+                    <a:lnB w="12700" cap="flat" cmpd="sng" algn="ctr">
+                      <a:solidFill>
+                        <a:srgbClr val="DCE7EB"/>
+                      </a:solidFill>
+                      <a:prstDash val="solid"/>
+                      <a:round/>
+                      <a:headEnd type="none" w="med" len="med"/>
+                      <a:tailEnd type="none" w="med" len="med"/>
+                    </a:lnB>
+                    <a:solidFill>
+                      <a:srgbClr val="FFFFFF"/>
+                    </a:solidFill>
+                  </a:tcPr>
+                </a:tc>
+              </a:tr>
+              <a:tr h="329184">
+                <a:tc>
+                  <a:txBody>
+                    <a:bodyPr/>
+                    <a:lstStyle/>
+                    <a:p>
+                      <a:pPr indent="0" marL="0">
+                        <a:buNone/>
+                      </a:pPr>
+                      <a:r>
+                        <a:rPr lang="en-US" sz="1200" dirty="0">
+                          <a:solidFill>
+                            <a:srgbClr val="1F3D49"/>
+                          </a:solidFill>
+                          <a:latin typeface="Calibri" pitchFamily="34" charset="0"/>
+                          <a:ea typeface="Calibri" pitchFamily="34" charset="-122"/>
+                          <a:cs typeface="Calibri" pitchFamily="34" charset="-120"/>
+                        </a:rPr>
+                        <a:t>Global threshold</a:t>
+                      </a:r>
+                      <a:endParaRPr lang="en-US" sz="1200" dirty="0">
+                        <a:latin typeface="Calibri" charset="0"/>
+                        <a:ea typeface="Calibri" charset="0"/>
+                        <a:cs typeface="Calibri" charset="0"/>
+                      </a:endParaRPr>
+                    </a:p>
+                  </a:txBody>
+                  <a:tcPr marL="91440" marR="91440" marT="45720" marB="45720">
+                    <a:lnL w="12700" cap="flat" cmpd="sng" algn="ctr">
+                      <a:solidFill>
+                        <a:srgbClr val="DCE7EB"/>
+                      </a:solidFill>
+                      <a:prstDash val="solid"/>
+                      <a:round/>
+                      <a:headEnd type="none" w="med" len="med"/>
+                      <a:tailEnd type="none" w="med" len="med"/>
+                    </a:lnL>
+                    <a:lnR w="12700" cap="flat" cmpd="sng" algn="ctr">
+                      <a:solidFill>
+                        <a:srgbClr val="DCE7EB"/>
+                      </a:solidFill>
+                      <a:prstDash val="solid"/>
+                      <a:round/>
+                      <a:headEnd type="none" w="med" len="med"/>
+                      <a:tailEnd type="none" w="med" len="med"/>
+                    </a:lnR>
+                    <a:lnT w="12700" cap="flat" cmpd="sng" algn="ctr">
+                      <a:solidFill>
+                        <a:srgbClr val="DCE7EB"/>
+                      </a:solidFill>
+                      <a:prstDash val="solid"/>
+                      <a:round/>
+                      <a:headEnd type="none" w="med" len="med"/>
+                      <a:tailEnd type="none" w="med" len="med"/>
+                    </a:lnT>
+                    <a:lnB w="12700" cap="flat" cmpd="sng" algn="ctr">
+                      <a:solidFill>
+                        <a:srgbClr val="DCE7EB"/>
+                      </a:solidFill>
+                      <a:prstDash val="solid"/>
+                      <a:round/>
+                      <a:headEnd type="none" w="med" len="med"/>
+                      <a:tailEnd type="none" w="med" len="med"/>
+                    </a:lnB>
+                    <a:solidFill>
+                      <a:srgbClr val="FFFFFF"/>
+                    </a:solidFill>
+                  </a:tcPr>
+                </a:tc>
+                <a:tc>
+                  <a:txBody>
+                    <a:bodyPr/>
+                    <a:lstStyle/>
+                    <a:p>
+                      <a:pPr indent="0" marL="0">
+                        <a:buNone/>
+                      </a:pPr>
+                      <a:r>
+                        <a:rPr lang="en-US" sz="1200" dirty="0">
+                          <a:solidFill>
+                            <a:srgbClr val="1F3D49"/>
+                          </a:solidFill>
+                          <a:latin typeface="Calibri" pitchFamily="34" charset="0"/>
+                          <a:ea typeface="Calibri" pitchFamily="34" charset="-122"/>
+                          <a:cs typeface="Calibri" pitchFamily="34" charset="-120"/>
+                        </a:rPr>
+                        <a:t>40.2%</a:t>
+                      </a:r>
+                      <a:endParaRPr lang="en-US" sz="1200" dirty="0">
+                        <a:latin typeface="Calibri" charset="0"/>
+                        <a:ea typeface="Calibri" charset="0"/>
+                        <a:cs typeface="Calibri" charset="0"/>
+                      </a:endParaRPr>
+                    </a:p>
+                  </a:txBody>
+                  <a:tcPr marL="91440" marR="91440" marT="45720" marB="45720">
+                    <a:lnL w="12700" cap="flat" cmpd="sng" algn="ctr">
+                      <a:solidFill>
+                        <a:srgbClr val="DCE7EB"/>
+                      </a:solidFill>
+                      <a:prstDash val="solid"/>
+                      <a:round/>
+                      <a:headEnd type="none" w="med" len="med"/>
+                      <a:tailEnd type="none" w="med" len="med"/>
+                    </a:lnL>
+                    <a:lnR w="12700" cap="flat" cmpd="sng" algn="ctr">
+                      <a:solidFill>
+                        <a:srgbClr val="DCE7EB"/>
+                      </a:solidFill>
+                      <a:prstDash val="solid"/>
+                      <a:round/>
+                      <a:headEnd type="none" w="med" len="med"/>
+                      <a:tailEnd type="none" w="med" len="med"/>
+                    </a:lnR>
+                    <a:lnT w="12700" cap="flat" cmpd="sng" algn="ctr">
+                      <a:solidFill>
+                        <a:srgbClr val="DCE7EB"/>
+                      </a:solidFill>
+                      <a:prstDash val="solid"/>
+                      <a:round/>
+                      <a:headEnd type="none" w="med" len="med"/>
+                      <a:tailEnd type="none" w="med" len="med"/>
+                    </a:lnT>
+                    <a:lnB w="12700" cap="flat" cmpd="sng" algn="ctr">
+                      <a:solidFill>
+                        <a:srgbClr val="DCE7EB"/>
+                      </a:solidFill>
+                      <a:prstDash val="solid"/>
+                      <a:round/>
+                      <a:headEnd type="none" w="med" len="med"/>
+                      <a:tailEnd type="none" w="med" len="med"/>
+                    </a:lnB>
+                    <a:solidFill>
+                      <a:srgbClr val="FFFFFF"/>
+                    </a:solidFill>
+                  </a:tcPr>
+                </a:tc>
+                <a:tc>
+                  <a:txBody>
+                    <a:bodyPr/>
+                    <a:lstStyle/>
+                    <a:p>
+                      <a:pPr indent="0" marL="0">
+                        <a:buNone/>
+                      </a:pPr>
+                      <a:r>
+                        <a:rPr lang="en-US" sz="1200" dirty="0">
+                          <a:solidFill>
+                            <a:srgbClr val="1F3D49"/>
+                          </a:solidFill>
+                          <a:latin typeface="Calibri" pitchFamily="34" charset="0"/>
+                          <a:ea typeface="Calibri" pitchFamily="34" charset="-122"/>
+                          <a:cs typeface="Calibri" pitchFamily="34" charset="-120"/>
+                        </a:rPr>
+                        <a:t>901</a:t>
+                      </a:r>
+                      <a:endParaRPr lang="en-US" sz="1200" dirty="0">
+                        <a:latin typeface="Calibri" charset="0"/>
+                        <a:ea typeface="Calibri" charset="0"/>
+                        <a:cs typeface="Calibri" charset="0"/>
+                      </a:endParaRPr>
+                    </a:p>
+                  </a:txBody>
+                  <a:tcPr marL="91440" marR="91440" marT="45720" marB="45720">
+                    <a:lnL w="12700" cap="flat" cmpd="sng" algn="ctr">
+                      <a:solidFill>
+                        <a:srgbClr val="DCE7EB"/>
+                      </a:solidFill>
+                      <a:prstDash val="solid"/>
+                      <a:round/>
+                      <a:headEnd type="none" w="med" len="med"/>
+                      <a:tailEnd type="none" w="med" len="med"/>
+                    </a:lnL>
+                    <a:lnR w="12700" cap="flat" cmpd="sng" algn="ctr">
+                      <a:solidFill>
+                        <a:srgbClr val="DCE7EB"/>
+                      </a:solidFill>
+                      <a:prstDash val="solid"/>
+                      <a:round/>
+                      <a:headEnd type="none" w="med" len="med"/>
+                      <a:tailEnd type="none" w="med" len="med"/>
+                    </a:lnR>
+                    <a:lnT w="12700" cap="flat" cmpd="sng" algn="ctr">
+                      <a:solidFill>
+                        <a:srgbClr val="DCE7EB"/>
+                      </a:solidFill>
+                      <a:prstDash val="solid"/>
+                      <a:round/>
+                      <a:headEnd type="none" w="med" len="med"/>
+                      <a:tailEnd type="none" w="med" len="med"/>
+                    </a:lnT>
+                    <a:lnB w="12700" cap="flat" cmpd="sng" algn="ctr">
+                      <a:solidFill>
+                        <a:srgbClr val="DCE7EB"/>
+                      </a:solidFill>
+                      <a:prstDash val="solid"/>
+                      <a:round/>
+                      <a:headEnd type="none" w="med" len="med"/>
+                      <a:tailEnd type="none" w="med" len="med"/>
+                    </a:lnB>
+                    <a:solidFill>
+                      <a:srgbClr val="FFFFFF"/>
+                    </a:solidFill>
+                  </a:tcPr>
+                </a:tc>
+              </a:tr>
+              <a:tr h="329184">
+                <a:tc>
+                  <a:txBody>
+                    <a:bodyPr/>
+                    <a:lstStyle/>
+                    <a:p>
+                      <a:pPr indent="0" marL="0">
+                        <a:buNone/>
+                      </a:pPr>
+                      <a:r>
+                        <a:rPr lang="en-US" sz="1200" dirty="0">
+                          <a:solidFill>
+                            <a:srgbClr val="1F3D49"/>
+                          </a:solidFill>
+                          <a:latin typeface="Calibri" pitchFamily="34" charset="0"/>
+                          <a:ea typeface="Calibri" pitchFamily="34" charset="-122"/>
+                          <a:cs typeface="Calibri" pitchFamily="34" charset="-120"/>
+                        </a:rPr>
+                        <a:t>Age-stratified</a:t>
+                      </a:r>
+                      <a:endParaRPr lang="en-US" sz="1200" dirty="0">
+                        <a:latin typeface="Calibri" charset="0"/>
+                        <a:ea typeface="Calibri" charset="0"/>
+                        <a:cs typeface="Calibri" charset="0"/>
+                      </a:endParaRPr>
+                    </a:p>
+                  </a:txBody>
+                  <a:tcPr marL="91440" marR="91440" marT="45720" marB="45720">
+                    <a:lnL w="12700" cap="flat" cmpd="sng" algn="ctr">
+                      <a:solidFill>
+                        <a:srgbClr val="DCE7EB"/>
+                      </a:solidFill>
+                      <a:prstDash val="solid"/>
+                      <a:round/>
+                      <a:headEnd type="none" w="med" len="med"/>
+                      <a:tailEnd type="none" w="med" len="med"/>
+                    </a:lnL>
+                    <a:lnR w="12700" cap="flat" cmpd="sng" algn="ctr">
+                      <a:solidFill>
+                        <a:srgbClr val="DCE7EB"/>
+                      </a:solidFill>
+                      <a:prstDash val="solid"/>
+                      <a:round/>
+                      <a:headEnd type="none" w="med" len="med"/>
+                      <a:tailEnd type="none" w="med" len="med"/>
+                    </a:lnR>
+                    <a:lnT w="12700" cap="flat" cmpd="sng" algn="ctr">
+                      <a:solidFill>
+                        <a:srgbClr val="DCE7EB"/>
+                      </a:solidFill>
+                      <a:prstDash val="solid"/>
+                      <a:round/>
+                      <a:headEnd type="none" w="med" len="med"/>
+                      <a:tailEnd type="none" w="med" len="med"/>
+                    </a:lnT>
+                    <a:lnB w="12700" cap="flat" cmpd="sng" algn="ctr">
+                      <a:solidFill>
+                        <a:srgbClr val="DCE7EB"/>
+                      </a:solidFill>
+                      <a:prstDash val="solid"/>
+                      <a:round/>
+                      <a:headEnd type="none" w="med" len="med"/>
+                      <a:tailEnd type="none" w="med" len="med"/>
+                    </a:lnB>
+                    <a:solidFill>
+                      <a:srgbClr val="FFFFFF"/>
+                    </a:solidFill>
+                  </a:tcPr>
+                </a:tc>
+                <a:tc>
+                  <a:txBody>
+                    <a:bodyPr/>
+                    <a:lstStyle/>
+                    <a:p>
+                      <a:pPr indent="0" marL="0">
+                        <a:buNone/>
+                      </a:pPr>
+                      <a:r>
+                        <a:rPr lang="en-US" sz="1200" dirty="0">
+                          <a:solidFill>
+                            <a:srgbClr val="1F3D49"/>
+                          </a:solidFill>
+                          <a:latin typeface="Calibri" pitchFamily="34" charset="0"/>
+                          <a:ea typeface="Calibri" pitchFamily="34" charset="-122"/>
+                          <a:cs typeface="Calibri" pitchFamily="34" charset="-120"/>
+                        </a:rPr>
+                        <a:t>39.7%</a:t>
+                      </a:r>
+                      <a:endParaRPr lang="en-US" sz="1200" dirty="0">
+                        <a:latin typeface="Calibri" charset="0"/>
+                        <a:ea typeface="Calibri" charset="0"/>
+                        <a:cs typeface="Calibri" charset="0"/>
+                      </a:endParaRPr>
+                    </a:p>
+                  </a:txBody>
+                  <a:tcPr marL="91440" marR="91440" marT="45720" marB="45720">
+                    <a:lnL w="12700" cap="flat" cmpd="sng" algn="ctr">
+                      <a:solidFill>
+                        <a:srgbClr val="DCE7EB"/>
+                      </a:solidFill>
+                      <a:prstDash val="solid"/>
+                      <a:round/>
+                      <a:headEnd type="none" w="med" len="med"/>
+                      <a:tailEnd type="none" w="med" len="med"/>
+                    </a:lnL>
+                    <a:lnR w="12700" cap="flat" cmpd="sng" algn="ctr">
+                      <a:solidFill>
+                        <a:srgbClr val="DCE7EB"/>
+                      </a:solidFill>
+                      <a:prstDash val="solid"/>
+                      <a:round/>
+                      <a:headEnd type="none" w="med" len="med"/>
+                      <a:tailEnd type="none" w="med" len="med"/>
+                    </a:lnR>
+                    <a:lnT w="12700" cap="flat" cmpd="sng" algn="ctr">
+                      <a:solidFill>
+                        <a:srgbClr val="DCE7EB"/>
+                      </a:solidFill>
+                      <a:prstDash val="solid"/>
+                      <a:round/>
+                      <a:headEnd type="none" w="med" len="med"/>
+                      <a:tailEnd type="none" w="med" len="med"/>
+                    </a:lnT>
+                    <a:lnB w="12700" cap="flat" cmpd="sng" algn="ctr">
+                      <a:solidFill>
+                        <a:srgbClr val="DCE7EB"/>
+                      </a:solidFill>
+                      <a:prstDash val="solid"/>
+                      <a:round/>
+                      <a:headEnd type="none" w="med" len="med"/>
+                      <a:tailEnd type="none" w="med" len="med"/>
+                    </a:lnB>
+                    <a:solidFill>
+                      <a:srgbClr val="FFFFFF"/>
+                    </a:solidFill>
+                  </a:tcPr>
+                </a:tc>
+                <a:tc>
+                  <a:txBody>
+                    <a:bodyPr/>
+                    <a:lstStyle/>
+                    <a:p>
+                      <a:pPr indent="0" marL="0">
+                        <a:buNone/>
+                      </a:pPr>
+                      <a:r>
+                        <a:rPr lang="en-US" sz="1200" dirty="0">
+                          <a:solidFill>
+                            <a:srgbClr val="1F3D49"/>
+                          </a:solidFill>
+                          <a:latin typeface="Calibri" pitchFamily="34" charset="0"/>
+                          <a:ea typeface="Calibri" pitchFamily="34" charset="-122"/>
+                          <a:cs typeface="Calibri" pitchFamily="34" charset="-120"/>
+                        </a:rPr>
+                        <a:t>891</a:t>
+                      </a:r>
+                      <a:endParaRPr lang="en-US" sz="1200" dirty="0">
+                        <a:latin typeface="Calibri" charset="0"/>
+                        <a:ea typeface="Calibri" charset="0"/>
+                        <a:cs typeface="Calibri" charset="0"/>
+                      </a:endParaRPr>
+                    </a:p>
+                  </a:txBody>
+                  <a:tcPr marL="91440" marR="91440" marT="45720" marB="45720">
+                    <a:lnL w="12700" cap="flat" cmpd="sng" algn="ctr">
+                      <a:solidFill>
+                        <a:srgbClr val="DCE7EB"/>
+                      </a:solidFill>
+                      <a:prstDash val="solid"/>
+                      <a:round/>
+                      <a:headEnd type="none" w="med" len="med"/>
+                      <a:tailEnd type="none" w="med" len="med"/>
+                    </a:lnL>
+                    <a:lnR w="12700" cap="flat" cmpd="sng" algn="ctr">
+                      <a:solidFill>
+                        <a:srgbClr val="DCE7EB"/>
+                      </a:solidFill>
+                      <a:prstDash val="solid"/>
+                      <a:round/>
+                      <a:headEnd type="none" w="med" len="med"/>
+                      <a:tailEnd type="none" w="med" len="med"/>
+                    </a:lnR>
+                    <a:lnT w="12700" cap="flat" cmpd="sng" algn="ctr">
+                      <a:solidFill>
+                        <a:srgbClr val="DCE7EB"/>
+                      </a:solidFill>
+                      <a:prstDash val="solid"/>
+                      <a:round/>
+                      <a:headEnd type="none" w="med" len="med"/>
+                      <a:tailEnd type="none" w="med" len="med"/>
+                    </a:lnT>
+                    <a:lnB w="12700" cap="flat" cmpd="sng" algn="ctr">
+                      <a:solidFill>
+                        <a:srgbClr val="DCE7EB"/>
+                      </a:solidFill>
+                      <a:prstDash val="solid"/>
+                      <a:round/>
+                      <a:headEnd type="none" w="med" len="med"/>
+                      <a:tailEnd type="none" w="med" len="med"/>
+                    </a:lnB>
+                    <a:solidFill>
+                      <a:srgbClr val="FFFFFF"/>
+                    </a:solidFill>
+                  </a:tcPr>
+                </a:tc>
+              </a:tr>
+            </a:tbl>
+          </a:graphicData>
+        </a:graphic>
+      </p:graphicFrame>
+      <p:sp>
+        <p:nvSpPr>
+          <p:cNvPr id="7" name="Text 3"/>
+          <p:cNvSpPr/>
+          <p:nvPr/>
+        </p:nvSpPr>
+        <p:spPr>
+          <a:xfrm>
+            <a:off x="7370064" y="2871216"/>
+            <a:ext cx="4261104" cy="731520"/>
+          </a:xfrm>
+          <a:prstGeom prst="rect">
+            <a:avLst/>
+          </a:prstGeom>
+          <a:noFill/>
+          <a:ln/>
+        </p:spPr>
+        <p:txBody>
+          <a:bodyPr wrap="square" lIns="0" tIns="0" rIns="0" bIns="0" rtlCol="0" anchor="ctr"/>
+          <a:lstStyle/>
+          <a:p>
+            <a:pPr indent="0" marL="0">
+              <a:lnSpc>
+                <a:spcPts val="1600"/>
+              </a:lnSpc>
+              <a:buNone/>
+            </a:pPr>
+            <a:r>
+              <a:rPr lang="en-US" sz="1200" dirty="0">
+                <a:solidFill>
+                  <a:srgbClr val="34525E"/>
+                </a:solidFill>
+                <a:latin typeface="Calibri" pitchFamily="34" charset="0"/>
+                <a:ea typeface="Calibri" pitchFamily="34" charset="-122"/>
+                <a:cs typeface="Calibri" pitchFamily="34" charset="-120"/>
+              </a:rPr>
+              <a:t>Stratifying moves calls away from over-75s and toward the 40–60 band, at a cost of 10 true positives.</a:t>
+            </a:r>
+            <a:endParaRPr lang="en-US" sz="1200" dirty="0"/>
+          </a:p>
+        </p:txBody>
+      </p:sp>
+      <p:sp>
+        <p:nvSpPr>
+          <p:cNvPr id="8" name="Shape 4"/>
+          <p:cNvSpPr/>
+          <p:nvPr/>
+        </p:nvSpPr>
+        <p:spPr>
+          <a:xfrm>
+            <a:off x="7370064" y="3602736"/>
+            <a:ext cx="4261104" cy="493776"/>
           </a:xfrm>
           <a:prstGeom prst="roundRect">
             <a:avLst>
-              <a:gd name="adj" fmla="val 4598"/>
+              <a:gd name="adj" fmla="val 14815"/>
             </a:avLst>
           </a:prstGeom>
           <a:solidFill>
@@ -10809,14 +13389,14 @@
       </p:sp>
       <p:sp>
         <p:nvSpPr>
-          <p:cNvPr id="6" name="Text 4"/>
-          <p:cNvSpPr/>
-          <p:nvPr/>
-        </p:nvSpPr>
-        <p:spPr>
-          <a:xfrm>
-            <a:off x="822960" y="1901952"/>
-            <a:ext cx="2962656" cy="310896"/>
+          <p:cNvPr id="9" name="Text 5"/>
+          <p:cNvSpPr/>
+          <p:nvPr/>
+        </p:nvSpPr>
+        <p:spPr>
+          <a:xfrm>
+            <a:off x="7589520" y="3602736"/>
+            <a:ext cx="3822192" cy="493776"/>
           </a:xfrm>
           <a:prstGeom prst="rect">
             <a:avLst/>
@@ -10832,30 +13412,96 @@
               <a:buNone/>
             </a:pPr>
             <a:r>
-              <a:rPr lang="en-US" sz="1500" b="1" dirty="0">
+              <a:rPr lang="en-US" sz="1150" b="1" dirty="0">
                 <a:solidFill>
                   <a:srgbClr val="0B2E3B"/>
+                </a:solidFill>
+                <a:latin typeface="Calibri" pitchFamily="34" charset="0"/>
+                <a:ea typeface="Calibri" pitchFamily="34" charset="-122"/>
+                <a:cs typeface="Calibri" pitchFamily="34" charset="-120"/>
+              </a:rPr>
+              <a:t>75+ ROC-AUC is 0.613 under both policies.</a:t>
+            </a:r>
+            <a:endParaRPr lang="en-US" sz="1150" dirty="0"/>
+          </a:p>
+        </p:txBody>
+      </p:sp>
+      <p:sp>
+        <p:nvSpPr>
+          <p:cNvPr id="10" name="Shape 6"/>
+          <p:cNvSpPr/>
+          <p:nvPr/>
+        </p:nvSpPr>
+        <p:spPr>
+          <a:xfrm>
+            <a:off x="566928" y="4297680"/>
+            <a:ext cx="5468112" cy="1371600"/>
+          </a:xfrm>
+          <a:prstGeom prst="roundRect">
+            <a:avLst>
+              <a:gd name="adj" fmla="val 5333"/>
+            </a:avLst>
+          </a:prstGeom>
+          <a:solidFill>
+            <a:srgbClr val="0B2E3B"/>
+          </a:solidFill>
+          <a:ln w="12700">
+            <a:solidFill>
+              <a:srgbClr val="0B2E3B"/>
+            </a:solidFill>
+            <a:prstDash val="solid"/>
+          </a:ln>
+        </p:spPr>
+      </p:sp>
+      <p:sp>
+        <p:nvSpPr>
+          <p:cNvPr id="11" name="Text 7"/>
+          <p:cNvSpPr/>
+          <p:nvPr/>
+        </p:nvSpPr>
+        <p:spPr>
+          <a:xfrm>
+            <a:off x="841248" y="4443984"/>
+            <a:ext cx="4956048" cy="310896"/>
+          </a:xfrm>
+          <a:prstGeom prst="rect">
+            <a:avLst/>
+          </a:prstGeom>
+          <a:noFill/>
+          <a:ln/>
+        </p:spPr>
+        <p:txBody>
+          <a:bodyPr wrap="square" lIns="0" tIns="0" rIns="0" bIns="0" rtlCol="0" anchor="ctr"/>
+          <a:lstStyle/>
+          <a:p>
+            <a:pPr indent="0" marL="0">
+              <a:buNone/>
+            </a:pPr>
+            <a:r>
+              <a:rPr lang="en-US" sz="1400" b="1" dirty="0">
+                <a:solidFill>
+                  <a:srgbClr val="FFFFFF"/>
                 </a:solidFill>
                 <a:latin typeface="Cambria" pitchFamily="34" charset="0"/>
                 <a:ea typeface="Cambria" pitchFamily="34" charset="-122"/>
                 <a:cs typeface="Cambria" pitchFamily="34" charset="-120"/>
               </a:rPr>
-              <a:t>Nightly batch</a:t>
-            </a:r>
-            <a:endParaRPr lang="en-US" sz="1500" dirty="0"/>
-          </a:p>
-        </p:txBody>
-      </p:sp>
-      <p:sp>
-        <p:nvSpPr>
-          <p:cNvPr id="7" name="Text 5"/>
-          <p:cNvSpPr/>
-          <p:nvPr/>
-        </p:nvSpPr>
-        <p:spPr>
-          <a:xfrm>
-            <a:off x="822960" y="2249424"/>
-            <a:ext cx="2962656" cy="914400"/>
+              <a:t>Thresholds move capacity. They cannot change ranking.</a:t>
+            </a:r>
+            <a:endParaRPr lang="en-US" sz="1400" dirty="0"/>
+          </a:p>
+        </p:txBody>
+      </p:sp>
+      <p:sp>
+        <p:nvSpPr>
+          <p:cNvPr id="12" name="Text 8"/>
+          <p:cNvSpPr/>
+          <p:nvPr/>
+        </p:nvSpPr>
+        <p:spPr>
+          <a:xfrm>
+            <a:off x="841248" y="4754880"/>
+            <a:ext cx="4956048" cy="822960"/>
           </a:xfrm>
           <a:prstGeom prst="rect">
             <a:avLst/>
@@ -10869,34 +13515,291 @@
           <a:p>
             <a:pPr indent="0" marL="0">
               <a:lnSpc>
-                <a:spcPts val="1600"/>
+                <a:spcPts val="1400"/>
               </a:lnSpc>
               <a:buNone/>
             </a:pPr>
             <a:r>
-              <a:rPr lang="en-US" sz="1150" dirty="0">
-                <a:solidFill>
-                  <a:srgbClr val="34525E"/>
+              <a:rPr lang="en-US" sz="1100" dirty="0">
+                <a:solidFill>
+                  <a:srgbClr val="C9DCE3"/>
                 </a:solidFill>
                 <a:latin typeface="Calibri" pitchFamily="34" charset="0"/>
                 <a:ea typeface="Calibri" pitchFamily="34" charset="-122"/>
                 <a:cs typeface="Calibri" pitchFamily="34" charset="-120"/>
               </a:rPr>
-              <a:t>The discharge list becomes a ranked worklist for the follow-up team, written straight into their queue.</a:t>
-            </a:r>
-            <a:endParaRPr lang="en-US" sz="1150" dirty="0"/>
-          </a:p>
-        </p:txBody>
-      </p:sp>
-      <p:sp>
-        <p:nvSpPr>
-          <p:cNvPr id="8" name="Shape 6"/>
-          <p:cNvSpPr/>
-          <p:nvPr/>
-        </p:nvSpPr>
-        <p:spPr>
-          <a:xfrm>
-            <a:off x="4279392" y="1737360"/>
+              <a:t>The 75+ problem is discrimination, not calibration. No threshold policy repairs it — a real fix has to be upstream: features that separate frailty within an elderly population, or a model fitted for that group.</a:t>
+            </a:r>
+            <a:endParaRPr lang="en-US" sz="1100" dirty="0"/>
+          </a:p>
+        </p:txBody>
+      </p:sp>
+      <p:sp>
+        <p:nvSpPr>
+          <p:cNvPr id="13" name="Shape 9"/>
+          <p:cNvSpPr/>
+          <p:nvPr/>
+        </p:nvSpPr>
+        <p:spPr>
+          <a:xfrm>
+            <a:off x="6272784" y="4297680"/>
+            <a:ext cx="5358384" cy="1371600"/>
+          </a:xfrm>
+          <a:prstGeom prst="roundRect">
+            <a:avLst>
+              <a:gd name="adj" fmla="val 5333"/>
+            </a:avLst>
+          </a:prstGeom>
+          <a:solidFill>
+            <a:srgbClr val="FFF3E6"/>
+          </a:solidFill>
+          <a:ln w="12700">
+            <a:solidFill>
+              <a:srgbClr val="FFF3E6"/>
+            </a:solidFill>
+            <a:prstDash val="solid"/>
+          </a:ln>
+        </p:spPr>
+      </p:sp>
+      <p:sp>
+        <p:nvSpPr>
+          <p:cNvPr id="14" name="Text 10"/>
+          <p:cNvSpPr/>
+          <p:nvPr/>
+        </p:nvSpPr>
+        <p:spPr>
+          <a:xfrm>
+            <a:off x="6528816" y="4443984"/>
+            <a:ext cx="4846320" cy="310896"/>
+          </a:xfrm>
+          <a:prstGeom prst="rect">
+            <a:avLst/>
+          </a:prstGeom>
+          <a:noFill/>
+          <a:ln/>
+        </p:spPr>
+        <p:txBody>
+          <a:bodyPr wrap="square" lIns="0" tIns="0" rIns="0" bIns="0" rtlCol="0" anchor="ctr"/>
+          <a:lstStyle/>
+          <a:p>
+            <a:pPr indent="0" marL="0">
+              <a:buNone/>
+            </a:pPr>
+            <a:r>
+              <a:rPr lang="en-US" sz="1400" b="1" dirty="0">
+                <a:solidFill>
+                  <a:srgbClr val="8A5217"/>
+                </a:solidFill>
+                <a:latin typeface="Cambria" pitchFamily="34" charset="0"/>
+                <a:ea typeface="Cambria" pitchFamily="34" charset="-122"/>
+                <a:cs typeface="Cambria" pitchFamily="34" charset="-120"/>
+              </a:rPr>
+              <a:t>And is stratifying even fairer?</a:t>
+            </a:r>
+            <a:endParaRPr lang="en-US" sz="1400" dirty="0"/>
+          </a:p>
+        </p:txBody>
+      </p:sp>
+      <p:sp>
+        <p:nvSpPr>
+          <p:cNvPr id="15" name="Text 11"/>
+          <p:cNvSpPr/>
+          <p:nvPr/>
+        </p:nvSpPr>
+        <p:spPr>
+          <a:xfrm>
+            <a:off x="6528816" y="4754880"/>
+            <a:ext cx="4846320" cy="822960"/>
+          </a:xfrm>
+          <a:prstGeom prst="rect">
+            <a:avLst/>
+          </a:prstGeom>
+          <a:noFill/>
+          <a:ln/>
+        </p:spPr>
+        <p:txBody>
+          <a:bodyPr wrap="square" lIns="0" tIns="0" rIns="0" bIns="0" rtlCol="0" anchor="ctr"/>
+          <a:lstStyle/>
+          <a:p>
+            <a:pPr indent="0" marL="0">
+              <a:lnSpc>
+                <a:spcPts val="1400"/>
+              </a:lnSpc>
+              <a:buNone/>
+            </a:pPr>
+            <a:r>
+              <a:rPr lang="en-US" sz="1100" dirty="0">
+                <a:solidFill>
+                  <a:srgbClr val="6B4213"/>
+                </a:solidFill>
+                <a:latin typeface="Calibri" pitchFamily="34" charset="0"/>
+                <a:ea typeface="Calibri" pitchFamily="34" charset="-122"/>
+                <a:cs typeface="Calibri" pitchFamily="34" charset="-120"/>
+              </a:rPr>
+              <a:t>Patients over 75 have the highest base rate in the data (12.2%). A policy that calls fewer of them equalises exposure but withdraws attention from the highest-risk group. That is a hospital's value judgement, not a metric.</a:t>
+            </a:r>
+            <a:endParaRPr lang="en-US" sz="1100" dirty="0"/>
+          </a:p>
+        </p:txBody>
+      </p:sp>
+    </p:spTree>
+  </p:cSld>
+  <p:clrMapOvr>
+    <a:masterClrMapping/>
+  </p:clrMapOvr>
+</p:sld>
+</file>
+
+<file path=ppt/slides/slide17.xml><?xml version="1.0" encoding="utf-8"?>
+<p:sld xmlns:a="http://schemas.openxmlformats.org/drawingml/2006/main" xmlns:r="http://schemas.openxmlformats.org/officeDocument/2006/relationships" xmlns:p="http://schemas.openxmlformats.org/presentationml/2006/main">
+  <p:cSld name="Slide 17">
+    <p:bg>
+      <p:bgPr>
+        <a:solidFill>
+          <a:srgbClr val="FFFFFF"/>
+        </a:solidFill>
+      </p:bgPr>
+    </p:bg>
+    <p:spTree>
+      <p:nvGrpSpPr>
+        <p:cNvPr id="1" name=""/>
+        <p:cNvGrpSpPr/>
+        <p:nvPr/>
+      </p:nvGrpSpPr>
+      <p:grpSpPr>
+        <a:xfrm>
+          <a:off x="0" y="0"/>
+          <a:ext cx="0" cy="0"/>
+          <a:chOff x="0" y="0"/>
+          <a:chExt cx="0" cy="0"/>
+        </a:xfrm>
+      </p:grpSpPr>
+      <p:sp>
+        <p:nvSpPr>
+          <p:cNvPr id="2" name="Text 0"/>
+          <p:cNvSpPr/>
+          <p:nvPr/>
+        </p:nvSpPr>
+        <p:spPr>
+          <a:xfrm>
+            <a:off x="566928" y="310896"/>
+            <a:ext cx="11057839" cy="237744"/>
+          </a:xfrm>
+          <a:prstGeom prst="rect">
+            <a:avLst/>
+          </a:prstGeom>
+          <a:noFill/>
+          <a:ln/>
+        </p:spPr>
+        <p:txBody>
+          <a:bodyPr wrap="square" lIns="0" tIns="0" rIns="0" bIns="0" rtlCol="0" anchor="ctr"/>
+          <a:lstStyle/>
+          <a:p>
+            <a:pPr indent="0" marL="0">
+              <a:buNone/>
+            </a:pPr>
+            <a:r>
+              <a:rPr lang="en-US" sz="1100" b="1" spc="200" kern="0" dirty="0">
+                <a:solidFill>
+                  <a:srgbClr val="2E8FA8"/>
+                </a:solidFill>
+                <a:latin typeface="Calibri" pitchFamily="34" charset="0"/>
+                <a:ea typeface="Calibri" pitchFamily="34" charset="-122"/>
+                <a:cs typeface="Calibri" pitchFamily="34" charset="-120"/>
+              </a:rPr>
+              <a:t>DEPLOYMENT</a:t>
+            </a:r>
+            <a:endParaRPr lang="en-US" sz="1100" dirty="0"/>
+          </a:p>
+        </p:txBody>
+      </p:sp>
+      <p:sp>
+        <p:nvSpPr>
+          <p:cNvPr id="3" name="Text 1"/>
+          <p:cNvSpPr/>
+          <p:nvPr/>
+        </p:nvSpPr>
+        <p:spPr>
+          <a:xfrm>
+            <a:off x="566928" y="566928"/>
+            <a:ext cx="11057839" cy="658368"/>
+          </a:xfrm>
+          <a:prstGeom prst="rect">
+            <a:avLst/>
+          </a:prstGeom>
+          <a:noFill/>
+          <a:ln/>
+        </p:spPr>
+        <p:txBody>
+          <a:bodyPr wrap="square" lIns="0" tIns="0" rIns="0" bIns="0" rtlCol="0" anchor="t"/>
+          <a:lstStyle/>
+          <a:p>
+            <a:pPr indent="0" marL="0">
+              <a:buNone/>
+            </a:pPr>
+            <a:r>
+              <a:rPr lang="en-US" sz="3200" b="1" dirty="0">
+                <a:solidFill>
+                  <a:srgbClr val="0B2E3B"/>
+                </a:solidFill>
+                <a:latin typeface="Cambria" pitchFamily="34" charset="0"/>
+                <a:ea typeface="Cambria" pitchFamily="34" charset="-122"/>
+                <a:cs typeface="Cambria" pitchFamily="34" charset="-120"/>
+              </a:rPr>
+              <a:t>Decision support, not an autonomous action</a:t>
+            </a:r>
+            <a:endParaRPr lang="en-US" sz="3200" dirty="0"/>
+          </a:p>
+        </p:txBody>
+      </p:sp>
+      <p:sp>
+        <p:nvSpPr>
+          <p:cNvPr id="4" name="Text 2"/>
+          <p:cNvSpPr/>
+          <p:nvPr/>
+        </p:nvSpPr>
+        <p:spPr>
+          <a:xfrm>
+            <a:off x="566928" y="1316736"/>
+            <a:ext cx="11057839" cy="274320"/>
+          </a:xfrm>
+          <a:prstGeom prst="rect">
+            <a:avLst/>
+          </a:prstGeom>
+          <a:noFill/>
+          <a:ln/>
+        </p:spPr>
+        <p:txBody>
+          <a:bodyPr wrap="square" lIns="0" tIns="0" rIns="0" bIns="0" rtlCol="0" anchor="ctr"/>
+          <a:lstStyle/>
+          <a:p>
+            <a:pPr indent="0" marL="0">
+              <a:buNone/>
+            </a:pPr>
+            <a:r>
+              <a:rPr lang="en-US" sz="1250" dirty="0">
+                <a:solidFill>
+                  <a:srgbClr val="5A7683"/>
+                </a:solidFill>
+                <a:latin typeface="Calibri" pitchFamily="34" charset="0"/>
+                <a:ea typeface="Calibri" pitchFamily="34" charset="-122"/>
+                <a:cs typeface="Calibri" pitchFamily="34" charset="-120"/>
+              </a:rPr>
+              <a:t>The model produces a ranked call list. A clinician decides what to do with it.</a:t>
+            </a:r>
+            <a:endParaRPr lang="en-US" sz="1250" dirty="0"/>
+          </a:p>
+        </p:txBody>
+      </p:sp>
+      <p:sp>
+        <p:nvSpPr>
+          <p:cNvPr id="5" name="Shape 3"/>
+          <p:cNvSpPr/>
+          <p:nvPr/>
+        </p:nvSpPr>
+        <p:spPr>
+          <a:xfrm>
+            <a:off x="566928" y="1737360"/>
             <a:ext cx="3474720" cy="1591056"/>
           </a:xfrm>
           <a:prstGeom prst="roundRect">
@@ -10917,13 +13820,13 @@
       </p:sp>
       <p:sp>
         <p:nvSpPr>
-          <p:cNvPr id="9" name="Text 7"/>
-          <p:cNvSpPr/>
-          <p:nvPr/>
-        </p:nvSpPr>
-        <p:spPr>
-          <a:xfrm>
-            <a:off x="4535424" y="1901952"/>
+          <p:cNvPr id="6" name="Text 4"/>
+          <p:cNvSpPr/>
+          <p:nvPr/>
+        </p:nvSpPr>
+        <p:spPr>
+          <a:xfrm>
+            <a:off x="822960" y="1901952"/>
             <a:ext cx="2962656" cy="310896"/>
           </a:xfrm>
           <a:prstGeom prst="rect">
@@ -10948,7 +13851,7 @@
                 <a:ea typeface="Cambria" pitchFamily="34" charset="-122"/>
                 <a:cs typeface="Cambria" pitchFamily="34" charset="-120"/>
               </a:rPr>
-              <a:t>Real-time endpoint</a:t>
+              <a:t>Nightly batch</a:t>
             </a:r>
             <a:endParaRPr lang="en-US" sz="1500" dirty="0"/>
           </a:p>
@@ -10956,13 +13859,13 @@
       </p:sp>
       <p:sp>
         <p:nvSpPr>
-          <p:cNvPr id="10" name="Text 8"/>
-          <p:cNvSpPr/>
-          <p:nvPr/>
-        </p:nvSpPr>
-        <p:spPr>
-          <a:xfrm>
-            <a:off x="4535424" y="2249424"/>
+          <p:cNvPr id="7" name="Text 5"/>
+          <p:cNvSpPr/>
+          <p:nvPr/>
+        </p:nvSpPr>
+        <p:spPr>
+          <a:xfrm>
+            <a:off x="822960" y="2249424"/>
             <a:ext cx="2962656" cy="914400"/>
           </a:xfrm>
           <a:prstGeom prst="rect">
@@ -10990,7 +13893,7 @@
                 <a:ea typeface="Calibri" pitchFamily="34" charset="-122"/>
                 <a:cs typeface="Calibri" pitchFamily="34" charset="-120"/>
               </a:rPr>
-              <a:t>FastAPI service — /score returns risk, flag, band and disclaimer. Sub-millisecond tree inference.</a:t>
+              <a:t>The discharge list becomes a ranked worklist for the follow-up team, written straight into their queue.</a:t>
             </a:r>
             <a:endParaRPr lang="en-US" sz="1150" dirty="0"/>
           </a:p>
@@ -10998,13 +13901,13 @@
       </p:sp>
       <p:sp>
         <p:nvSpPr>
-          <p:cNvPr id="11" name="Shape 9"/>
-          <p:cNvSpPr/>
-          <p:nvPr/>
-        </p:nvSpPr>
-        <p:spPr>
-          <a:xfrm>
-            <a:off x="7991856" y="1737360"/>
+          <p:cNvPr id="8" name="Shape 6"/>
+          <p:cNvSpPr/>
+          <p:nvPr/>
+        </p:nvSpPr>
+        <p:spPr>
+          <a:xfrm>
+            <a:off x="4279392" y="1737360"/>
             <a:ext cx="3474720" cy="1591056"/>
           </a:xfrm>
           <a:prstGeom prst="roundRect">
@@ -11025,6 +13928,114 @@
       </p:sp>
       <p:sp>
         <p:nvSpPr>
+          <p:cNvPr id="9" name="Text 7"/>
+          <p:cNvSpPr/>
+          <p:nvPr/>
+        </p:nvSpPr>
+        <p:spPr>
+          <a:xfrm>
+            <a:off x="4535424" y="1901952"/>
+            <a:ext cx="2962656" cy="310896"/>
+          </a:xfrm>
+          <a:prstGeom prst="rect">
+            <a:avLst/>
+          </a:prstGeom>
+          <a:noFill/>
+          <a:ln/>
+        </p:spPr>
+        <p:txBody>
+          <a:bodyPr wrap="square" lIns="0" tIns="0" rIns="0" bIns="0" rtlCol="0" anchor="ctr"/>
+          <a:lstStyle/>
+          <a:p>
+            <a:pPr indent="0" marL="0">
+              <a:buNone/>
+            </a:pPr>
+            <a:r>
+              <a:rPr lang="en-US" sz="1500" b="1" dirty="0">
+                <a:solidFill>
+                  <a:srgbClr val="0B2E3B"/>
+                </a:solidFill>
+                <a:latin typeface="Cambria" pitchFamily="34" charset="0"/>
+                <a:ea typeface="Cambria" pitchFamily="34" charset="-122"/>
+                <a:cs typeface="Cambria" pitchFamily="34" charset="-120"/>
+              </a:rPr>
+              <a:t>Real-time endpoint</a:t>
+            </a:r>
+            <a:endParaRPr lang="en-US" sz="1500" dirty="0"/>
+          </a:p>
+        </p:txBody>
+      </p:sp>
+      <p:sp>
+        <p:nvSpPr>
+          <p:cNvPr id="10" name="Text 8"/>
+          <p:cNvSpPr/>
+          <p:nvPr/>
+        </p:nvSpPr>
+        <p:spPr>
+          <a:xfrm>
+            <a:off x="4535424" y="2249424"/>
+            <a:ext cx="2962656" cy="914400"/>
+          </a:xfrm>
+          <a:prstGeom prst="rect">
+            <a:avLst/>
+          </a:prstGeom>
+          <a:noFill/>
+          <a:ln/>
+        </p:spPr>
+        <p:txBody>
+          <a:bodyPr wrap="square" lIns="0" tIns="0" rIns="0" bIns="0" rtlCol="0" anchor="ctr"/>
+          <a:lstStyle/>
+          <a:p>
+            <a:pPr indent="0" marL="0">
+              <a:lnSpc>
+                <a:spcPts val="1600"/>
+              </a:lnSpc>
+              <a:buNone/>
+            </a:pPr>
+            <a:r>
+              <a:rPr lang="en-US" sz="1150" dirty="0">
+                <a:solidFill>
+                  <a:srgbClr val="34525E"/>
+                </a:solidFill>
+                <a:latin typeface="Calibri" pitchFamily="34" charset="0"/>
+                <a:ea typeface="Calibri" pitchFamily="34" charset="-122"/>
+                <a:cs typeface="Calibri" pitchFamily="34" charset="-120"/>
+              </a:rPr>
+              <a:t>FastAPI service — /score returns risk, flag, band and disclaimer. Sub-millisecond tree inference.</a:t>
+            </a:r>
+            <a:endParaRPr lang="en-US" sz="1150" dirty="0"/>
+          </a:p>
+        </p:txBody>
+      </p:sp>
+      <p:sp>
+        <p:nvSpPr>
+          <p:cNvPr id="11" name="Shape 9"/>
+          <p:cNvSpPr/>
+          <p:nvPr/>
+        </p:nvSpPr>
+        <p:spPr>
+          <a:xfrm>
+            <a:off x="7991856" y="1737360"/>
+            <a:ext cx="3474720" cy="1591056"/>
+          </a:xfrm>
+          <a:prstGeom prst="roundRect">
+            <a:avLst>
+              <a:gd name="adj" fmla="val 4598"/>
+            </a:avLst>
+          </a:prstGeom>
+          <a:solidFill>
+            <a:srgbClr val="EEF4F6"/>
+          </a:solidFill>
+          <a:ln w="12700">
+            <a:solidFill>
+              <a:srgbClr val="EEF4F6"/>
+            </a:solidFill>
+            <a:prstDash val="solid"/>
+          </a:ln>
+        </p:spPr>
+      </p:sp>
+      <p:sp>
+        <p:nvSpPr>
           <p:cNvPr id="12" name="Text 10"/>
           <p:cNvSpPr/>
           <p:nvPr/>
@@ -11386,9 +14397,9 @@
 </p:sld>
 </file>
 
-<file path=ppt/slides/slide15.xml><?xml version="1.0" encoding="utf-8"?>
+<file path=ppt/slides/slide18.xml><?xml version="1.0" encoding="utf-8"?>
 <p:sld xmlns:a="http://schemas.openxmlformats.org/drawingml/2006/main" xmlns:r="http://schemas.openxmlformats.org/officeDocument/2006/relationships" xmlns:p="http://schemas.openxmlformats.org/presentationml/2006/main">
-  <p:cSld name="Slide 15">
+  <p:cSld name="Slide 18">
     <p:bg>
       <p:bgPr>
         <a:solidFill>
@@ -16757,7 +19768,7 @@
                 <a:ea typeface="Cambria" pitchFamily="34" charset="-122"/>
                 <a:cs typeface="Cambria" pitchFamily="34" charset="-120"/>
               </a:rPr>
-              <a:t>Read honestly</a:t>
+              <a:t>Which gaps are real?</a:t>
             </a:r>
             <a:endParaRPr lang="en-US" sz="1500" dirty="0"/>
           </a:p>
@@ -16786,12 +19797,12 @@
           <a:p>
             <a:pPr indent="0" marL="0">
               <a:lnSpc>
-                <a:spcPts val="1600"/>
+                <a:spcPts val="1400"/>
               </a:lnSpc>
               <a:buNone/>
             </a:pPr>
             <a:r>
-              <a:rPr lang="en-US" sz="1200" dirty="0">
+              <a:rPr lang="en-US" sz="1050" dirty="0">
                 <a:solidFill>
                   <a:srgbClr val="6B4213"/>
                 </a:solidFill>
@@ -16799,46 +19810,115 @@
                 <a:ea typeface="Calibri" pitchFamily="34" charset="-122"/>
                 <a:cs typeface="Calibri" pitchFamily="34" charset="-120"/>
               </a:rPr>
-              <a:t>XGBoost is 0.0003 ROC-AUC behind — inside a fold-to-fold standard deviation of 0.006. The defensible claim is that boosting beats linear and bagged models by ~0.02 PR-AUC, and the two boosters are indistinguishable.</a:t>
-            </a:r>
-            <a:endParaRPr lang="en-US" sz="1200" dirty="0"/>
-          </a:p>
-        </p:txBody>
-      </p:sp>
-      <p:sp>
-        <p:nvSpPr>
-          <p:cNvPr id="12" name="Text 9"/>
-          <p:cNvSpPr/>
-          <p:nvPr/>
-        </p:nvSpPr>
-        <p:spPr>
-          <a:xfrm>
-            <a:off x="566928" y="6163056"/>
-            <a:ext cx="11057839" cy="237744"/>
-          </a:xfrm>
-          <a:prstGeom prst="rect">
-            <a:avLst/>
-          </a:prstGeom>
-          <a:noFill/>
-          <a:ln/>
-        </p:spPr>
-        <p:txBody>
-          <a:bodyPr wrap="square" lIns="0" tIns="0" rIns="0" bIns="0" rtlCol="0" anchor="ctr"/>
-          <a:lstStyle/>
+              <a:t>Paired bootstrap on Δ PR-AUC:</a:t>
+            </a:r>
+            <a:endParaRPr lang="en-US" sz="1050" dirty="0"/>
+          </a:p>
           <a:p>
             <a:pPr indent="0" marL="0">
+              <a:lnSpc>
+                <a:spcPts val="1400"/>
+              </a:lnSpc>
               <a:buNone/>
             </a:pPr>
-            <a:r>
-              <a:rPr lang="en-US" sz="950" i="1" dirty="0">
-                <a:solidFill>
-                  <a:srgbClr val="9AB0B9"/>
+            <a:endParaRPr lang="en-US" sz="1050" dirty="0"/>
+          </a:p>
+          <a:p>
+            <a:pPr indent="0" marL="0">
+              <a:lnSpc>
+                <a:spcPts val="1400"/>
+              </a:lnSpc>
+              <a:buNone/>
+            </a:pPr>
+            <a:r>
+              <a:rPr lang="en-US" sz="1050" dirty="0">
+                <a:solidFill>
+                  <a:srgbClr val="6B4213"/>
                 </a:solidFill>
                 <a:latin typeface="Calibri" pitchFamily="34" charset="0"/>
                 <a:ea typeface="Calibri" pitchFamily="34" charset="-122"/>
                 <a:cs typeface="Calibri" pitchFamily="34" charset="-120"/>
               </a:rPr>
-              <a:t>Logistic regression reaches 0.213 — 89% of the boosted result from a fully interpretable model.</a:t>
+              <a:t>vs XGBoost   +0.0022  [−0.0017, +0.0058]   not resolved</a:t>
+            </a:r>
+            <a:endParaRPr lang="en-US" sz="1050" dirty="0"/>
+          </a:p>
+          <a:p>
+            <a:pPr indent="0" marL="0">
+              <a:lnSpc>
+                <a:spcPts val="1400"/>
+              </a:lnSpc>
+              <a:buNone/>
+            </a:pPr>
+            <a:r>
+              <a:rPr lang="en-US" sz="1050" dirty="0">
+                <a:solidFill>
+                  <a:srgbClr val="6B4213"/>
+                </a:solidFill>
+                <a:latin typeface="Calibri" pitchFamily="34" charset="0"/>
+                <a:ea typeface="Calibri" pitchFamily="34" charset="-122"/>
+                <a:cs typeface="Calibri" pitchFamily="34" charset="-120"/>
+              </a:rPr>
+              <a:t>vs Random forest   +0.0124  [+0.0064, +0.0189]   resolved</a:t>
+            </a:r>
+            <a:endParaRPr lang="en-US" sz="1050" dirty="0"/>
+          </a:p>
+          <a:p>
+            <a:pPr indent="0" marL="0">
+              <a:lnSpc>
+                <a:spcPts val="1400"/>
+              </a:lnSpc>
+              <a:buNone/>
+            </a:pPr>
+            <a:r>
+              <a:rPr lang="en-US" sz="1050" dirty="0">
+                <a:solidFill>
+                  <a:srgbClr val="6B4213"/>
+                </a:solidFill>
+                <a:latin typeface="Calibri" pitchFamily="34" charset="0"/>
+                <a:ea typeface="Calibri" pitchFamily="34" charset="-122"/>
+                <a:cs typeface="Calibri" pitchFamily="34" charset="-120"/>
+              </a:rPr>
+              <a:t>vs Logistic reg.   +0.0249  [+0.0177, +0.0321]   resolved</a:t>
+            </a:r>
+            <a:endParaRPr lang="en-US" sz="1050" dirty="0"/>
+          </a:p>
+        </p:txBody>
+      </p:sp>
+      <p:sp>
+        <p:nvSpPr>
+          <p:cNvPr id="12" name="Text 9"/>
+          <p:cNvSpPr/>
+          <p:nvPr/>
+        </p:nvSpPr>
+        <p:spPr>
+          <a:xfrm>
+            <a:off x="566928" y="6163056"/>
+            <a:ext cx="11057839" cy="237744"/>
+          </a:xfrm>
+          <a:prstGeom prst="rect">
+            <a:avLst/>
+          </a:prstGeom>
+          <a:noFill/>
+          <a:ln/>
+        </p:spPr>
+        <p:txBody>
+          <a:bodyPr wrap="square" lIns="0" tIns="0" rIns="0" bIns="0" rtlCol="0" anchor="ctr"/>
+          <a:lstStyle/>
+          <a:p>
+            <a:pPr indent="0" marL="0">
+              <a:buNone/>
+            </a:pPr>
+            <a:r>
+              <a:rPr lang="en-US" sz="950" i="1" dirty="0">
+                <a:solidFill>
+                  <a:srgbClr val="9AB0B9"/>
+                </a:solidFill>
+                <a:latin typeface="Calibri" pitchFamily="34" charset="0"/>
+                <a:ea typeface="Calibri" pitchFamily="34" charset="-122"/>
+                <a:cs typeface="Calibri" pitchFamily="34" charset="-120"/>
+              </a:rPr>
+              <a:t>Boosting genuinely beats bagging and linear models. Which booster wins is not resolved by this data.</a:t>
             </a:r>
             <a:endParaRPr lang="en-US" sz="950" dirty="0"/>
           </a:p>

--- a/ML_Bubble_2026_Readmission_Risk.pptx
+++ b/ML_Bubble_2026_Readmission_Risk.pptx
@@ -23,9 +23,10 @@
     <p:sldId id="271" r:id="rId17"/>
     <p:sldId id="272" r:id="rId18"/>
     <p:sldId id="273" r:id="rId19"/>
+    <p:sldId id="274" r:id="rId20"/>
   </p:sldIdLst>
   <p:notesMasterIdLst>
-    <p:notesMasterId r:id="rId20"/>
+    <p:notesMasterId r:id="rId21"/>
   </p:notesMasterIdLst>
   <p:sldSz cx="12192000" cy="6858000"/>
   <p:notesSz cx="6858000" cy="12192000"/>
@@ -1578,7 +1579,7 @@
           <a:p>
             <a:r>
               <a:rPr lang="en-US" dirty="0"/>
-              <a:t>The data is from 1999–2008. Recalibration on recent local data is mandatory before any real use, not optional.</a:t>
+              <a:t>This is the payoff for diagnosing before prescribing. Also worth raising if asked: competing risk. A patient discharged alive who dies at home inside 30 days is recorded as 'not readmitted'. That misclassification concentrates in the oldest band by construction and would depress measurable discrimination exactly where we see it. No post-discharge mortality in this dataset, so it stays a hypothesis.</a:t>
             </a:r>
             <a:endParaRPr lang="en-US" dirty="0"/>
           </a:p>
@@ -1666,7 +1667,7 @@
           <a:p>
             <a:r>
               <a:rPr lang="en-US" dirty="0"/>
-              <a:t>Close on credibility rather than on a number. The limitations slide is the one that separates a model that was measured from a model that was demoed.</a:t>
+              <a:t>The data is from 1999–2008. Recalibration on recent local data is mandatory before any real use, not optional.</a:t>
             </a:r>
             <a:endParaRPr lang="en-US" dirty="0"/>
           </a:p>
@@ -1690,6 +1691,94 @@
             <a:fld id="{F7021451-1387-4CA6-816F-3879F97B5CBC}" type="slidenum">
               <a:rPr lang="en-US"/>
               <a:t>18</a:t>
+            </a:fld>
+            <a:endParaRPr lang="en-US"/>
+          </a:p>
+        </p:txBody>
+      </p:sp>
+    </p:spTree>
+    <p:extLst>
+      <p:ext uri="{BB962C8B-B14F-4D97-AF65-F5344CB8AC3E}">
+        <p14:creationId xmlns:p14="http://schemas.microsoft.com/office/powerpoint/2010/main" val="1024086991"/>
+      </p:ext>
+    </p:extLst>
+  </p:cSld>
+  <p:clrMapOvr>
+    <a:masterClrMapping/>
+  </p:clrMapOvr>
+</p:notes>
+</file>
+
+<file path=ppt/notesSlides/notesSlide19.xml><?xml version="1.0" encoding="utf-8"?>
+<p:notes xmlns:a="http://schemas.openxmlformats.org/drawingml/2006/main" xmlns:r="http://schemas.openxmlformats.org/officeDocument/2006/relationships" xmlns:p="http://schemas.openxmlformats.org/presentationml/2006/main">
+  <p:cSld>
+    <p:spTree>
+      <p:nvGrpSpPr>
+        <p:cNvPr id="1" name=""/>
+        <p:cNvGrpSpPr/>
+        <p:nvPr/>
+      </p:nvGrpSpPr>
+      <p:grpSpPr>
+        <a:xfrm>
+          <a:off x="0" y="0"/>
+          <a:ext cx="0" cy="0"/>
+          <a:chOff x="0" y="0"/>
+          <a:chExt cx="0" cy="0"/>
+        </a:xfrm>
+      </p:grpSpPr>
+      <p:sp>
+        <p:nvSpPr>
+          <p:cNvPr id="2" name="Slide Image Placeholder 1"/>
+          <p:cNvSpPr>
+            <a:spLocks noGrp="1" noRot="1" noChangeAspect="1"/>
+          </p:cNvSpPr>
+          <p:nvPr>
+            <p:ph type="sldImg"/>
+          </p:nvPr>
+        </p:nvSpPr>
+        <p:spPr/>
+      </p:sp>
+      <p:sp>
+        <p:nvSpPr>
+          <p:cNvPr id="3" name="Notes Placeholder 2"/>
+          <p:cNvSpPr>
+            <a:spLocks noGrp="1"/>
+          </p:cNvSpPr>
+          <p:nvPr>
+            <p:ph type="body" idx="1"/>
+          </p:nvPr>
+        </p:nvSpPr>
+        <p:spPr/>
+        <p:txBody>
+          <a:bodyPr/>
+          <a:lstStyle/>
+          <a:p>
+            <a:r>
+              <a:rPr lang="en-US" dirty="0"/>
+              <a:t>Close on credibility rather than on a number. The limitations slide is the one that separates a model that was measured from a model that was demoed.</a:t>
+            </a:r>
+            <a:endParaRPr lang="en-US" dirty="0"/>
+          </a:p>
+        </p:txBody>
+      </p:sp>
+      <p:sp>
+        <p:nvSpPr>
+          <p:cNvPr id="4" name="Slide Number Placeholder 3"/>
+          <p:cNvSpPr>
+            <a:spLocks noGrp="1"/>
+          </p:cNvSpPr>
+          <p:nvPr>
+            <p:ph type="sldNum" sz="quarter" idx="10"/>
+          </p:nvPr>
+        </p:nvSpPr>
+        <p:spPr/>
+        <p:txBody>
+          <a:bodyPr/>
+          <a:lstStyle/>
+          <a:p>
+            <a:fld id="{F7021451-1387-4CA6-816F-3879F97B5CBC}" type="slidenum">
+              <a:rPr lang="en-US"/>
+              <a:t>19</a:t>
             </a:fld>
             <a:endParaRPr lang="en-US"/>
           </a:p>
@@ -11368,7 +11457,7 @@
                           <a:ea typeface="Calibri" pitchFamily="34" charset="-122"/>
                           <a:cs typeface="Calibri" pitchFamily="34" charset="-120"/>
                         </a:rPr>
-                        <a:t>60–75</a:t>
+                        <a:t>60–80</a:t>
                       </a:r>
                       <a:endParaRPr lang="en-US" sz="1200" dirty="0">
                         <a:latin typeface="Calibri" charset="0"/>
@@ -11778,7 +11867,7 @@
                           <a:ea typeface="Calibri" pitchFamily="34" charset="-122"/>
                           <a:cs typeface="Calibri" pitchFamily="34" charset="-120"/>
                         </a:rPr>
-                        <a:t>75 and over</a:t>
+                        <a:t>80 and over</a:t>
                       </a:r>
                       <a:endParaRPr lang="en-US" sz="1200" dirty="0">
                         <a:latin typeface="Calibri" charset="0"/>
@@ -12249,7 +12338,7 @@
                 <a:ea typeface="Calibri" pitchFamily="34" charset="-122"/>
                 <a:cs typeface="Calibri" pitchFamily="34" charset="-120"/>
               </a:rPr>
-              <a:t>The two large racial groups get near-identical flag rates and recall. Patients over 75, however, are flagged most often (23.0%) while the model ranks them worst (ROC-AUC 0.613) — so the tool spends disproportionate follow-up capacity on the group where its ordering is least trustworthy.</a:t>
+              <a:t>The two large racial groups get near-identical flag rates and recall. Patients over 80, however, are flagged most often (23.0%) while the model ranks them worst (ROC-AUC 0.613) — so the tool spends disproportionate follow-up capacity on the group where its ordering is least trustworthy.</a:t>
             </a:r>
             <a:endParaRPr lang="en-US" sz="1300" dirty="0"/>
           </a:p>
@@ -12291,7 +12380,7 @@
                 <a:ea typeface="Calibri" pitchFamily="34" charset="-122"/>
                 <a:cs typeface="Calibri" pitchFamily="34" charset="-120"/>
               </a:rPr>
-              <a:t>Almost everything the model relies on is a proxy for frailty, and nearly all patients over 75 look frail — so the features stop separating within that group.</a:t>
+              <a:t>Almost everything the model relies on is a proxy for frailty, and nearly all patients over 80 look frail — so the features stop separating within that group.</a:t>
             </a:r>
             <a:endParaRPr lang="en-US" sz="1250" dirty="0"/>
           </a:p>
@@ -12403,7 +12492,7 @@
                 <a:ea typeface="Calibri" pitchFamily="34" charset="-122"/>
                 <a:cs typeface="Calibri" pitchFamily="34" charset="-120"/>
               </a:rPr>
-              <a:t>A separate model for over-75s</a:t>
+              <a:t>A separate model for the oldest band</a:t>
             </a:r>
             <a:endParaRPr lang="en-US" sz="1300" dirty="0"/>
           </a:p>
@@ -12451,7 +12540,7 @@
                 <a:ea typeface="Calibri" pitchFamily="34" charset="-122"/>
                 <a:cs typeface="Calibri" pitchFamily="34" charset="-120"/>
               </a:rPr>
-              <a:t>Or restrict the tool to under-75s and triage older patients by existing clinical judgement</a:t>
+              <a:t>Or restrict the tool to under-80s and triage older patients by existing clinical judgement</a:t>
             </a:r>
             <a:endParaRPr lang="en-US" sz="1300" dirty="0"/>
           </a:p>
@@ -13354,7 +13443,7 @@
                 <a:ea typeface="Calibri" pitchFamily="34" charset="-122"/>
                 <a:cs typeface="Calibri" pitchFamily="34" charset="-120"/>
               </a:rPr>
-              <a:t>Stratifying moves calls away from over-75s and toward the 40–60 band, at a cost of 10 true positives.</a:t>
+              <a:t>Stratifying moves calls away from the oldest band and toward the 40–60 band, at a cost of 10 true positives.</a:t>
             </a:r>
             <a:endParaRPr lang="en-US" sz="1200" dirty="0"/>
           </a:p>
@@ -13420,7 +13509,7 @@
                 <a:ea typeface="Calibri" pitchFamily="34" charset="-122"/>
                 <a:cs typeface="Calibri" pitchFamily="34" charset="-120"/>
               </a:rPr>
-              <a:t>75+ ROC-AUC is 0.613 under both policies.</a:t>
+              <a:t>80+ ROC-AUC is 0.613 under both policies.</a:t>
             </a:r>
             <a:endParaRPr lang="en-US" sz="1150" dirty="0"/>
           </a:p>
@@ -13528,7 +13617,7 @@
                 <a:ea typeface="Calibri" pitchFamily="34" charset="-122"/>
                 <a:cs typeface="Calibri" pitchFamily="34" charset="-120"/>
               </a:rPr>
-              <a:t>The 75+ problem is discrimination, not calibration. No threshold policy repairs it — a real fix has to be upstream: features that separate frailty within an elderly population, or a model fitted for that group.</a:t>
+              <a:t>The 80+ problem is discrimination, not calibration. No threshold policy repairs it — a real fix has to be upstream: features that separate frailty within an elderly population, or a model fitted for that group.</a:t>
             </a:r>
             <a:endParaRPr lang="en-US" sz="1100" dirty="0"/>
           </a:p>
@@ -13636,7 +13725,7 @@
                 <a:ea typeface="Calibri" pitchFamily="34" charset="-122"/>
                 <a:cs typeface="Calibri" pitchFamily="34" charset="-120"/>
               </a:rPr>
-              <a:t>Patients over 75 have the highest base rate in the data (12.2%). A policy that calls fewer of them equalises exposure but withdraws attention from the highest-risk group. That is a hospital's value judgement, not a metric.</a:t>
+              <a:t>Patients over 80 have the highest base rate in the data (12.2%). A policy that calls fewer of them equalises exposure but withdraws attention from the highest-risk group. That is a hospital's value judgement, not a metric.</a:t>
             </a:r>
             <a:endParaRPr lang="en-US" sz="1100" dirty="0"/>
           </a:p>
@@ -13707,7 +13796,7 @@
                 <a:ea typeface="Calibri" pitchFamily="34" charset="-122"/>
                 <a:cs typeface="Calibri" pitchFamily="34" charset="-120"/>
               </a:rPr>
-              <a:t>DEPLOYMENT</a:t>
+              <a:t>ROOT CAUSE</a:t>
             </a:r>
             <a:endParaRPr lang="en-US" sz="1100" dirty="0"/>
           </a:p>
@@ -13746,7 +13835,7 @@
                 <a:ea typeface="Cambria" pitchFamily="34" charset="-122"/>
                 <a:cs typeface="Cambria" pitchFamily="34" charset="-120"/>
               </a:rPr>
-              <a:t>Decision support, not an autonomous action</a:t>
+              <a:t>The signal is not in the data — measured, not assumed</a:t>
             </a:r>
             <a:endParaRPr lang="en-US" sz="3200" dirty="0"/>
           </a:p>
@@ -13785,26 +13874,2339 @@
                 <a:ea typeface="Calibri" pitchFamily="34" charset="-122"/>
                 <a:cs typeface="Calibri" pitchFamily="34" charset="-120"/>
               </a:rPr>
-              <a:t>The model produces a ranked call list. A clinician decides what to do with it.</a:t>
+              <a:t>Univariate AUC of each feature within each age band. Model-free: how well one raw number separates outcomes.</a:t>
             </a:r>
             <a:endParaRPr lang="en-US" sz="1250" dirty="0"/>
           </a:p>
         </p:txBody>
       </p:sp>
-      <p:sp>
-        <p:nvSpPr>
-          <p:cNvPr id="5" name="Shape 3"/>
-          <p:cNvSpPr/>
-          <p:nvPr/>
-        </p:nvSpPr>
-        <p:spPr>
-          <a:xfrm>
-            <a:off x="566928" y="1737360"/>
-            <a:ext cx="3474720" cy="1591056"/>
+      <p:graphicFrame>
+        <p:nvGraphicFramePr>
+          <p:cNvPr id="18" name="Table 0"/>
+          <p:cNvGraphicFramePr>
+            <a:graphicFrameLocks noGrp="1"/>
+          </p:cNvGraphicFramePr>
+          <p:nvPr>
+            <p:extLst>
+              <p:ext uri="{D42A27DB-BD31-4B8C-83A1-F6EECF244321}">
+                <p14:modId xmlns:p14="http://schemas.microsoft.com/office/powerpoint/2010/main" val="1579011935"/>
+              </p:ext>
+            </p:extLst>
+          </p:nvPr>
+        </p:nvGraphicFramePr>
+        <p:xfrm>
+          <a:off x="566928" y="1737360"/>
+          <a:ext cx="6400800" cy="914400"/>
+        </p:xfrm>
+        <a:graphic>
+          <a:graphicData uri="http://schemas.openxmlformats.org/drawingml/2006/table">
+            <a:tbl>
+              <a:tblPr/>
+              <a:tblGrid>
+                <a:gridCol w="2377440"/>
+                <a:gridCol w="1005840"/>
+                <a:gridCol w="1005840"/>
+                <a:gridCol w="1005840"/>
+                <a:gridCol w="1005840"/>
+              </a:tblGrid>
+              <a:tr h="310896">
+                <a:tc>
+                  <a:txBody>
+                    <a:bodyPr/>
+                    <a:lstStyle/>
+                    <a:p>
+                      <a:pPr indent="0" marL="0">
+                        <a:buNone/>
+                      </a:pPr>
+                      <a:r>
+                        <a:rPr lang="en-US" sz="1150" dirty="0">
+                          <a:solidFill>
+                            <a:srgbClr val="1F3D49"/>
+                          </a:solidFill>
+                          <a:latin typeface="Calibri" pitchFamily="34" charset="0"/>
+                          <a:ea typeface="Calibri" pitchFamily="34" charset="-122"/>
+                          <a:cs typeface="Calibri" pitchFamily="34" charset="-120"/>
+                        </a:rPr>
+                        <a:t>Feature</a:t>
+                      </a:r>
+                      <a:endParaRPr lang="en-US" sz="1150" dirty="0">
+                        <a:latin typeface="Calibri" charset="0"/>
+                        <a:ea typeface="Calibri" charset="0"/>
+                        <a:cs typeface="Calibri" charset="0"/>
+                      </a:endParaRPr>
+                    </a:p>
+                  </a:txBody>
+                  <a:tcPr marL="91440" marR="91440" marT="45720" marB="45720">
+                    <a:lnL w="12700" cap="flat" cmpd="sng" algn="ctr">
+                      <a:solidFill>
+                        <a:srgbClr val="DCE7EB"/>
+                      </a:solidFill>
+                      <a:prstDash val="solid"/>
+                      <a:round/>
+                      <a:headEnd type="none" w="med" len="med"/>
+                      <a:tailEnd type="none" w="med" len="med"/>
+                    </a:lnL>
+                    <a:lnR w="12700" cap="flat" cmpd="sng" algn="ctr">
+                      <a:solidFill>
+                        <a:srgbClr val="DCE7EB"/>
+                      </a:solidFill>
+                      <a:prstDash val="solid"/>
+                      <a:round/>
+                      <a:headEnd type="none" w="med" len="med"/>
+                      <a:tailEnd type="none" w="med" len="med"/>
+                    </a:lnR>
+                    <a:lnT w="12700" cap="flat" cmpd="sng" algn="ctr">
+                      <a:solidFill>
+                        <a:srgbClr val="DCE7EB"/>
+                      </a:solidFill>
+                      <a:prstDash val="solid"/>
+                      <a:round/>
+                      <a:headEnd type="none" w="med" len="med"/>
+                      <a:tailEnd type="none" w="med" len="med"/>
+                    </a:lnT>
+                    <a:lnB w="12700" cap="flat" cmpd="sng" algn="ctr">
+                      <a:solidFill>
+                        <a:srgbClr val="DCE7EB"/>
+                      </a:solidFill>
+                      <a:prstDash val="solid"/>
+                      <a:round/>
+                      <a:headEnd type="none" w="med" len="med"/>
+                      <a:tailEnd type="none" w="med" len="med"/>
+                    </a:lnB>
+                    <a:solidFill>
+                      <a:srgbClr val="FFFFFF"/>
+                    </a:solidFill>
+                  </a:tcPr>
+                </a:tc>
+                <a:tc>
+                  <a:txBody>
+                    <a:bodyPr/>
+                    <a:lstStyle/>
+                    <a:p>
+                      <a:pPr indent="0" marL="0">
+                        <a:buNone/>
+                      </a:pPr>
+                      <a:r>
+                        <a:rPr lang="en-US" sz="1150" dirty="0">
+                          <a:solidFill>
+                            <a:srgbClr val="1F3D49"/>
+                          </a:solidFill>
+                          <a:latin typeface="Calibri" pitchFamily="34" charset="0"/>
+                          <a:ea typeface="Calibri" pitchFamily="34" charset="-122"/>
+                          <a:cs typeface="Calibri" pitchFamily="34" charset="-120"/>
+                        </a:rPr>
+                        <a:t>&lt;40</a:t>
+                      </a:r>
+                      <a:endParaRPr lang="en-US" sz="1150" dirty="0">
+                        <a:latin typeface="Calibri" charset="0"/>
+                        <a:ea typeface="Calibri" charset="0"/>
+                        <a:cs typeface="Calibri" charset="0"/>
+                      </a:endParaRPr>
+                    </a:p>
+                  </a:txBody>
+                  <a:tcPr marL="91440" marR="91440" marT="45720" marB="45720">
+                    <a:lnL w="12700" cap="flat" cmpd="sng" algn="ctr">
+                      <a:solidFill>
+                        <a:srgbClr val="DCE7EB"/>
+                      </a:solidFill>
+                      <a:prstDash val="solid"/>
+                      <a:round/>
+                      <a:headEnd type="none" w="med" len="med"/>
+                      <a:tailEnd type="none" w="med" len="med"/>
+                    </a:lnL>
+                    <a:lnR w="12700" cap="flat" cmpd="sng" algn="ctr">
+                      <a:solidFill>
+                        <a:srgbClr val="DCE7EB"/>
+                      </a:solidFill>
+                      <a:prstDash val="solid"/>
+                      <a:round/>
+                      <a:headEnd type="none" w="med" len="med"/>
+                      <a:tailEnd type="none" w="med" len="med"/>
+                    </a:lnR>
+                    <a:lnT w="12700" cap="flat" cmpd="sng" algn="ctr">
+                      <a:solidFill>
+                        <a:srgbClr val="DCE7EB"/>
+                      </a:solidFill>
+                      <a:prstDash val="solid"/>
+                      <a:round/>
+                      <a:headEnd type="none" w="med" len="med"/>
+                      <a:tailEnd type="none" w="med" len="med"/>
+                    </a:lnT>
+                    <a:lnB w="12700" cap="flat" cmpd="sng" algn="ctr">
+                      <a:solidFill>
+                        <a:srgbClr val="DCE7EB"/>
+                      </a:solidFill>
+                      <a:prstDash val="solid"/>
+                      <a:round/>
+                      <a:headEnd type="none" w="med" len="med"/>
+                      <a:tailEnd type="none" w="med" len="med"/>
+                    </a:lnB>
+                    <a:solidFill>
+                      <a:srgbClr val="FFFFFF"/>
+                    </a:solidFill>
+                  </a:tcPr>
+                </a:tc>
+                <a:tc>
+                  <a:txBody>
+                    <a:bodyPr/>
+                    <a:lstStyle/>
+                    <a:p>
+                      <a:pPr indent="0" marL="0">
+                        <a:buNone/>
+                      </a:pPr>
+                      <a:r>
+                        <a:rPr lang="en-US" sz="1150" dirty="0">
+                          <a:solidFill>
+                            <a:srgbClr val="1F3D49"/>
+                          </a:solidFill>
+                          <a:latin typeface="Calibri" pitchFamily="34" charset="0"/>
+                          <a:ea typeface="Calibri" pitchFamily="34" charset="-122"/>
+                          <a:cs typeface="Calibri" pitchFamily="34" charset="-120"/>
+                        </a:rPr>
+                        <a:t>40-60</a:t>
+                      </a:r>
+                      <a:endParaRPr lang="en-US" sz="1150" dirty="0">
+                        <a:latin typeface="Calibri" charset="0"/>
+                        <a:ea typeface="Calibri" charset="0"/>
+                        <a:cs typeface="Calibri" charset="0"/>
+                      </a:endParaRPr>
+                    </a:p>
+                  </a:txBody>
+                  <a:tcPr marL="91440" marR="91440" marT="45720" marB="45720">
+                    <a:lnL w="12700" cap="flat" cmpd="sng" algn="ctr">
+                      <a:solidFill>
+                        <a:srgbClr val="DCE7EB"/>
+                      </a:solidFill>
+                      <a:prstDash val="solid"/>
+                      <a:round/>
+                      <a:headEnd type="none" w="med" len="med"/>
+                      <a:tailEnd type="none" w="med" len="med"/>
+                    </a:lnL>
+                    <a:lnR w="12700" cap="flat" cmpd="sng" algn="ctr">
+                      <a:solidFill>
+                        <a:srgbClr val="DCE7EB"/>
+                      </a:solidFill>
+                      <a:prstDash val="solid"/>
+                      <a:round/>
+                      <a:headEnd type="none" w="med" len="med"/>
+                      <a:tailEnd type="none" w="med" len="med"/>
+                    </a:lnR>
+                    <a:lnT w="12700" cap="flat" cmpd="sng" algn="ctr">
+                      <a:solidFill>
+                        <a:srgbClr val="DCE7EB"/>
+                      </a:solidFill>
+                      <a:prstDash val="solid"/>
+                      <a:round/>
+                      <a:headEnd type="none" w="med" len="med"/>
+                      <a:tailEnd type="none" w="med" len="med"/>
+                    </a:lnT>
+                    <a:lnB w="12700" cap="flat" cmpd="sng" algn="ctr">
+                      <a:solidFill>
+                        <a:srgbClr val="DCE7EB"/>
+                      </a:solidFill>
+                      <a:prstDash val="solid"/>
+                      <a:round/>
+                      <a:headEnd type="none" w="med" len="med"/>
+                      <a:tailEnd type="none" w="med" len="med"/>
+                    </a:lnB>
+                    <a:solidFill>
+                      <a:srgbClr val="FFFFFF"/>
+                    </a:solidFill>
+                  </a:tcPr>
+                </a:tc>
+                <a:tc>
+                  <a:txBody>
+                    <a:bodyPr/>
+                    <a:lstStyle/>
+                    <a:p>
+                      <a:pPr indent="0" marL="0">
+                        <a:buNone/>
+                      </a:pPr>
+                      <a:r>
+                        <a:rPr lang="en-US" sz="1150" dirty="0">
+                          <a:solidFill>
+                            <a:srgbClr val="1F3D49"/>
+                          </a:solidFill>
+                          <a:latin typeface="Calibri" pitchFamily="34" charset="0"/>
+                          <a:ea typeface="Calibri" pitchFamily="34" charset="-122"/>
+                          <a:cs typeface="Calibri" pitchFamily="34" charset="-120"/>
+                        </a:rPr>
+                        <a:t>60-80</a:t>
+                      </a:r>
+                      <a:endParaRPr lang="en-US" sz="1150" dirty="0">
+                        <a:latin typeface="Calibri" charset="0"/>
+                        <a:ea typeface="Calibri" charset="0"/>
+                        <a:cs typeface="Calibri" charset="0"/>
+                      </a:endParaRPr>
+                    </a:p>
+                  </a:txBody>
+                  <a:tcPr marL="91440" marR="91440" marT="45720" marB="45720">
+                    <a:lnL w="12700" cap="flat" cmpd="sng" algn="ctr">
+                      <a:solidFill>
+                        <a:srgbClr val="DCE7EB"/>
+                      </a:solidFill>
+                      <a:prstDash val="solid"/>
+                      <a:round/>
+                      <a:headEnd type="none" w="med" len="med"/>
+                      <a:tailEnd type="none" w="med" len="med"/>
+                    </a:lnL>
+                    <a:lnR w="12700" cap="flat" cmpd="sng" algn="ctr">
+                      <a:solidFill>
+                        <a:srgbClr val="DCE7EB"/>
+                      </a:solidFill>
+                      <a:prstDash val="solid"/>
+                      <a:round/>
+                      <a:headEnd type="none" w="med" len="med"/>
+                      <a:tailEnd type="none" w="med" len="med"/>
+                    </a:lnR>
+                    <a:lnT w="12700" cap="flat" cmpd="sng" algn="ctr">
+                      <a:solidFill>
+                        <a:srgbClr val="DCE7EB"/>
+                      </a:solidFill>
+                      <a:prstDash val="solid"/>
+                      <a:round/>
+                      <a:headEnd type="none" w="med" len="med"/>
+                      <a:tailEnd type="none" w="med" len="med"/>
+                    </a:lnT>
+                    <a:lnB w="12700" cap="flat" cmpd="sng" algn="ctr">
+                      <a:solidFill>
+                        <a:srgbClr val="DCE7EB"/>
+                      </a:solidFill>
+                      <a:prstDash val="solid"/>
+                      <a:round/>
+                      <a:headEnd type="none" w="med" len="med"/>
+                      <a:tailEnd type="none" w="med" len="med"/>
+                    </a:lnB>
+                    <a:solidFill>
+                      <a:srgbClr val="FFFFFF"/>
+                    </a:solidFill>
+                  </a:tcPr>
+                </a:tc>
+                <a:tc>
+                  <a:txBody>
+                    <a:bodyPr/>
+                    <a:lstStyle/>
+                    <a:p>
+                      <a:pPr indent="0" marL="0">
+                        <a:buNone/>
+                      </a:pPr>
+                      <a:r>
+                        <a:rPr lang="en-US" sz="1150" dirty="0">
+                          <a:solidFill>
+                            <a:srgbClr val="1F3D49"/>
+                          </a:solidFill>
+                          <a:latin typeface="Calibri" pitchFamily="34" charset="0"/>
+                          <a:ea typeface="Calibri" pitchFamily="34" charset="-122"/>
+                          <a:cs typeface="Calibri" pitchFamily="34" charset="-120"/>
+                        </a:rPr>
+                        <a:t>80+</a:t>
+                      </a:r>
+                      <a:endParaRPr lang="en-US" sz="1150" dirty="0">
+                        <a:latin typeface="Calibri" charset="0"/>
+                        <a:ea typeface="Calibri" charset="0"/>
+                        <a:cs typeface="Calibri" charset="0"/>
+                      </a:endParaRPr>
+                    </a:p>
+                  </a:txBody>
+                  <a:tcPr marL="91440" marR="91440" marT="45720" marB="45720">
+                    <a:lnL w="12700" cap="flat" cmpd="sng" algn="ctr">
+                      <a:solidFill>
+                        <a:srgbClr val="DCE7EB"/>
+                      </a:solidFill>
+                      <a:prstDash val="solid"/>
+                      <a:round/>
+                      <a:headEnd type="none" w="med" len="med"/>
+                      <a:tailEnd type="none" w="med" len="med"/>
+                    </a:lnL>
+                    <a:lnR w="12700" cap="flat" cmpd="sng" algn="ctr">
+                      <a:solidFill>
+                        <a:srgbClr val="DCE7EB"/>
+                      </a:solidFill>
+                      <a:prstDash val="solid"/>
+                      <a:round/>
+                      <a:headEnd type="none" w="med" len="med"/>
+                      <a:tailEnd type="none" w="med" len="med"/>
+                    </a:lnR>
+                    <a:lnT w="12700" cap="flat" cmpd="sng" algn="ctr">
+                      <a:solidFill>
+                        <a:srgbClr val="DCE7EB"/>
+                      </a:solidFill>
+                      <a:prstDash val="solid"/>
+                      <a:round/>
+                      <a:headEnd type="none" w="med" len="med"/>
+                      <a:tailEnd type="none" w="med" len="med"/>
+                    </a:lnT>
+                    <a:lnB w="12700" cap="flat" cmpd="sng" algn="ctr">
+                      <a:solidFill>
+                        <a:srgbClr val="DCE7EB"/>
+                      </a:solidFill>
+                      <a:prstDash val="solid"/>
+                      <a:round/>
+                      <a:headEnd type="none" w="med" len="med"/>
+                      <a:tailEnd type="none" w="med" len="med"/>
+                    </a:lnB>
+                    <a:solidFill>
+                      <a:srgbClr val="FFFFFF"/>
+                    </a:solidFill>
+                  </a:tcPr>
+                </a:tc>
+              </a:tr>
+              <a:tr h="292608">
+                <a:tc>
+                  <a:txBody>
+                    <a:bodyPr/>
+                    <a:lstStyle/>
+                    <a:p>
+                      <a:pPr indent="0" marL="0">
+                        <a:buNone/>
+                      </a:pPr>
+                      <a:r>
+                        <a:rPr lang="en-US" sz="1150" dirty="0">
+                          <a:solidFill>
+                            <a:srgbClr val="1F3D49"/>
+                          </a:solidFill>
+                          <a:latin typeface="Calibri" pitchFamily="34" charset="0"/>
+                          <a:ea typeface="Calibri" pitchFamily="34" charset="-122"/>
+                          <a:cs typeface="Calibri" pitchFamily="34" charset="-120"/>
+                        </a:rPr>
+                        <a:t>number_inpatient</a:t>
+                      </a:r>
+                      <a:endParaRPr lang="en-US" sz="1150" dirty="0">
+                        <a:latin typeface="Calibri" charset="0"/>
+                        <a:ea typeface="Calibri" charset="0"/>
+                        <a:cs typeface="Calibri" charset="0"/>
+                      </a:endParaRPr>
+                    </a:p>
+                  </a:txBody>
+                  <a:tcPr marL="91440" marR="91440" marT="45720" marB="45720">
+                    <a:lnL w="12700" cap="flat" cmpd="sng" algn="ctr">
+                      <a:solidFill>
+                        <a:srgbClr val="DCE7EB"/>
+                      </a:solidFill>
+                      <a:prstDash val="solid"/>
+                      <a:round/>
+                      <a:headEnd type="none" w="med" len="med"/>
+                      <a:tailEnd type="none" w="med" len="med"/>
+                    </a:lnL>
+                    <a:lnR w="12700" cap="flat" cmpd="sng" algn="ctr">
+                      <a:solidFill>
+                        <a:srgbClr val="DCE7EB"/>
+                      </a:solidFill>
+                      <a:prstDash val="solid"/>
+                      <a:round/>
+                      <a:headEnd type="none" w="med" len="med"/>
+                      <a:tailEnd type="none" w="med" len="med"/>
+                    </a:lnR>
+                    <a:lnT w="12700" cap="flat" cmpd="sng" algn="ctr">
+                      <a:solidFill>
+                        <a:srgbClr val="DCE7EB"/>
+                      </a:solidFill>
+                      <a:prstDash val="solid"/>
+                      <a:round/>
+                      <a:headEnd type="none" w="med" len="med"/>
+                      <a:tailEnd type="none" w="med" len="med"/>
+                    </a:lnT>
+                    <a:lnB w="12700" cap="flat" cmpd="sng" algn="ctr">
+                      <a:solidFill>
+                        <a:srgbClr val="DCE7EB"/>
+                      </a:solidFill>
+                      <a:prstDash val="solid"/>
+                      <a:round/>
+                      <a:headEnd type="none" w="med" len="med"/>
+                      <a:tailEnd type="none" w="med" len="med"/>
+                    </a:lnB>
+                    <a:solidFill>
+                      <a:srgbClr val="FFFFFF"/>
+                    </a:solidFill>
+                  </a:tcPr>
+                </a:tc>
+                <a:tc>
+                  <a:txBody>
+                    <a:bodyPr/>
+                    <a:lstStyle/>
+                    <a:p>
+                      <a:pPr indent="0" marL="0">
+                        <a:buNone/>
+                      </a:pPr>
+                      <a:r>
+                        <a:rPr lang="en-US" sz="1150" dirty="0">
+                          <a:solidFill>
+                            <a:srgbClr val="1F3D49"/>
+                          </a:solidFill>
+                          <a:latin typeface="Calibri" pitchFamily="34" charset="0"/>
+                          <a:ea typeface="Calibri" pitchFamily="34" charset="-122"/>
+                          <a:cs typeface="Calibri" pitchFamily="34" charset="-120"/>
+                        </a:rPr>
+                        <a:t>0.710</a:t>
+                      </a:r>
+                      <a:endParaRPr lang="en-US" sz="1150" dirty="0">
+                        <a:latin typeface="Calibri" charset="0"/>
+                        <a:ea typeface="Calibri" charset="0"/>
+                        <a:cs typeface="Calibri" charset="0"/>
+                      </a:endParaRPr>
+                    </a:p>
+                  </a:txBody>
+                  <a:tcPr marL="91440" marR="91440" marT="45720" marB="45720">
+                    <a:lnL w="12700" cap="flat" cmpd="sng" algn="ctr">
+                      <a:solidFill>
+                        <a:srgbClr val="DCE7EB"/>
+                      </a:solidFill>
+                      <a:prstDash val="solid"/>
+                      <a:round/>
+                      <a:headEnd type="none" w="med" len="med"/>
+                      <a:tailEnd type="none" w="med" len="med"/>
+                    </a:lnL>
+                    <a:lnR w="12700" cap="flat" cmpd="sng" algn="ctr">
+                      <a:solidFill>
+                        <a:srgbClr val="DCE7EB"/>
+                      </a:solidFill>
+                      <a:prstDash val="solid"/>
+                      <a:round/>
+                      <a:headEnd type="none" w="med" len="med"/>
+                      <a:tailEnd type="none" w="med" len="med"/>
+                    </a:lnR>
+                    <a:lnT w="12700" cap="flat" cmpd="sng" algn="ctr">
+                      <a:solidFill>
+                        <a:srgbClr val="DCE7EB"/>
+                      </a:solidFill>
+                      <a:prstDash val="solid"/>
+                      <a:round/>
+                      <a:headEnd type="none" w="med" len="med"/>
+                      <a:tailEnd type="none" w="med" len="med"/>
+                    </a:lnT>
+                    <a:lnB w="12700" cap="flat" cmpd="sng" algn="ctr">
+                      <a:solidFill>
+                        <a:srgbClr val="DCE7EB"/>
+                      </a:solidFill>
+                      <a:prstDash val="solid"/>
+                      <a:round/>
+                      <a:headEnd type="none" w="med" len="med"/>
+                      <a:tailEnd type="none" w="med" len="med"/>
+                    </a:lnB>
+                    <a:solidFill>
+                      <a:srgbClr val="FFFFFF"/>
+                    </a:solidFill>
+                  </a:tcPr>
+                </a:tc>
+                <a:tc>
+                  <a:txBody>
+                    <a:bodyPr/>
+                    <a:lstStyle/>
+                    <a:p>
+                      <a:pPr indent="0" marL="0">
+                        <a:buNone/>
+                      </a:pPr>
+                      <a:r>
+                        <a:rPr lang="en-US" sz="1150" dirty="0">
+                          <a:solidFill>
+                            <a:srgbClr val="1F3D49"/>
+                          </a:solidFill>
+                          <a:latin typeface="Calibri" pitchFamily="34" charset="0"/>
+                          <a:ea typeface="Calibri" pitchFamily="34" charset="-122"/>
+                          <a:cs typeface="Calibri" pitchFamily="34" charset="-120"/>
+                        </a:rPr>
+                        <a:t>0.635</a:t>
+                      </a:r>
+                      <a:endParaRPr lang="en-US" sz="1150" dirty="0">
+                        <a:latin typeface="Calibri" charset="0"/>
+                        <a:ea typeface="Calibri" charset="0"/>
+                        <a:cs typeface="Calibri" charset="0"/>
+                      </a:endParaRPr>
+                    </a:p>
+                  </a:txBody>
+                  <a:tcPr marL="91440" marR="91440" marT="45720" marB="45720">
+                    <a:lnL w="12700" cap="flat" cmpd="sng" algn="ctr">
+                      <a:solidFill>
+                        <a:srgbClr val="DCE7EB"/>
+                      </a:solidFill>
+                      <a:prstDash val="solid"/>
+                      <a:round/>
+                      <a:headEnd type="none" w="med" len="med"/>
+                      <a:tailEnd type="none" w="med" len="med"/>
+                    </a:lnL>
+                    <a:lnR w="12700" cap="flat" cmpd="sng" algn="ctr">
+                      <a:solidFill>
+                        <a:srgbClr val="DCE7EB"/>
+                      </a:solidFill>
+                      <a:prstDash val="solid"/>
+                      <a:round/>
+                      <a:headEnd type="none" w="med" len="med"/>
+                      <a:tailEnd type="none" w="med" len="med"/>
+                    </a:lnR>
+                    <a:lnT w="12700" cap="flat" cmpd="sng" algn="ctr">
+                      <a:solidFill>
+                        <a:srgbClr val="DCE7EB"/>
+                      </a:solidFill>
+                      <a:prstDash val="solid"/>
+                      <a:round/>
+                      <a:headEnd type="none" w="med" len="med"/>
+                      <a:tailEnd type="none" w="med" len="med"/>
+                    </a:lnT>
+                    <a:lnB w="12700" cap="flat" cmpd="sng" algn="ctr">
+                      <a:solidFill>
+                        <a:srgbClr val="DCE7EB"/>
+                      </a:solidFill>
+                      <a:prstDash val="solid"/>
+                      <a:round/>
+                      <a:headEnd type="none" w="med" len="med"/>
+                      <a:tailEnd type="none" w="med" len="med"/>
+                    </a:lnB>
+                    <a:solidFill>
+                      <a:srgbClr val="FFFFFF"/>
+                    </a:solidFill>
+                  </a:tcPr>
+                </a:tc>
+                <a:tc>
+                  <a:txBody>
+                    <a:bodyPr/>
+                    <a:lstStyle/>
+                    <a:p>
+                      <a:pPr indent="0" marL="0">
+                        <a:buNone/>
+                      </a:pPr>
+                      <a:r>
+                        <a:rPr lang="en-US" sz="1150" dirty="0">
+                          <a:solidFill>
+                            <a:srgbClr val="1F3D49"/>
+                          </a:solidFill>
+                          <a:latin typeface="Calibri" pitchFamily="34" charset="0"/>
+                          <a:ea typeface="Calibri" pitchFamily="34" charset="-122"/>
+                          <a:cs typeface="Calibri" pitchFamily="34" charset="-120"/>
+                        </a:rPr>
+                        <a:t>0.592</a:t>
+                      </a:r>
+                      <a:endParaRPr lang="en-US" sz="1150" dirty="0">
+                        <a:latin typeface="Calibri" charset="0"/>
+                        <a:ea typeface="Calibri" charset="0"/>
+                        <a:cs typeface="Calibri" charset="0"/>
+                      </a:endParaRPr>
+                    </a:p>
+                  </a:txBody>
+                  <a:tcPr marL="91440" marR="91440" marT="45720" marB="45720">
+                    <a:lnL w="12700" cap="flat" cmpd="sng" algn="ctr">
+                      <a:solidFill>
+                        <a:srgbClr val="DCE7EB"/>
+                      </a:solidFill>
+                      <a:prstDash val="solid"/>
+                      <a:round/>
+                      <a:headEnd type="none" w="med" len="med"/>
+                      <a:tailEnd type="none" w="med" len="med"/>
+                    </a:lnL>
+                    <a:lnR w="12700" cap="flat" cmpd="sng" algn="ctr">
+                      <a:solidFill>
+                        <a:srgbClr val="DCE7EB"/>
+                      </a:solidFill>
+                      <a:prstDash val="solid"/>
+                      <a:round/>
+                      <a:headEnd type="none" w="med" len="med"/>
+                      <a:tailEnd type="none" w="med" len="med"/>
+                    </a:lnR>
+                    <a:lnT w="12700" cap="flat" cmpd="sng" algn="ctr">
+                      <a:solidFill>
+                        <a:srgbClr val="DCE7EB"/>
+                      </a:solidFill>
+                      <a:prstDash val="solid"/>
+                      <a:round/>
+                      <a:headEnd type="none" w="med" len="med"/>
+                      <a:tailEnd type="none" w="med" len="med"/>
+                    </a:lnT>
+                    <a:lnB w="12700" cap="flat" cmpd="sng" algn="ctr">
+                      <a:solidFill>
+                        <a:srgbClr val="DCE7EB"/>
+                      </a:solidFill>
+                      <a:prstDash val="solid"/>
+                      <a:round/>
+                      <a:headEnd type="none" w="med" len="med"/>
+                      <a:tailEnd type="none" w="med" len="med"/>
+                    </a:lnB>
+                    <a:solidFill>
+                      <a:srgbClr val="FFFFFF"/>
+                    </a:solidFill>
+                  </a:tcPr>
+                </a:tc>
+                <a:tc>
+                  <a:txBody>
+                    <a:bodyPr/>
+                    <a:lstStyle/>
+                    <a:p>
+                      <a:pPr indent="0" marL="0">
+                        <a:buNone/>
+                      </a:pPr>
+                      <a:r>
+                        <a:rPr lang="en-US" sz="1150" dirty="0">
+                          <a:solidFill>
+                            <a:srgbClr val="1F3D49"/>
+                          </a:solidFill>
+                          <a:latin typeface="Calibri" pitchFamily="34" charset="0"/>
+                          <a:ea typeface="Calibri" pitchFamily="34" charset="-122"/>
+                          <a:cs typeface="Calibri" pitchFamily="34" charset="-120"/>
+                        </a:rPr>
+                        <a:t>0.574</a:t>
+                      </a:r>
+                      <a:endParaRPr lang="en-US" sz="1150" dirty="0">
+                        <a:latin typeface="Calibri" charset="0"/>
+                        <a:ea typeface="Calibri" charset="0"/>
+                        <a:cs typeface="Calibri" charset="0"/>
+                      </a:endParaRPr>
+                    </a:p>
+                  </a:txBody>
+                  <a:tcPr marL="91440" marR="91440" marT="45720" marB="45720">
+                    <a:lnL w="12700" cap="flat" cmpd="sng" algn="ctr">
+                      <a:solidFill>
+                        <a:srgbClr val="DCE7EB"/>
+                      </a:solidFill>
+                      <a:prstDash val="solid"/>
+                      <a:round/>
+                      <a:headEnd type="none" w="med" len="med"/>
+                      <a:tailEnd type="none" w="med" len="med"/>
+                    </a:lnL>
+                    <a:lnR w="12700" cap="flat" cmpd="sng" algn="ctr">
+                      <a:solidFill>
+                        <a:srgbClr val="DCE7EB"/>
+                      </a:solidFill>
+                      <a:prstDash val="solid"/>
+                      <a:round/>
+                      <a:headEnd type="none" w="med" len="med"/>
+                      <a:tailEnd type="none" w="med" len="med"/>
+                    </a:lnR>
+                    <a:lnT w="12700" cap="flat" cmpd="sng" algn="ctr">
+                      <a:solidFill>
+                        <a:srgbClr val="DCE7EB"/>
+                      </a:solidFill>
+                      <a:prstDash val="solid"/>
+                      <a:round/>
+                      <a:headEnd type="none" w="med" len="med"/>
+                      <a:tailEnd type="none" w="med" len="med"/>
+                    </a:lnT>
+                    <a:lnB w="12700" cap="flat" cmpd="sng" algn="ctr">
+                      <a:solidFill>
+                        <a:srgbClr val="DCE7EB"/>
+                      </a:solidFill>
+                      <a:prstDash val="solid"/>
+                      <a:round/>
+                      <a:headEnd type="none" w="med" len="med"/>
+                      <a:tailEnd type="none" w="med" len="med"/>
+                    </a:lnB>
+                    <a:solidFill>
+                      <a:srgbClr val="FFFFFF"/>
+                    </a:solidFill>
+                  </a:tcPr>
+                </a:tc>
+              </a:tr>
+              <a:tr h="292608">
+                <a:tc>
+                  <a:txBody>
+                    <a:bodyPr/>
+                    <a:lstStyle/>
+                    <a:p>
+                      <a:pPr indent="0" marL="0">
+                        <a:buNone/>
+                      </a:pPr>
+                      <a:r>
+                        <a:rPr lang="en-US" sz="1150" dirty="0">
+                          <a:solidFill>
+                            <a:srgbClr val="1F3D49"/>
+                          </a:solidFill>
+                          <a:latin typeface="Calibri" pitchFamily="34" charset="0"/>
+                          <a:ea typeface="Calibri" pitchFamily="34" charset="-122"/>
+                          <a:cs typeface="Calibri" pitchFamily="34" charset="-120"/>
+                        </a:rPr>
+                        <a:t>prior_visits_total</a:t>
+                      </a:r>
+                      <a:endParaRPr lang="en-US" sz="1150" dirty="0">
+                        <a:latin typeface="Calibri" charset="0"/>
+                        <a:ea typeface="Calibri" charset="0"/>
+                        <a:cs typeface="Calibri" charset="0"/>
+                      </a:endParaRPr>
+                    </a:p>
+                  </a:txBody>
+                  <a:tcPr marL="91440" marR="91440" marT="45720" marB="45720">
+                    <a:lnL w="12700" cap="flat" cmpd="sng" algn="ctr">
+                      <a:solidFill>
+                        <a:srgbClr val="DCE7EB"/>
+                      </a:solidFill>
+                      <a:prstDash val="solid"/>
+                      <a:round/>
+                      <a:headEnd type="none" w="med" len="med"/>
+                      <a:tailEnd type="none" w="med" len="med"/>
+                    </a:lnL>
+                    <a:lnR w="12700" cap="flat" cmpd="sng" algn="ctr">
+                      <a:solidFill>
+                        <a:srgbClr val="DCE7EB"/>
+                      </a:solidFill>
+                      <a:prstDash val="solid"/>
+                      <a:round/>
+                      <a:headEnd type="none" w="med" len="med"/>
+                      <a:tailEnd type="none" w="med" len="med"/>
+                    </a:lnR>
+                    <a:lnT w="12700" cap="flat" cmpd="sng" algn="ctr">
+                      <a:solidFill>
+                        <a:srgbClr val="DCE7EB"/>
+                      </a:solidFill>
+                      <a:prstDash val="solid"/>
+                      <a:round/>
+                      <a:headEnd type="none" w="med" len="med"/>
+                      <a:tailEnd type="none" w="med" len="med"/>
+                    </a:lnT>
+                    <a:lnB w="12700" cap="flat" cmpd="sng" algn="ctr">
+                      <a:solidFill>
+                        <a:srgbClr val="DCE7EB"/>
+                      </a:solidFill>
+                      <a:prstDash val="solid"/>
+                      <a:round/>
+                      <a:headEnd type="none" w="med" len="med"/>
+                      <a:tailEnd type="none" w="med" len="med"/>
+                    </a:lnB>
+                    <a:solidFill>
+                      <a:srgbClr val="FFFFFF"/>
+                    </a:solidFill>
+                  </a:tcPr>
+                </a:tc>
+                <a:tc>
+                  <a:txBody>
+                    <a:bodyPr/>
+                    <a:lstStyle/>
+                    <a:p>
+                      <a:pPr indent="0" marL="0">
+                        <a:buNone/>
+                      </a:pPr>
+                      <a:r>
+                        <a:rPr lang="en-US" sz="1150" dirty="0">
+                          <a:solidFill>
+                            <a:srgbClr val="1F3D49"/>
+                          </a:solidFill>
+                          <a:latin typeface="Calibri" pitchFamily="34" charset="0"/>
+                          <a:ea typeface="Calibri" pitchFamily="34" charset="-122"/>
+                          <a:cs typeface="Calibri" pitchFamily="34" charset="-120"/>
+                        </a:rPr>
+                        <a:t>0.709</a:t>
+                      </a:r>
+                      <a:endParaRPr lang="en-US" sz="1150" dirty="0">
+                        <a:latin typeface="Calibri" charset="0"/>
+                        <a:ea typeface="Calibri" charset="0"/>
+                        <a:cs typeface="Calibri" charset="0"/>
+                      </a:endParaRPr>
+                    </a:p>
+                  </a:txBody>
+                  <a:tcPr marL="91440" marR="91440" marT="45720" marB="45720">
+                    <a:lnL w="12700" cap="flat" cmpd="sng" algn="ctr">
+                      <a:solidFill>
+                        <a:srgbClr val="DCE7EB"/>
+                      </a:solidFill>
+                      <a:prstDash val="solid"/>
+                      <a:round/>
+                      <a:headEnd type="none" w="med" len="med"/>
+                      <a:tailEnd type="none" w="med" len="med"/>
+                    </a:lnL>
+                    <a:lnR w="12700" cap="flat" cmpd="sng" algn="ctr">
+                      <a:solidFill>
+                        <a:srgbClr val="DCE7EB"/>
+                      </a:solidFill>
+                      <a:prstDash val="solid"/>
+                      <a:round/>
+                      <a:headEnd type="none" w="med" len="med"/>
+                      <a:tailEnd type="none" w="med" len="med"/>
+                    </a:lnR>
+                    <a:lnT w="12700" cap="flat" cmpd="sng" algn="ctr">
+                      <a:solidFill>
+                        <a:srgbClr val="DCE7EB"/>
+                      </a:solidFill>
+                      <a:prstDash val="solid"/>
+                      <a:round/>
+                      <a:headEnd type="none" w="med" len="med"/>
+                      <a:tailEnd type="none" w="med" len="med"/>
+                    </a:lnT>
+                    <a:lnB w="12700" cap="flat" cmpd="sng" algn="ctr">
+                      <a:solidFill>
+                        <a:srgbClr val="DCE7EB"/>
+                      </a:solidFill>
+                      <a:prstDash val="solid"/>
+                      <a:round/>
+                      <a:headEnd type="none" w="med" len="med"/>
+                      <a:tailEnd type="none" w="med" len="med"/>
+                    </a:lnB>
+                    <a:solidFill>
+                      <a:srgbClr val="FFFFFF"/>
+                    </a:solidFill>
+                  </a:tcPr>
+                </a:tc>
+                <a:tc>
+                  <a:txBody>
+                    <a:bodyPr/>
+                    <a:lstStyle/>
+                    <a:p>
+                      <a:pPr indent="0" marL="0">
+                        <a:buNone/>
+                      </a:pPr>
+                      <a:r>
+                        <a:rPr lang="en-US" sz="1150" dirty="0">
+                          <a:solidFill>
+                            <a:srgbClr val="1F3D49"/>
+                          </a:solidFill>
+                          <a:latin typeface="Calibri" pitchFamily="34" charset="0"/>
+                          <a:ea typeface="Calibri" pitchFamily="34" charset="-122"/>
+                          <a:cs typeface="Calibri" pitchFamily="34" charset="-120"/>
+                        </a:rPr>
+                        <a:t>0.631</a:t>
+                      </a:r>
+                      <a:endParaRPr lang="en-US" sz="1150" dirty="0">
+                        <a:latin typeface="Calibri" charset="0"/>
+                        <a:ea typeface="Calibri" charset="0"/>
+                        <a:cs typeface="Calibri" charset="0"/>
+                      </a:endParaRPr>
+                    </a:p>
+                  </a:txBody>
+                  <a:tcPr marL="91440" marR="91440" marT="45720" marB="45720">
+                    <a:lnL w="12700" cap="flat" cmpd="sng" algn="ctr">
+                      <a:solidFill>
+                        <a:srgbClr val="DCE7EB"/>
+                      </a:solidFill>
+                      <a:prstDash val="solid"/>
+                      <a:round/>
+                      <a:headEnd type="none" w="med" len="med"/>
+                      <a:tailEnd type="none" w="med" len="med"/>
+                    </a:lnL>
+                    <a:lnR w="12700" cap="flat" cmpd="sng" algn="ctr">
+                      <a:solidFill>
+                        <a:srgbClr val="DCE7EB"/>
+                      </a:solidFill>
+                      <a:prstDash val="solid"/>
+                      <a:round/>
+                      <a:headEnd type="none" w="med" len="med"/>
+                      <a:tailEnd type="none" w="med" len="med"/>
+                    </a:lnR>
+                    <a:lnT w="12700" cap="flat" cmpd="sng" algn="ctr">
+                      <a:solidFill>
+                        <a:srgbClr val="DCE7EB"/>
+                      </a:solidFill>
+                      <a:prstDash val="solid"/>
+                      <a:round/>
+                      <a:headEnd type="none" w="med" len="med"/>
+                      <a:tailEnd type="none" w="med" len="med"/>
+                    </a:lnT>
+                    <a:lnB w="12700" cap="flat" cmpd="sng" algn="ctr">
+                      <a:solidFill>
+                        <a:srgbClr val="DCE7EB"/>
+                      </a:solidFill>
+                      <a:prstDash val="solid"/>
+                      <a:round/>
+                      <a:headEnd type="none" w="med" len="med"/>
+                      <a:tailEnd type="none" w="med" len="med"/>
+                    </a:lnB>
+                    <a:solidFill>
+                      <a:srgbClr val="FFFFFF"/>
+                    </a:solidFill>
+                  </a:tcPr>
+                </a:tc>
+                <a:tc>
+                  <a:txBody>
+                    <a:bodyPr/>
+                    <a:lstStyle/>
+                    <a:p>
+                      <a:pPr indent="0" marL="0">
+                        <a:buNone/>
+                      </a:pPr>
+                      <a:r>
+                        <a:rPr lang="en-US" sz="1150" dirty="0">
+                          <a:solidFill>
+                            <a:srgbClr val="1F3D49"/>
+                          </a:solidFill>
+                          <a:latin typeface="Calibri" pitchFamily="34" charset="0"/>
+                          <a:ea typeface="Calibri" pitchFamily="34" charset="-122"/>
+                          <a:cs typeface="Calibri" pitchFamily="34" charset="-120"/>
+                        </a:rPr>
+                        <a:t>0.588</a:t>
+                      </a:r>
+                      <a:endParaRPr lang="en-US" sz="1150" dirty="0">
+                        <a:latin typeface="Calibri" charset="0"/>
+                        <a:ea typeface="Calibri" charset="0"/>
+                        <a:cs typeface="Calibri" charset="0"/>
+                      </a:endParaRPr>
+                    </a:p>
+                  </a:txBody>
+                  <a:tcPr marL="91440" marR="91440" marT="45720" marB="45720">
+                    <a:lnL w="12700" cap="flat" cmpd="sng" algn="ctr">
+                      <a:solidFill>
+                        <a:srgbClr val="DCE7EB"/>
+                      </a:solidFill>
+                      <a:prstDash val="solid"/>
+                      <a:round/>
+                      <a:headEnd type="none" w="med" len="med"/>
+                      <a:tailEnd type="none" w="med" len="med"/>
+                    </a:lnL>
+                    <a:lnR w="12700" cap="flat" cmpd="sng" algn="ctr">
+                      <a:solidFill>
+                        <a:srgbClr val="DCE7EB"/>
+                      </a:solidFill>
+                      <a:prstDash val="solid"/>
+                      <a:round/>
+                      <a:headEnd type="none" w="med" len="med"/>
+                      <a:tailEnd type="none" w="med" len="med"/>
+                    </a:lnR>
+                    <a:lnT w="12700" cap="flat" cmpd="sng" algn="ctr">
+                      <a:solidFill>
+                        <a:srgbClr val="DCE7EB"/>
+                      </a:solidFill>
+                      <a:prstDash val="solid"/>
+                      <a:round/>
+                      <a:headEnd type="none" w="med" len="med"/>
+                      <a:tailEnd type="none" w="med" len="med"/>
+                    </a:lnT>
+                    <a:lnB w="12700" cap="flat" cmpd="sng" algn="ctr">
+                      <a:solidFill>
+                        <a:srgbClr val="DCE7EB"/>
+                      </a:solidFill>
+                      <a:prstDash val="solid"/>
+                      <a:round/>
+                      <a:headEnd type="none" w="med" len="med"/>
+                      <a:tailEnd type="none" w="med" len="med"/>
+                    </a:lnB>
+                    <a:solidFill>
+                      <a:srgbClr val="FFFFFF"/>
+                    </a:solidFill>
+                  </a:tcPr>
+                </a:tc>
+                <a:tc>
+                  <a:txBody>
+                    <a:bodyPr/>
+                    <a:lstStyle/>
+                    <a:p>
+                      <a:pPr indent="0" marL="0">
+                        <a:buNone/>
+                      </a:pPr>
+                      <a:r>
+                        <a:rPr lang="en-US" sz="1150" dirty="0">
+                          <a:solidFill>
+                            <a:srgbClr val="1F3D49"/>
+                          </a:solidFill>
+                          <a:latin typeface="Calibri" pitchFamily="34" charset="0"/>
+                          <a:ea typeface="Calibri" pitchFamily="34" charset="-122"/>
+                          <a:cs typeface="Calibri" pitchFamily="34" charset="-120"/>
+                        </a:rPr>
+                        <a:t>0.573</a:t>
+                      </a:r>
+                      <a:endParaRPr lang="en-US" sz="1150" dirty="0">
+                        <a:latin typeface="Calibri" charset="0"/>
+                        <a:ea typeface="Calibri" charset="0"/>
+                        <a:cs typeface="Calibri" charset="0"/>
+                      </a:endParaRPr>
+                    </a:p>
+                  </a:txBody>
+                  <a:tcPr marL="91440" marR="91440" marT="45720" marB="45720">
+                    <a:lnL w="12700" cap="flat" cmpd="sng" algn="ctr">
+                      <a:solidFill>
+                        <a:srgbClr val="DCE7EB"/>
+                      </a:solidFill>
+                      <a:prstDash val="solid"/>
+                      <a:round/>
+                      <a:headEnd type="none" w="med" len="med"/>
+                      <a:tailEnd type="none" w="med" len="med"/>
+                    </a:lnL>
+                    <a:lnR w="12700" cap="flat" cmpd="sng" algn="ctr">
+                      <a:solidFill>
+                        <a:srgbClr val="DCE7EB"/>
+                      </a:solidFill>
+                      <a:prstDash val="solid"/>
+                      <a:round/>
+                      <a:headEnd type="none" w="med" len="med"/>
+                      <a:tailEnd type="none" w="med" len="med"/>
+                    </a:lnR>
+                    <a:lnT w="12700" cap="flat" cmpd="sng" algn="ctr">
+                      <a:solidFill>
+                        <a:srgbClr val="DCE7EB"/>
+                      </a:solidFill>
+                      <a:prstDash val="solid"/>
+                      <a:round/>
+                      <a:headEnd type="none" w="med" len="med"/>
+                      <a:tailEnd type="none" w="med" len="med"/>
+                    </a:lnT>
+                    <a:lnB w="12700" cap="flat" cmpd="sng" algn="ctr">
+                      <a:solidFill>
+                        <a:srgbClr val="DCE7EB"/>
+                      </a:solidFill>
+                      <a:prstDash val="solid"/>
+                      <a:round/>
+                      <a:headEnd type="none" w="med" len="med"/>
+                      <a:tailEnd type="none" w="med" len="med"/>
+                    </a:lnB>
+                    <a:solidFill>
+                      <a:srgbClr val="FFFFFF"/>
+                    </a:solidFill>
+                  </a:tcPr>
+                </a:tc>
+              </a:tr>
+              <a:tr h="292608">
+                <a:tc>
+                  <a:txBody>
+                    <a:bodyPr/>
+                    <a:lstStyle/>
+                    <a:p>
+                      <a:pPr indent="0" marL="0">
+                        <a:buNone/>
+                      </a:pPr>
+                      <a:r>
+                        <a:rPr lang="en-US" sz="1150" dirty="0">
+                          <a:solidFill>
+                            <a:srgbClr val="1F3D49"/>
+                          </a:solidFill>
+                          <a:latin typeface="Calibri" pitchFamily="34" charset="0"/>
+                          <a:ea typeface="Calibri" pitchFamily="34" charset="-122"/>
+                          <a:cs typeface="Calibri" pitchFamily="34" charset="-120"/>
+                        </a:rPr>
+                        <a:t>prior_encounters</a:t>
+                      </a:r>
+                      <a:endParaRPr lang="en-US" sz="1150" dirty="0">
+                        <a:latin typeface="Calibri" charset="0"/>
+                        <a:ea typeface="Calibri" charset="0"/>
+                        <a:cs typeface="Calibri" charset="0"/>
+                      </a:endParaRPr>
+                    </a:p>
+                  </a:txBody>
+                  <a:tcPr marL="91440" marR="91440" marT="45720" marB="45720">
+                    <a:lnL w="12700" cap="flat" cmpd="sng" algn="ctr">
+                      <a:solidFill>
+                        <a:srgbClr val="DCE7EB"/>
+                      </a:solidFill>
+                      <a:prstDash val="solid"/>
+                      <a:round/>
+                      <a:headEnd type="none" w="med" len="med"/>
+                      <a:tailEnd type="none" w="med" len="med"/>
+                    </a:lnL>
+                    <a:lnR w="12700" cap="flat" cmpd="sng" algn="ctr">
+                      <a:solidFill>
+                        <a:srgbClr val="DCE7EB"/>
+                      </a:solidFill>
+                      <a:prstDash val="solid"/>
+                      <a:round/>
+                      <a:headEnd type="none" w="med" len="med"/>
+                      <a:tailEnd type="none" w="med" len="med"/>
+                    </a:lnR>
+                    <a:lnT w="12700" cap="flat" cmpd="sng" algn="ctr">
+                      <a:solidFill>
+                        <a:srgbClr val="DCE7EB"/>
+                      </a:solidFill>
+                      <a:prstDash val="solid"/>
+                      <a:round/>
+                      <a:headEnd type="none" w="med" len="med"/>
+                      <a:tailEnd type="none" w="med" len="med"/>
+                    </a:lnT>
+                    <a:lnB w="12700" cap="flat" cmpd="sng" algn="ctr">
+                      <a:solidFill>
+                        <a:srgbClr val="DCE7EB"/>
+                      </a:solidFill>
+                      <a:prstDash val="solid"/>
+                      <a:round/>
+                      <a:headEnd type="none" w="med" len="med"/>
+                      <a:tailEnd type="none" w="med" len="med"/>
+                    </a:lnB>
+                    <a:solidFill>
+                      <a:srgbClr val="FFFFFF"/>
+                    </a:solidFill>
+                  </a:tcPr>
+                </a:tc>
+                <a:tc>
+                  <a:txBody>
+                    <a:bodyPr/>
+                    <a:lstStyle/>
+                    <a:p>
+                      <a:pPr indent="0" marL="0">
+                        <a:buNone/>
+                      </a:pPr>
+                      <a:r>
+                        <a:rPr lang="en-US" sz="1150" dirty="0">
+                          <a:solidFill>
+                            <a:srgbClr val="1F3D49"/>
+                          </a:solidFill>
+                          <a:latin typeface="Calibri" pitchFamily="34" charset="0"/>
+                          <a:ea typeface="Calibri" pitchFamily="34" charset="-122"/>
+                          <a:cs typeface="Calibri" pitchFamily="34" charset="-120"/>
+                        </a:rPr>
+                        <a:t>0.669</a:t>
+                      </a:r>
+                      <a:endParaRPr lang="en-US" sz="1150" dirty="0">
+                        <a:latin typeface="Calibri" charset="0"/>
+                        <a:ea typeface="Calibri" charset="0"/>
+                        <a:cs typeface="Calibri" charset="0"/>
+                      </a:endParaRPr>
+                    </a:p>
+                  </a:txBody>
+                  <a:tcPr marL="91440" marR="91440" marT="45720" marB="45720">
+                    <a:lnL w="12700" cap="flat" cmpd="sng" algn="ctr">
+                      <a:solidFill>
+                        <a:srgbClr val="DCE7EB"/>
+                      </a:solidFill>
+                      <a:prstDash val="solid"/>
+                      <a:round/>
+                      <a:headEnd type="none" w="med" len="med"/>
+                      <a:tailEnd type="none" w="med" len="med"/>
+                    </a:lnL>
+                    <a:lnR w="12700" cap="flat" cmpd="sng" algn="ctr">
+                      <a:solidFill>
+                        <a:srgbClr val="DCE7EB"/>
+                      </a:solidFill>
+                      <a:prstDash val="solid"/>
+                      <a:round/>
+                      <a:headEnd type="none" w="med" len="med"/>
+                      <a:tailEnd type="none" w="med" len="med"/>
+                    </a:lnR>
+                    <a:lnT w="12700" cap="flat" cmpd="sng" algn="ctr">
+                      <a:solidFill>
+                        <a:srgbClr val="DCE7EB"/>
+                      </a:solidFill>
+                      <a:prstDash val="solid"/>
+                      <a:round/>
+                      <a:headEnd type="none" w="med" len="med"/>
+                      <a:tailEnd type="none" w="med" len="med"/>
+                    </a:lnT>
+                    <a:lnB w="12700" cap="flat" cmpd="sng" algn="ctr">
+                      <a:solidFill>
+                        <a:srgbClr val="DCE7EB"/>
+                      </a:solidFill>
+                      <a:prstDash val="solid"/>
+                      <a:round/>
+                      <a:headEnd type="none" w="med" len="med"/>
+                      <a:tailEnd type="none" w="med" len="med"/>
+                    </a:lnB>
+                    <a:solidFill>
+                      <a:srgbClr val="FFFFFF"/>
+                    </a:solidFill>
+                  </a:tcPr>
+                </a:tc>
+                <a:tc>
+                  <a:txBody>
+                    <a:bodyPr/>
+                    <a:lstStyle/>
+                    <a:p>
+                      <a:pPr indent="0" marL="0">
+                        <a:buNone/>
+                      </a:pPr>
+                      <a:r>
+                        <a:rPr lang="en-US" sz="1150" dirty="0">
+                          <a:solidFill>
+                            <a:srgbClr val="1F3D49"/>
+                          </a:solidFill>
+                          <a:latin typeface="Calibri" pitchFamily="34" charset="0"/>
+                          <a:ea typeface="Calibri" pitchFamily="34" charset="-122"/>
+                          <a:cs typeface="Calibri" pitchFamily="34" charset="-120"/>
+                        </a:rPr>
+                        <a:t>0.624</a:t>
+                      </a:r>
+                      <a:endParaRPr lang="en-US" sz="1150" dirty="0">
+                        <a:latin typeface="Calibri" charset="0"/>
+                        <a:ea typeface="Calibri" charset="0"/>
+                        <a:cs typeface="Calibri" charset="0"/>
+                      </a:endParaRPr>
+                    </a:p>
+                  </a:txBody>
+                  <a:tcPr marL="91440" marR="91440" marT="45720" marB="45720">
+                    <a:lnL w="12700" cap="flat" cmpd="sng" algn="ctr">
+                      <a:solidFill>
+                        <a:srgbClr val="DCE7EB"/>
+                      </a:solidFill>
+                      <a:prstDash val="solid"/>
+                      <a:round/>
+                      <a:headEnd type="none" w="med" len="med"/>
+                      <a:tailEnd type="none" w="med" len="med"/>
+                    </a:lnL>
+                    <a:lnR w="12700" cap="flat" cmpd="sng" algn="ctr">
+                      <a:solidFill>
+                        <a:srgbClr val="DCE7EB"/>
+                      </a:solidFill>
+                      <a:prstDash val="solid"/>
+                      <a:round/>
+                      <a:headEnd type="none" w="med" len="med"/>
+                      <a:tailEnd type="none" w="med" len="med"/>
+                    </a:lnR>
+                    <a:lnT w="12700" cap="flat" cmpd="sng" algn="ctr">
+                      <a:solidFill>
+                        <a:srgbClr val="DCE7EB"/>
+                      </a:solidFill>
+                      <a:prstDash val="solid"/>
+                      <a:round/>
+                      <a:headEnd type="none" w="med" len="med"/>
+                      <a:tailEnd type="none" w="med" len="med"/>
+                    </a:lnT>
+                    <a:lnB w="12700" cap="flat" cmpd="sng" algn="ctr">
+                      <a:solidFill>
+                        <a:srgbClr val="DCE7EB"/>
+                      </a:solidFill>
+                      <a:prstDash val="solid"/>
+                      <a:round/>
+                      <a:headEnd type="none" w="med" len="med"/>
+                      <a:tailEnd type="none" w="med" len="med"/>
+                    </a:lnB>
+                    <a:solidFill>
+                      <a:srgbClr val="FFFFFF"/>
+                    </a:solidFill>
+                  </a:tcPr>
+                </a:tc>
+                <a:tc>
+                  <a:txBody>
+                    <a:bodyPr/>
+                    <a:lstStyle/>
+                    <a:p>
+                      <a:pPr indent="0" marL="0">
+                        <a:buNone/>
+                      </a:pPr>
+                      <a:r>
+                        <a:rPr lang="en-US" sz="1150" dirty="0">
+                          <a:solidFill>
+                            <a:srgbClr val="1F3D49"/>
+                          </a:solidFill>
+                          <a:latin typeface="Calibri" pitchFamily="34" charset="0"/>
+                          <a:ea typeface="Calibri" pitchFamily="34" charset="-122"/>
+                          <a:cs typeface="Calibri" pitchFamily="34" charset="-120"/>
+                        </a:rPr>
+                        <a:t>0.577</a:t>
+                      </a:r>
+                      <a:endParaRPr lang="en-US" sz="1150" dirty="0">
+                        <a:latin typeface="Calibri" charset="0"/>
+                        <a:ea typeface="Calibri" charset="0"/>
+                        <a:cs typeface="Calibri" charset="0"/>
+                      </a:endParaRPr>
+                    </a:p>
+                  </a:txBody>
+                  <a:tcPr marL="91440" marR="91440" marT="45720" marB="45720">
+                    <a:lnL w="12700" cap="flat" cmpd="sng" algn="ctr">
+                      <a:solidFill>
+                        <a:srgbClr val="DCE7EB"/>
+                      </a:solidFill>
+                      <a:prstDash val="solid"/>
+                      <a:round/>
+                      <a:headEnd type="none" w="med" len="med"/>
+                      <a:tailEnd type="none" w="med" len="med"/>
+                    </a:lnL>
+                    <a:lnR w="12700" cap="flat" cmpd="sng" algn="ctr">
+                      <a:solidFill>
+                        <a:srgbClr val="DCE7EB"/>
+                      </a:solidFill>
+                      <a:prstDash val="solid"/>
+                      <a:round/>
+                      <a:headEnd type="none" w="med" len="med"/>
+                      <a:tailEnd type="none" w="med" len="med"/>
+                    </a:lnR>
+                    <a:lnT w="12700" cap="flat" cmpd="sng" algn="ctr">
+                      <a:solidFill>
+                        <a:srgbClr val="DCE7EB"/>
+                      </a:solidFill>
+                      <a:prstDash val="solid"/>
+                      <a:round/>
+                      <a:headEnd type="none" w="med" len="med"/>
+                      <a:tailEnd type="none" w="med" len="med"/>
+                    </a:lnT>
+                    <a:lnB w="12700" cap="flat" cmpd="sng" algn="ctr">
+                      <a:solidFill>
+                        <a:srgbClr val="DCE7EB"/>
+                      </a:solidFill>
+                      <a:prstDash val="solid"/>
+                      <a:round/>
+                      <a:headEnd type="none" w="med" len="med"/>
+                      <a:tailEnd type="none" w="med" len="med"/>
+                    </a:lnB>
+                    <a:solidFill>
+                      <a:srgbClr val="FFFFFF"/>
+                    </a:solidFill>
+                  </a:tcPr>
+                </a:tc>
+                <a:tc>
+                  <a:txBody>
+                    <a:bodyPr/>
+                    <a:lstStyle/>
+                    <a:p>
+                      <a:pPr indent="0" marL="0">
+                        <a:buNone/>
+                      </a:pPr>
+                      <a:r>
+                        <a:rPr lang="en-US" sz="1150" dirty="0">
+                          <a:solidFill>
+                            <a:srgbClr val="1F3D49"/>
+                          </a:solidFill>
+                          <a:latin typeface="Calibri" pitchFamily="34" charset="0"/>
+                          <a:ea typeface="Calibri" pitchFamily="34" charset="-122"/>
+                          <a:cs typeface="Calibri" pitchFamily="34" charset="-120"/>
+                        </a:rPr>
+                        <a:t>0.566</a:t>
+                      </a:r>
+                      <a:endParaRPr lang="en-US" sz="1150" dirty="0">
+                        <a:latin typeface="Calibri" charset="0"/>
+                        <a:ea typeface="Calibri" charset="0"/>
+                        <a:cs typeface="Calibri" charset="0"/>
+                      </a:endParaRPr>
+                    </a:p>
+                  </a:txBody>
+                  <a:tcPr marL="91440" marR="91440" marT="45720" marB="45720">
+                    <a:lnL w="12700" cap="flat" cmpd="sng" algn="ctr">
+                      <a:solidFill>
+                        <a:srgbClr val="DCE7EB"/>
+                      </a:solidFill>
+                      <a:prstDash val="solid"/>
+                      <a:round/>
+                      <a:headEnd type="none" w="med" len="med"/>
+                      <a:tailEnd type="none" w="med" len="med"/>
+                    </a:lnL>
+                    <a:lnR w="12700" cap="flat" cmpd="sng" algn="ctr">
+                      <a:solidFill>
+                        <a:srgbClr val="DCE7EB"/>
+                      </a:solidFill>
+                      <a:prstDash val="solid"/>
+                      <a:round/>
+                      <a:headEnd type="none" w="med" len="med"/>
+                      <a:tailEnd type="none" w="med" len="med"/>
+                    </a:lnR>
+                    <a:lnT w="12700" cap="flat" cmpd="sng" algn="ctr">
+                      <a:solidFill>
+                        <a:srgbClr val="DCE7EB"/>
+                      </a:solidFill>
+                      <a:prstDash val="solid"/>
+                      <a:round/>
+                      <a:headEnd type="none" w="med" len="med"/>
+                      <a:tailEnd type="none" w="med" len="med"/>
+                    </a:lnT>
+                    <a:lnB w="12700" cap="flat" cmpd="sng" algn="ctr">
+                      <a:solidFill>
+                        <a:srgbClr val="DCE7EB"/>
+                      </a:solidFill>
+                      <a:prstDash val="solid"/>
+                      <a:round/>
+                      <a:headEnd type="none" w="med" len="med"/>
+                      <a:tailEnd type="none" w="med" len="med"/>
+                    </a:lnB>
+                    <a:solidFill>
+                      <a:srgbClr val="FFFFFF"/>
+                    </a:solidFill>
+                  </a:tcPr>
+                </a:tc>
+              </a:tr>
+              <a:tr h="292608">
+                <a:tc>
+                  <a:txBody>
+                    <a:bodyPr/>
+                    <a:lstStyle/>
+                    <a:p>
+                      <a:pPr indent="0" marL="0">
+                        <a:buNone/>
+                      </a:pPr>
+                      <a:r>
+                        <a:rPr lang="en-US" sz="1150" dirty="0">
+                          <a:solidFill>
+                            <a:srgbClr val="1F3D49"/>
+                          </a:solidFill>
+                          <a:latin typeface="Calibri" pitchFamily="34" charset="0"/>
+                          <a:ea typeface="Calibri" pitchFamily="34" charset="-122"/>
+                          <a:cs typeface="Calibri" pitchFamily="34" charset="-120"/>
+                        </a:rPr>
+                        <a:t>number_diagnoses</a:t>
+                      </a:r>
+                      <a:endParaRPr lang="en-US" sz="1150" dirty="0">
+                        <a:latin typeface="Calibri" charset="0"/>
+                        <a:ea typeface="Calibri" charset="0"/>
+                        <a:cs typeface="Calibri" charset="0"/>
+                      </a:endParaRPr>
+                    </a:p>
+                  </a:txBody>
+                  <a:tcPr marL="91440" marR="91440" marT="45720" marB="45720">
+                    <a:lnL w="12700" cap="flat" cmpd="sng" algn="ctr">
+                      <a:solidFill>
+                        <a:srgbClr val="DCE7EB"/>
+                      </a:solidFill>
+                      <a:prstDash val="solid"/>
+                      <a:round/>
+                      <a:headEnd type="none" w="med" len="med"/>
+                      <a:tailEnd type="none" w="med" len="med"/>
+                    </a:lnL>
+                    <a:lnR w="12700" cap="flat" cmpd="sng" algn="ctr">
+                      <a:solidFill>
+                        <a:srgbClr val="DCE7EB"/>
+                      </a:solidFill>
+                      <a:prstDash val="solid"/>
+                      <a:round/>
+                      <a:headEnd type="none" w="med" len="med"/>
+                      <a:tailEnd type="none" w="med" len="med"/>
+                    </a:lnR>
+                    <a:lnT w="12700" cap="flat" cmpd="sng" algn="ctr">
+                      <a:solidFill>
+                        <a:srgbClr val="DCE7EB"/>
+                      </a:solidFill>
+                      <a:prstDash val="solid"/>
+                      <a:round/>
+                      <a:headEnd type="none" w="med" len="med"/>
+                      <a:tailEnd type="none" w="med" len="med"/>
+                    </a:lnT>
+                    <a:lnB w="12700" cap="flat" cmpd="sng" algn="ctr">
+                      <a:solidFill>
+                        <a:srgbClr val="DCE7EB"/>
+                      </a:solidFill>
+                      <a:prstDash val="solid"/>
+                      <a:round/>
+                      <a:headEnd type="none" w="med" len="med"/>
+                      <a:tailEnd type="none" w="med" len="med"/>
+                    </a:lnB>
+                    <a:solidFill>
+                      <a:srgbClr val="FFFFFF"/>
+                    </a:solidFill>
+                  </a:tcPr>
+                </a:tc>
+                <a:tc>
+                  <a:txBody>
+                    <a:bodyPr/>
+                    <a:lstStyle/>
+                    <a:p>
+                      <a:pPr indent="0" marL="0">
+                        <a:buNone/>
+                      </a:pPr>
+                      <a:r>
+                        <a:rPr lang="en-US" sz="1150" dirty="0">
+                          <a:solidFill>
+                            <a:srgbClr val="1F3D49"/>
+                          </a:solidFill>
+                          <a:latin typeface="Calibri" pitchFamily="34" charset="0"/>
+                          <a:ea typeface="Calibri" pitchFamily="34" charset="-122"/>
+                          <a:cs typeface="Calibri" pitchFamily="34" charset="-120"/>
+                        </a:rPr>
+                        <a:t>0.587</a:t>
+                      </a:r>
+                      <a:endParaRPr lang="en-US" sz="1150" dirty="0">
+                        <a:latin typeface="Calibri" charset="0"/>
+                        <a:ea typeface="Calibri" charset="0"/>
+                        <a:cs typeface="Calibri" charset="0"/>
+                      </a:endParaRPr>
+                    </a:p>
+                  </a:txBody>
+                  <a:tcPr marL="91440" marR="91440" marT="45720" marB="45720">
+                    <a:lnL w="12700" cap="flat" cmpd="sng" algn="ctr">
+                      <a:solidFill>
+                        <a:srgbClr val="DCE7EB"/>
+                      </a:solidFill>
+                      <a:prstDash val="solid"/>
+                      <a:round/>
+                      <a:headEnd type="none" w="med" len="med"/>
+                      <a:tailEnd type="none" w="med" len="med"/>
+                    </a:lnL>
+                    <a:lnR w="12700" cap="flat" cmpd="sng" algn="ctr">
+                      <a:solidFill>
+                        <a:srgbClr val="DCE7EB"/>
+                      </a:solidFill>
+                      <a:prstDash val="solid"/>
+                      <a:round/>
+                      <a:headEnd type="none" w="med" len="med"/>
+                      <a:tailEnd type="none" w="med" len="med"/>
+                    </a:lnR>
+                    <a:lnT w="12700" cap="flat" cmpd="sng" algn="ctr">
+                      <a:solidFill>
+                        <a:srgbClr val="DCE7EB"/>
+                      </a:solidFill>
+                      <a:prstDash val="solid"/>
+                      <a:round/>
+                      <a:headEnd type="none" w="med" len="med"/>
+                      <a:tailEnd type="none" w="med" len="med"/>
+                    </a:lnT>
+                    <a:lnB w="12700" cap="flat" cmpd="sng" algn="ctr">
+                      <a:solidFill>
+                        <a:srgbClr val="DCE7EB"/>
+                      </a:solidFill>
+                      <a:prstDash val="solid"/>
+                      <a:round/>
+                      <a:headEnd type="none" w="med" len="med"/>
+                      <a:tailEnd type="none" w="med" len="med"/>
+                    </a:lnB>
+                    <a:solidFill>
+                      <a:srgbClr val="FFFFFF"/>
+                    </a:solidFill>
+                  </a:tcPr>
+                </a:tc>
+                <a:tc>
+                  <a:txBody>
+                    <a:bodyPr/>
+                    <a:lstStyle/>
+                    <a:p>
+                      <a:pPr indent="0" marL="0">
+                        <a:buNone/>
+                      </a:pPr>
+                      <a:r>
+                        <a:rPr lang="en-US" sz="1150" dirty="0">
+                          <a:solidFill>
+                            <a:srgbClr val="1F3D49"/>
+                          </a:solidFill>
+                          <a:latin typeface="Calibri" pitchFamily="34" charset="0"/>
+                          <a:ea typeface="Calibri" pitchFamily="34" charset="-122"/>
+                          <a:cs typeface="Calibri" pitchFamily="34" charset="-120"/>
+                        </a:rPr>
+                        <a:t>0.574</a:t>
+                      </a:r>
+                      <a:endParaRPr lang="en-US" sz="1150" dirty="0">
+                        <a:latin typeface="Calibri" charset="0"/>
+                        <a:ea typeface="Calibri" charset="0"/>
+                        <a:cs typeface="Calibri" charset="0"/>
+                      </a:endParaRPr>
+                    </a:p>
+                  </a:txBody>
+                  <a:tcPr marL="91440" marR="91440" marT="45720" marB="45720">
+                    <a:lnL w="12700" cap="flat" cmpd="sng" algn="ctr">
+                      <a:solidFill>
+                        <a:srgbClr val="DCE7EB"/>
+                      </a:solidFill>
+                      <a:prstDash val="solid"/>
+                      <a:round/>
+                      <a:headEnd type="none" w="med" len="med"/>
+                      <a:tailEnd type="none" w="med" len="med"/>
+                    </a:lnL>
+                    <a:lnR w="12700" cap="flat" cmpd="sng" algn="ctr">
+                      <a:solidFill>
+                        <a:srgbClr val="DCE7EB"/>
+                      </a:solidFill>
+                      <a:prstDash val="solid"/>
+                      <a:round/>
+                      <a:headEnd type="none" w="med" len="med"/>
+                      <a:tailEnd type="none" w="med" len="med"/>
+                    </a:lnR>
+                    <a:lnT w="12700" cap="flat" cmpd="sng" algn="ctr">
+                      <a:solidFill>
+                        <a:srgbClr val="DCE7EB"/>
+                      </a:solidFill>
+                      <a:prstDash val="solid"/>
+                      <a:round/>
+                      <a:headEnd type="none" w="med" len="med"/>
+                      <a:tailEnd type="none" w="med" len="med"/>
+                    </a:lnT>
+                    <a:lnB w="12700" cap="flat" cmpd="sng" algn="ctr">
+                      <a:solidFill>
+                        <a:srgbClr val="DCE7EB"/>
+                      </a:solidFill>
+                      <a:prstDash val="solid"/>
+                      <a:round/>
+                      <a:headEnd type="none" w="med" len="med"/>
+                      <a:tailEnd type="none" w="med" len="med"/>
+                    </a:lnB>
+                    <a:solidFill>
+                      <a:srgbClr val="FFFFFF"/>
+                    </a:solidFill>
+                  </a:tcPr>
+                </a:tc>
+                <a:tc>
+                  <a:txBody>
+                    <a:bodyPr/>
+                    <a:lstStyle/>
+                    <a:p>
+                      <a:pPr indent="0" marL="0">
+                        <a:buNone/>
+                      </a:pPr>
+                      <a:r>
+                        <a:rPr lang="en-US" sz="1150" dirty="0">
+                          <a:solidFill>
+                            <a:srgbClr val="1F3D49"/>
+                          </a:solidFill>
+                          <a:latin typeface="Calibri" pitchFamily="34" charset="0"/>
+                          <a:ea typeface="Calibri" pitchFamily="34" charset="-122"/>
+                          <a:cs typeface="Calibri" pitchFamily="34" charset="-120"/>
+                        </a:rPr>
+                        <a:t>0.537</a:t>
+                      </a:r>
+                      <a:endParaRPr lang="en-US" sz="1150" dirty="0">
+                        <a:latin typeface="Calibri" charset="0"/>
+                        <a:ea typeface="Calibri" charset="0"/>
+                        <a:cs typeface="Calibri" charset="0"/>
+                      </a:endParaRPr>
+                    </a:p>
+                  </a:txBody>
+                  <a:tcPr marL="91440" marR="91440" marT="45720" marB="45720">
+                    <a:lnL w="12700" cap="flat" cmpd="sng" algn="ctr">
+                      <a:solidFill>
+                        <a:srgbClr val="DCE7EB"/>
+                      </a:solidFill>
+                      <a:prstDash val="solid"/>
+                      <a:round/>
+                      <a:headEnd type="none" w="med" len="med"/>
+                      <a:tailEnd type="none" w="med" len="med"/>
+                    </a:lnL>
+                    <a:lnR w="12700" cap="flat" cmpd="sng" algn="ctr">
+                      <a:solidFill>
+                        <a:srgbClr val="DCE7EB"/>
+                      </a:solidFill>
+                      <a:prstDash val="solid"/>
+                      <a:round/>
+                      <a:headEnd type="none" w="med" len="med"/>
+                      <a:tailEnd type="none" w="med" len="med"/>
+                    </a:lnR>
+                    <a:lnT w="12700" cap="flat" cmpd="sng" algn="ctr">
+                      <a:solidFill>
+                        <a:srgbClr val="DCE7EB"/>
+                      </a:solidFill>
+                      <a:prstDash val="solid"/>
+                      <a:round/>
+                      <a:headEnd type="none" w="med" len="med"/>
+                      <a:tailEnd type="none" w="med" len="med"/>
+                    </a:lnT>
+                    <a:lnB w="12700" cap="flat" cmpd="sng" algn="ctr">
+                      <a:solidFill>
+                        <a:srgbClr val="DCE7EB"/>
+                      </a:solidFill>
+                      <a:prstDash val="solid"/>
+                      <a:round/>
+                      <a:headEnd type="none" w="med" len="med"/>
+                      <a:tailEnd type="none" w="med" len="med"/>
+                    </a:lnB>
+                    <a:solidFill>
+                      <a:srgbClr val="FFFFFF"/>
+                    </a:solidFill>
+                  </a:tcPr>
+                </a:tc>
+                <a:tc>
+                  <a:txBody>
+                    <a:bodyPr/>
+                    <a:lstStyle/>
+                    <a:p>
+                      <a:pPr indent="0" marL="0">
+                        <a:buNone/>
+                      </a:pPr>
+                      <a:r>
+                        <a:rPr lang="en-US" sz="1150" dirty="0">
+                          <a:solidFill>
+                            <a:srgbClr val="1F3D49"/>
+                          </a:solidFill>
+                          <a:latin typeface="Calibri" pitchFamily="34" charset="0"/>
+                          <a:ea typeface="Calibri" pitchFamily="34" charset="-122"/>
+                          <a:cs typeface="Calibri" pitchFamily="34" charset="-120"/>
+                        </a:rPr>
+                        <a:t>0.509</a:t>
+                      </a:r>
+                      <a:endParaRPr lang="en-US" sz="1150" dirty="0">
+                        <a:latin typeface="Calibri" charset="0"/>
+                        <a:ea typeface="Calibri" charset="0"/>
+                        <a:cs typeface="Calibri" charset="0"/>
+                      </a:endParaRPr>
+                    </a:p>
+                  </a:txBody>
+                  <a:tcPr marL="91440" marR="91440" marT="45720" marB="45720">
+                    <a:lnL w="12700" cap="flat" cmpd="sng" algn="ctr">
+                      <a:solidFill>
+                        <a:srgbClr val="DCE7EB"/>
+                      </a:solidFill>
+                      <a:prstDash val="solid"/>
+                      <a:round/>
+                      <a:headEnd type="none" w="med" len="med"/>
+                      <a:tailEnd type="none" w="med" len="med"/>
+                    </a:lnL>
+                    <a:lnR w="12700" cap="flat" cmpd="sng" algn="ctr">
+                      <a:solidFill>
+                        <a:srgbClr val="DCE7EB"/>
+                      </a:solidFill>
+                      <a:prstDash val="solid"/>
+                      <a:round/>
+                      <a:headEnd type="none" w="med" len="med"/>
+                      <a:tailEnd type="none" w="med" len="med"/>
+                    </a:lnR>
+                    <a:lnT w="12700" cap="flat" cmpd="sng" algn="ctr">
+                      <a:solidFill>
+                        <a:srgbClr val="DCE7EB"/>
+                      </a:solidFill>
+                      <a:prstDash val="solid"/>
+                      <a:round/>
+                      <a:headEnd type="none" w="med" len="med"/>
+                      <a:tailEnd type="none" w="med" len="med"/>
+                    </a:lnT>
+                    <a:lnB w="12700" cap="flat" cmpd="sng" algn="ctr">
+                      <a:solidFill>
+                        <a:srgbClr val="DCE7EB"/>
+                      </a:solidFill>
+                      <a:prstDash val="solid"/>
+                      <a:round/>
+                      <a:headEnd type="none" w="med" len="med"/>
+                      <a:tailEnd type="none" w="med" len="med"/>
+                    </a:lnB>
+                    <a:solidFill>
+                      <a:srgbClr val="FFFFFF"/>
+                    </a:solidFill>
+                  </a:tcPr>
+                </a:tc>
+              </a:tr>
+              <a:tr h="329184">
+                <a:tc>
+                  <a:txBody>
+                    <a:bodyPr/>
+                    <a:lstStyle/>
+                    <a:p>
+                      <a:pPr indent="0" marL="0">
+                        <a:buNone/>
+                      </a:pPr>
+                      <a:r>
+                        <a:rPr lang="en-US" sz="1150" dirty="0">
+                          <a:solidFill>
+                            <a:srgbClr val="1F3D49"/>
+                          </a:solidFill>
+                          <a:latin typeface="Calibri" pitchFamily="34" charset="0"/>
+                          <a:ea typeface="Calibri" pitchFamily="34" charset="-122"/>
+                          <a:cs typeface="Calibri" pitchFamily="34" charset="-120"/>
+                        </a:rPr>
+                        <a:t>mean |AUC − 0.5|</a:t>
+                      </a:r>
+                      <a:endParaRPr lang="en-US" sz="1150" dirty="0">
+                        <a:latin typeface="Calibri" charset="0"/>
+                        <a:ea typeface="Calibri" charset="0"/>
+                        <a:cs typeface="Calibri" charset="0"/>
+                      </a:endParaRPr>
+                    </a:p>
+                  </a:txBody>
+                  <a:tcPr marL="91440" marR="91440" marT="45720" marB="45720">
+                    <a:lnL w="12700" cap="flat" cmpd="sng" algn="ctr">
+                      <a:solidFill>
+                        <a:srgbClr val="DCE7EB"/>
+                      </a:solidFill>
+                      <a:prstDash val="solid"/>
+                      <a:round/>
+                      <a:headEnd type="none" w="med" len="med"/>
+                      <a:tailEnd type="none" w="med" len="med"/>
+                    </a:lnL>
+                    <a:lnR w="12700" cap="flat" cmpd="sng" algn="ctr">
+                      <a:solidFill>
+                        <a:srgbClr val="DCE7EB"/>
+                      </a:solidFill>
+                      <a:prstDash val="solid"/>
+                      <a:round/>
+                      <a:headEnd type="none" w="med" len="med"/>
+                      <a:tailEnd type="none" w="med" len="med"/>
+                    </a:lnR>
+                    <a:lnT w="12700" cap="flat" cmpd="sng" algn="ctr">
+                      <a:solidFill>
+                        <a:srgbClr val="DCE7EB"/>
+                      </a:solidFill>
+                      <a:prstDash val="solid"/>
+                      <a:round/>
+                      <a:headEnd type="none" w="med" len="med"/>
+                      <a:tailEnd type="none" w="med" len="med"/>
+                    </a:lnT>
+                    <a:lnB w="12700" cap="flat" cmpd="sng" algn="ctr">
+                      <a:solidFill>
+                        <a:srgbClr val="DCE7EB"/>
+                      </a:solidFill>
+                      <a:prstDash val="solid"/>
+                      <a:round/>
+                      <a:headEnd type="none" w="med" len="med"/>
+                      <a:tailEnd type="none" w="med" len="med"/>
+                    </a:lnB>
+                    <a:solidFill>
+                      <a:srgbClr val="FFFFFF"/>
+                    </a:solidFill>
+                  </a:tcPr>
+                </a:tc>
+                <a:tc>
+                  <a:txBody>
+                    <a:bodyPr/>
+                    <a:lstStyle/>
+                    <a:p>
+                      <a:pPr indent="0" marL="0">
+                        <a:buNone/>
+                      </a:pPr>
+                      <a:r>
+                        <a:rPr lang="en-US" sz="1150" dirty="0">
+                          <a:solidFill>
+                            <a:srgbClr val="1F3D49"/>
+                          </a:solidFill>
+                          <a:latin typeface="Calibri" pitchFamily="34" charset="0"/>
+                          <a:ea typeface="Calibri" pitchFamily="34" charset="-122"/>
+                          <a:cs typeface="Calibri" pitchFamily="34" charset="-120"/>
+                        </a:rPr>
+                        <a:t>0.075</a:t>
+                      </a:r>
+                      <a:endParaRPr lang="en-US" sz="1150" dirty="0">
+                        <a:latin typeface="Calibri" charset="0"/>
+                        <a:ea typeface="Calibri" charset="0"/>
+                        <a:cs typeface="Calibri" charset="0"/>
+                      </a:endParaRPr>
+                    </a:p>
+                  </a:txBody>
+                  <a:tcPr marL="91440" marR="91440" marT="45720" marB="45720">
+                    <a:lnL w="12700" cap="flat" cmpd="sng" algn="ctr">
+                      <a:solidFill>
+                        <a:srgbClr val="DCE7EB"/>
+                      </a:solidFill>
+                      <a:prstDash val="solid"/>
+                      <a:round/>
+                      <a:headEnd type="none" w="med" len="med"/>
+                      <a:tailEnd type="none" w="med" len="med"/>
+                    </a:lnL>
+                    <a:lnR w="12700" cap="flat" cmpd="sng" algn="ctr">
+                      <a:solidFill>
+                        <a:srgbClr val="DCE7EB"/>
+                      </a:solidFill>
+                      <a:prstDash val="solid"/>
+                      <a:round/>
+                      <a:headEnd type="none" w="med" len="med"/>
+                      <a:tailEnd type="none" w="med" len="med"/>
+                    </a:lnR>
+                    <a:lnT w="12700" cap="flat" cmpd="sng" algn="ctr">
+                      <a:solidFill>
+                        <a:srgbClr val="DCE7EB"/>
+                      </a:solidFill>
+                      <a:prstDash val="solid"/>
+                      <a:round/>
+                      <a:headEnd type="none" w="med" len="med"/>
+                      <a:tailEnd type="none" w="med" len="med"/>
+                    </a:lnT>
+                    <a:lnB w="12700" cap="flat" cmpd="sng" algn="ctr">
+                      <a:solidFill>
+                        <a:srgbClr val="DCE7EB"/>
+                      </a:solidFill>
+                      <a:prstDash val="solid"/>
+                      <a:round/>
+                      <a:headEnd type="none" w="med" len="med"/>
+                      <a:tailEnd type="none" w="med" len="med"/>
+                    </a:lnB>
+                    <a:solidFill>
+                      <a:srgbClr val="FFFFFF"/>
+                    </a:solidFill>
+                  </a:tcPr>
+                </a:tc>
+                <a:tc>
+                  <a:txBody>
+                    <a:bodyPr/>
+                    <a:lstStyle/>
+                    <a:p>
+                      <a:pPr indent="0" marL="0">
+                        <a:buNone/>
+                      </a:pPr>
+                      <a:r>
+                        <a:rPr lang="en-US" sz="1150" dirty="0">
+                          <a:solidFill>
+                            <a:srgbClr val="1F3D49"/>
+                          </a:solidFill>
+                          <a:latin typeface="Calibri" pitchFamily="34" charset="0"/>
+                          <a:ea typeface="Calibri" pitchFamily="34" charset="-122"/>
+                          <a:cs typeface="Calibri" pitchFamily="34" charset="-120"/>
+                        </a:rPr>
+                        <a:t>0.053</a:t>
+                      </a:r>
+                      <a:endParaRPr lang="en-US" sz="1150" dirty="0">
+                        <a:latin typeface="Calibri" charset="0"/>
+                        <a:ea typeface="Calibri" charset="0"/>
+                        <a:cs typeface="Calibri" charset="0"/>
+                      </a:endParaRPr>
+                    </a:p>
+                  </a:txBody>
+                  <a:tcPr marL="91440" marR="91440" marT="45720" marB="45720">
+                    <a:lnL w="12700" cap="flat" cmpd="sng" algn="ctr">
+                      <a:solidFill>
+                        <a:srgbClr val="DCE7EB"/>
+                      </a:solidFill>
+                      <a:prstDash val="solid"/>
+                      <a:round/>
+                      <a:headEnd type="none" w="med" len="med"/>
+                      <a:tailEnd type="none" w="med" len="med"/>
+                    </a:lnL>
+                    <a:lnR w="12700" cap="flat" cmpd="sng" algn="ctr">
+                      <a:solidFill>
+                        <a:srgbClr val="DCE7EB"/>
+                      </a:solidFill>
+                      <a:prstDash val="solid"/>
+                      <a:round/>
+                      <a:headEnd type="none" w="med" len="med"/>
+                      <a:tailEnd type="none" w="med" len="med"/>
+                    </a:lnR>
+                    <a:lnT w="12700" cap="flat" cmpd="sng" algn="ctr">
+                      <a:solidFill>
+                        <a:srgbClr val="DCE7EB"/>
+                      </a:solidFill>
+                      <a:prstDash val="solid"/>
+                      <a:round/>
+                      <a:headEnd type="none" w="med" len="med"/>
+                      <a:tailEnd type="none" w="med" len="med"/>
+                    </a:lnT>
+                    <a:lnB w="12700" cap="flat" cmpd="sng" algn="ctr">
+                      <a:solidFill>
+                        <a:srgbClr val="DCE7EB"/>
+                      </a:solidFill>
+                      <a:prstDash val="solid"/>
+                      <a:round/>
+                      <a:headEnd type="none" w="med" len="med"/>
+                      <a:tailEnd type="none" w="med" len="med"/>
+                    </a:lnB>
+                    <a:solidFill>
+                      <a:srgbClr val="FFFFFF"/>
+                    </a:solidFill>
+                  </a:tcPr>
+                </a:tc>
+                <a:tc>
+                  <a:txBody>
+                    <a:bodyPr/>
+                    <a:lstStyle/>
+                    <a:p>
+                      <a:pPr indent="0" marL="0">
+                        <a:buNone/>
+                      </a:pPr>
+                      <a:r>
+                        <a:rPr lang="en-US" sz="1150" dirty="0">
+                          <a:solidFill>
+                            <a:srgbClr val="1F3D49"/>
+                          </a:solidFill>
+                          <a:latin typeface="Calibri" pitchFamily="34" charset="0"/>
+                          <a:ea typeface="Calibri" pitchFamily="34" charset="-122"/>
+                          <a:cs typeface="Calibri" pitchFamily="34" charset="-120"/>
+                        </a:rPr>
+                        <a:t>0.035</a:t>
+                      </a:r>
+                      <a:endParaRPr lang="en-US" sz="1150" dirty="0">
+                        <a:latin typeface="Calibri" charset="0"/>
+                        <a:ea typeface="Calibri" charset="0"/>
+                        <a:cs typeface="Calibri" charset="0"/>
+                      </a:endParaRPr>
+                    </a:p>
+                  </a:txBody>
+                  <a:tcPr marL="91440" marR="91440" marT="45720" marB="45720">
+                    <a:lnL w="12700" cap="flat" cmpd="sng" algn="ctr">
+                      <a:solidFill>
+                        <a:srgbClr val="DCE7EB"/>
+                      </a:solidFill>
+                      <a:prstDash val="solid"/>
+                      <a:round/>
+                      <a:headEnd type="none" w="med" len="med"/>
+                      <a:tailEnd type="none" w="med" len="med"/>
+                    </a:lnL>
+                    <a:lnR w="12700" cap="flat" cmpd="sng" algn="ctr">
+                      <a:solidFill>
+                        <a:srgbClr val="DCE7EB"/>
+                      </a:solidFill>
+                      <a:prstDash val="solid"/>
+                      <a:round/>
+                      <a:headEnd type="none" w="med" len="med"/>
+                      <a:tailEnd type="none" w="med" len="med"/>
+                    </a:lnR>
+                    <a:lnT w="12700" cap="flat" cmpd="sng" algn="ctr">
+                      <a:solidFill>
+                        <a:srgbClr val="DCE7EB"/>
+                      </a:solidFill>
+                      <a:prstDash val="solid"/>
+                      <a:round/>
+                      <a:headEnd type="none" w="med" len="med"/>
+                      <a:tailEnd type="none" w="med" len="med"/>
+                    </a:lnT>
+                    <a:lnB w="12700" cap="flat" cmpd="sng" algn="ctr">
+                      <a:solidFill>
+                        <a:srgbClr val="DCE7EB"/>
+                      </a:solidFill>
+                      <a:prstDash val="solid"/>
+                      <a:round/>
+                      <a:headEnd type="none" w="med" len="med"/>
+                      <a:tailEnd type="none" w="med" len="med"/>
+                    </a:lnB>
+                    <a:solidFill>
+                      <a:srgbClr val="FFFFFF"/>
+                    </a:solidFill>
+                  </a:tcPr>
+                </a:tc>
+                <a:tc>
+                  <a:txBody>
+                    <a:bodyPr/>
+                    <a:lstStyle/>
+                    <a:p>
+                      <a:pPr indent="0" marL="0">
+                        <a:buNone/>
+                      </a:pPr>
+                      <a:r>
+                        <a:rPr lang="en-US" sz="1150" dirty="0">
+                          <a:solidFill>
+                            <a:srgbClr val="1F3D49"/>
+                          </a:solidFill>
+                          <a:latin typeface="Calibri" pitchFamily="34" charset="0"/>
+                          <a:ea typeface="Calibri" pitchFamily="34" charset="-122"/>
+                          <a:cs typeface="Calibri" pitchFamily="34" charset="-120"/>
+                        </a:rPr>
+                        <a:t>0.027</a:t>
+                      </a:r>
+                      <a:endParaRPr lang="en-US" sz="1150" dirty="0">
+                        <a:latin typeface="Calibri" charset="0"/>
+                        <a:ea typeface="Calibri" charset="0"/>
+                        <a:cs typeface="Calibri" charset="0"/>
+                      </a:endParaRPr>
+                    </a:p>
+                  </a:txBody>
+                  <a:tcPr marL="91440" marR="91440" marT="45720" marB="45720">
+                    <a:lnL w="12700" cap="flat" cmpd="sng" algn="ctr">
+                      <a:solidFill>
+                        <a:srgbClr val="DCE7EB"/>
+                      </a:solidFill>
+                      <a:prstDash val="solid"/>
+                      <a:round/>
+                      <a:headEnd type="none" w="med" len="med"/>
+                      <a:tailEnd type="none" w="med" len="med"/>
+                    </a:lnL>
+                    <a:lnR w="12700" cap="flat" cmpd="sng" algn="ctr">
+                      <a:solidFill>
+                        <a:srgbClr val="DCE7EB"/>
+                      </a:solidFill>
+                      <a:prstDash val="solid"/>
+                      <a:round/>
+                      <a:headEnd type="none" w="med" len="med"/>
+                      <a:tailEnd type="none" w="med" len="med"/>
+                    </a:lnR>
+                    <a:lnT w="12700" cap="flat" cmpd="sng" algn="ctr">
+                      <a:solidFill>
+                        <a:srgbClr val="DCE7EB"/>
+                      </a:solidFill>
+                      <a:prstDash val="solid"/>
+                      <a:round/>
+                      <a:headEnd type="none" w="med" len="med"/>
+                      <a:tailEnd type="none" w="med" len="med"/>
+                    </a:lnT>
+                    <a:lnB w="12700" cap="flat" cmpd="sng" algn="ctr">
+                      <a:solidFill>
+                        <a:srgbClr val="DCE7EB"/>
+                      </a:solidFill>
+                      <a:prstDash val="solid"/>
+                      <a:round/>
+                      <a:headEnd type="none" w="med" len="med"/>
+                      <a:tailEnd type="none" w="med" len="med"/>
+                    </a:lnB>
+                    <a:solidFill>
+                      <a:srgbClr val="FFFFFF"/>
+                    </a:solidFill>
+                  </a:tcPr>
+                </a:tc>
+              </a:tr>
+            </a:tbl>
+          </a:graphicData>
+        </a:graphic>
+      </p:graphicFrame>
+      <p:sp>
+        <p:nvSpPr>
+          <p:cNvPr id="6" name="Text 3"/>
+          <p:cNvSpPr/>
+          <p:nvPr/>
+        </p:nvSpPr>
+        <p:spPr>
+          <a:xfrm>
+            <a:off x="566928" y="3675888"/>
+            <a:ext cx="6400800" cy="566928"/>
+          </a:xfrm>
+          <a:prstGeom prst="rect">
+            <a:avLst/>
+          </a:prstGeom>
+          <a:noFill/>
+          <a:ln/>
+        </p:spPr>
+        <p:txBody>
+          <a:bodyPr wrap="square" lIns="0" tIns="0" rIns="0" bIns="0" rtlCol="0" anchor="ctr"/>
+          <a:lstStyle/>
+          <a:p>
+            <a:pPr indent="0" marL="0">
+              <a:lnSpc>
+                <a:spcPts val="1900"/>
+              </a:lnSpc>
+              <a:buNone/>
+            </a:pPr>
+            <a:r>
+              <a:rPr lang="en-US" sz="1450" b="1" dirty="0">
+                <a:solidFill>
+                  <a:srgbClr val="0B2E3B"/>
+                </a:solidFill>
+                <a:latin typeface="Cambria" pitchFamily="34" charset="0"/>
+                <a:ea typeface="Cambria" pitchFamily="34" charset="-122"/>
+                <a:cs typeface="Cambria" pitchFamily="34" charset="-120"/>
+              </a:rPr>
+              <a:t>Every feature decays with age. An 80+ patient carries about a third of the separable signal.</a:t>
+            </a:r>
+            <a:endParaRPr lang="en-US" sz="1450" dirty="0"/>
+          </a:p>
+        </p:txBody>
+      </p:sp>
+      <p:sp>
+        <p:nvSpPr>
+          <p:cNvPr id="7" name="Text 4"/>
+          <p:cNvSpPr/>
+          <p:nvPr/>
+        </p:nvSpPr>
+        <p:spPr>
+          <a:xfrm>
+            <a:off x="566928" y="4297680"/>
+            <a:ext cx="6400800" cy="731520"/>
+          </a:xfrm>
+          <a:prstGeom prst="rect">
+            <a:avLst/>
+          </a:prstGeom>
+          <a:noFill/>
+          <a:ln/>
+        </p:spPr>
+        <p:txBody>
+          <a:bodyPr wrap="square" lIns="0" tIns="0" rIns="0" bIns="0" rtlCol="0" anchor="ctr"/>
+          <a:lstStyle/>
+          <a:p>
+            <a:pPr indent="0" marL="0">
+              <a:lnSpc>
+                <a:spcPts val="1700"/>
+              </a:lnSpc>
+              <a:buNone/>
+            </a:pPr>
+            <a:r>
+              <a:rPr lang="en-US" sz="1250" dirty="0">
+                <a:solidFill>
+                  <a:srgbClr val="34525E"/>
+                </a:solidFill>
+                <a:latin typeface="Calibri" pitchFamily="34" charset="0"/>
+                <a:ea typeface="Calibri" pitchFamily="34" charset="-122"/>
+                <a:cs typeface="Calibri" pitchFamily="34" charset="-120"/>
+              </a:rPr>
+              <a:t>These features work by spotting patients who look sick and use the system heavily. Among the over-80s, almost everyone does — so they stop separating.</a:t>
+            </a:r>
+            <a:endParaRPr lang="en-US" sz="1250" dirty="0"/>
+          </a:p>
+        </p:txBody>
+      </p:sp>
+      <p:sp>
+        <p:nvSpPr>
+          <p:cNvPr id="8" name="Text 5"/>
+          <p:cNvSpPr/>
+          <p:nvPr/>
+        </p:nvSpPr>
+        <p:spPr>
+          <a:xfrm>
+            <a:off x="7223760" y="1737360"/>
+            <a:ext cx="4407408" cy="292608"/>
+          </a:xfrm>
+          <a:prstGeom prst="rect">
+            <a:avLst/>
+          </a:prstGeom>
+          <a:noFill/>
+          <a:ln/>
+        </p:spPr>
+        <p:txBody>
+          <a:bodyPr wrap="square" lIns="0" tIns="0" rIns="0" bIns="0" rtlCol="0" anchor="ctr"/>
+          <a:lstStyle/>
+          <a:p>
+            <a:pPr indent="0" marL="0">
+              <a:buNone/>
+            </a:pPr>
+            <a:r>
+              <a:rPr lang="en-US" sz="1500" b="1" dirty="0">
+                <a:solidFill>
+                  <a:srgbClr val="0B2E3B"/>
+                </a:solidFill>
+                <a:latin typeface="Cambria" pitchFamily="34" charset="0"/>
+                <a:ea typeface="Cambria" pitchFamily="34" charset="-122"/>
+                <a:cs typeface="Cambria" pitchFamily="34" charset="-120"/>
+              </a:rPr>
+              <a:t>Three fixes tried. None win.</a:t>
+            </a:r>
+            <a:endParaRPr lang="en-US" sz="1500" dirty="0"/>
+          </a:p>
+        </p:txBody>
+      </p:sp>
+      <p:sp>
+        <p:nvSpPr>
+          <p:cNvPr id="9" name="Shape 6"/>
+          <p:cNvSpPr/>
+          <p:nvPr/>
+        </p:nvSpPr>
+        <p:spPr>
+          <a:xfrm>
+            <a:off x="7223760" y="2121408"/>
+            <a:ext cx="4407408" cy="420624"/>
           </a:xfrm>
           <a:prstGeom prst="roundRect">
             <a:avLst>
-              <a:gd name="adj" fmla="val 4598"/>
+              <a:gd name="adj" fmla="val 17391"/>
+            </a:avLst>
+          </a:prstGeom>
+          <a:solidFill>
+            <a:srgbClr val="E2F0E9"/>
+          </a:solidFill>
+          <a:ln w="12700">
+            <a:solidFill>
+              <a:srgbClr val="E2F0E9"/>
+            </a:solidFill>
+            <a:prstDash val="solid"/>
+          </a:ln>
+        </p:spPr>
+      </p:sp>
+      <p:sp>
+        <p:nvSpPr>
+          <p:cNvPr id="10" name="Text 7"/>
+          <p:cNvSpPr/>
+          <p:nvPr/>
+        </p:nvSpPr>
+        <p:spPr>
+          <a:xfrm>
+            <a:off x="7443216" y="2121408"/>
+            <a:ext cx="2834640" cy="420624"/>
+          </a:xfrm>
+          <a:prstGeom prst="rect">
+            <a:avLst/>
+          </a:prstGeom>
+          <a:noFill/>
+          <a:ln/>
+        </p:spPr>
+        <p:txBody>
+          <a:bodyPr wrap="square" lIns="0" tIns="0" rIns="0" bIns="0" rtlCol="0" anchor="ctr"/>
+          <a:lstStyle/>
+          <a:p>
+            <a:pPr indent="0" marL="0">
+              <a:buNone/>
+            </a:pPr>
+            <a:r>
+              <a:rPr lang="en-US" sz="1200" b="1" dirty="0">
+                <a:solidFill>
+                  <a:srgbClr val="1D4D39"/>
+                </a:solidFill>
+                <a:latin typeface="Calibri" pitchFamily="34" charset="0"/>
+                <a:ea typeface="Calibri" pitchFamily="34" charset="-122"/>
+                <a:cs typeface="Calibri" pitchFamily="34" charset="-120"/>
+              </a:rPr>
+              <a:t>Global model (current)</a:t>
+            </a:r>
+            <a:endParaRPr lang="en-US" sz="1200" dirty="0"/>
+          </a:p>
+        </p:txBody>
+      </p:sp>
+      <p:sp>
+        <p:nvSpPr>
+          <p:cNvPr id="11" name="Text 8"/>
+          <p:cNvSpPr/>
+          <p:nvPr/>
+        </p:nvSpPr>
+        <p:spPr>
+          <a:xfrm>
+            <a:off x="10332720" y="2121408"/>
+            <a:ext cx="1060704" cy="420624"/>
+          </a:xfrm>
+          <a:prstGeom prst="rect">
+            <a:avLst/>
+          </a:prstGeom>
+          <a:noFill/>
+          <a:ln/>
+        </p:spPr>
+        <p:txBody>
+          <a:bodyPr wrap="square" lIns="0" tIns="0" rIns="0" bIns="0" rtlCol="0" anchor="ctr"/>
+          <a:lstStyle/>
+          <a:p>
+            <a:pPr algn="r" indent="0" marL="0">
+              <a:buNone/>
+            </a:pPr>
+            <a:r>
+              <a:rPr lang="en-US" sz="1200" b="1" dirty="0">
+                <a:solidFill>
+                  <a:srgbClr val="1D4D39"/>
+                </a:solidFill>
+                <a:latin typeface="Calibri" pitchFamily="34" charset="0"/>
+                <a:ea typeface="Calibri" pitchFamily="34" charset="-122"/>
+                <a:cs typeface="Calibri" pitchFamily="34" charset="-120"/>
+              </a:rPr>
+              <a:t>0.6134</a:t>
+            </a:r>
+            <a:endParaRPr lang="en-US" sz="1200" dirty="0"/>
+          </a:p>
+        </p:txBody>
+      </p:sp>
+      <p:sp>
+        <p:nvSpPr>
+          <p:cNvPr id="12" name="Shape 9"/>
+          <p:cNvSpPr/>
+          <p:nvPr/>
+        </p:nvSpPr>
+        <p:spPr>
+          <a:xfrm>
+            <a:off x="7223760" y="2633472"/>
+            <a:ext cx="4407408" cy="420624"/>
+          </a:xfrm>
+          <a:prstGeom prst="roundRect">
+            <a:avLst>
+              <a:gd name="adj" fmla="val 17391"/>
             </a:avLst>
           </a:prstGeom>
           <a:solidFill>
@@ -13820,14 +16222,14 @@
       </p:sp>
       <p:sp>
         <p:nvSpPr>
-          <p:cNvPr id="6" name="Text 4"/>
-          <p:cNvSpPr/>
-          <p:nvPr/>
-        </p:nvSpPr>
-        <p:spPr>
-          <a:xfrm>
-            <a:off x="822960" y="1901952"/>
-            <a:ext cx="2962656" cy="310896"/>
+          <p:cNvPr id="13" name="Text 10"/>
+          <p:cNvSpPr/>
+          <p:nvPr/>
+        </p:nvSpPr>
+        <p:spPr>
+          <a:xfrm>
+            <a:off x="7443216" y="2633472"/>
+            <a:ext cx="2834640" cy="420624"/>
           </a:xfrm>
           <a:prstGeom prst="rect">
             <a:avLst/>
@@ -13843,49 +16245,7 @@
               <a:buNone/>
             </a:pPr>
             <a:r>
-              <a:rPr lang="en-US" sz="1500" b="1" dirty="0">
-                <a:solidFill>
-                  <a:srgbClr val="0B2E3B"/>
-                </a:solidFill>
-                <a:latin typeface="Cambria" pitchFamily="34" charset="0"/>
-                <a:ea typeface="Cambria" pitchFamily="34" charset="-122"/>
-                <a:cs typeface="Cambria" pitchFamily="34" charset="-120"/>
-              </a:rPr>
-              <a:t>Nightly batch</a:t>
-            </a:r>
-            <a:endParaRPr lang="en-US" sz="1500" dirty="0"/>
-          </a:p>
-        </p:txBody>
-      </p:sp>
-      <p:sp>
-        <p:nvSpPr>
-          <p:cNvPr id="7" name="Text 5"/>
-          <p:cNvSpPr/>
-          <p:nvPr/>
-        </p:nvSpPr>
-        <p:spPr>
-          <a:xfrm>
-            <a:off x="822960" y="2249424"/>
-            <a:ext cx="2962656" cy="914400"/>
-          </a:xfrm>
-          <a:prstGeom prst="rect">
-            <a:avLst/>
-          </a:prstGeom>
-          <a:noFill/>
-          <a:ln/>
-        </p:spPr>
-        <p:txBody>
-          <a:bodyPr wrap="square" lIns="0" tIns="0" rIns="0" bIns="0" rtlCol="0" anchor="ctr"/>
-          <a:lstStyle/>
-          <a:p>
-            <a:pPr indent="0" marL="0">
-              <a:lnSpc>
-                <a:spcPts val="1600"/>
-              </a:lnSpc>
-              <a:buNone/>
-            </a:pPr>
-            <a:r>
-              <a:rPr lang="en-US" sz="1150" dirty="0">
+              <a:rPr lang="en-US" sz="1200" dirty="0">
                 <a:solidFill>
                   <a:srgbClr val="34525E"/>
                 </a:solidFill>
@@ -13893,26 +16253,65 @@
                 <a:ea typeface="Calibri" pitchFamily="34" charset="-122"/>
                 <a:cs typeface="Calibri" pitchFamily="34" charset="-120"/>
               </a:rPr>
-              <a:t>The discharge list becomes a ranked worklist for the follow-up team, written straight into their queue.</a:t>
-            </a:r>
-            <a:endParaRPr lang="en-US" sz="1150" dirty="0"/>
-          </a:p>
-        </p:txBody>
-      </p:sp>
-      <p:sp>
-        <p:nvSpPr>
-          <p:cNvPr id="8" name="Shape 6"/>
-          <p:cNvSpPr/>
-          <p:nvPr/>
-        </p:nvSpPr>
-        <p:spPr>
-          <a:xfrm>
-            <a:off x="4279392" y="1737360"/>
-            <a:ext cx="3474720" cy="1591056"/>
+              <a:t>Dedicated 80+ model</a:t>
+            </a:r>
+            <a:endParaRPr lang="en-US" sz="1200" dirty="0"/>
+          </a:p>
+        </p:txBody>
+      </p:sp>
+      <p:sp>
+        <p:nvSpPr>
+          <p:cNvPr id="14" name="Text 11"/>
+          <p:cNvSpPr/>
+          <p:nvPr/>
+        </p:nvSpPr>
+        <p:spPr>
+          <a:xfrm>
+            <a:off x="10332720" y="2633472"/>
+            <a:ext cx="1060704" cy="420624"/>
+          </a:xfrm>
+          <a:prstGeom prst="rect">
+            <a:avLst/>
+          </a:prstGeom>
+          <a:noFill/>
+          <a:ln/>
+        </p:spPr>
+        <p:txBody>
+          <a:bodyPr wrap="square" lIns="0" tIns="0" rIns="0" bIns="0" rtlCol="0" anchor="ctr"/>
+          <a:lstStyle/>
+          <a:p>
+            <a:pPr algn="r" indent="0" marL="0">
+              <a:buNone/>
+            </a:pPr>
+            <a:r>
+              <a:rPr lang="en-US" sz="1200" b="1" dirty="0">
+                <a:solidFill>
+                  <a:srgbClr val="34525E"/>
+                </a:solidFill>
+                <a:latin typeface="Calibri" pitchFamily="34" charset="0"/>
+                <a:ea typeface="Calibri" pitchFamily="34" charset="-122"/>
+                <a:cs typeface="Calibri" pitchFamily="34" charset="-120"/>
+              </a:rPr>
+              <a:t>0.5876</a:t>
+            </a:r>
+            <a:endParaRPr lang="en-US" sz="1200" dirty="0"/>
+          </a:p>
+        </p:txBody>
+      </p:sp>
+      <p:sp>
+        <p:nvSpPr>
+          <p:cNvPr id="15" name="Shape 12"/>
+          <p:cNvSpPr/>
+          <p:nvPr/>
+        </p:nvSpPr>
+        <p:spPr>
+          <a:xfrm>
+            <a:off x="7223760" y="3145536"/>
+            <a:ext cx="4407408" cy="420624"/>
           </a:xfrm>
           <a:prstGeom prst="roundRect">
             <a:avLst>
-              <a:gd name="adj" fmla="val 4598"/>
+              <a:gd name="adj" fmla="val 17391"/>
             </a:avLst>
           </a:prstGeom>
           <a:solidFill>
@@ -13928,14 +16327,14 @@
       </p:sp>
       <p:sp>
         <p:nvSpPr>
-          <p:cNvPr id="9" name="Text 7"/>
-          <p:cNvSpPr/>
-          <p:nvPr/>
-        </p:nvSpPr>
-        <p:spPr>
-          <a:xfrm>
-            <a:off x="4535424" y="1901952"/>
-            <a:ext cx="2962656" cy="310896"/>
+          <p:cNvPr id="16" name="Text 13"/>
+          <p:cNvSpPr/>
+          <p:nvPr/>
+        </p:nvSpPr>
+        <p:spPr>
+          <a:xfrm>
+            <a:off x="7443216" y="3145536"/>
+            <a:ext cx="2834640" cy="420624"/>
           </a:xfrm>
           <a:prstGeom prst="rect">
             <a:avLst/>
@@ -13951,49 +16350,7 @@
               <a:buNone/>
             </a:pPr>
             <a:r>
-              <a:rPr lang="en-US" sz="1500" b="1" dirty="0">
-                <a:solidFill>
-                  <a:srgbClr val="0B2E3B"/>
-                </a:solidFill>
-                <a:latin typeface="Cambria" pitchFamily="34" charset="0"/>
-                <a:ea typeface="Cambria" pitchFamily="34" charset="-122"/>
-                <a:cs typeface="Cambria" pitchFamily="34" charset="-120"/>
-              </a:rPr>
-              <a:t>Real-time endpoint</a:t>
-            </a:r>
-            <a:endParaRPr lang="en-US" sz="1500" dirty="0"/>
-          </a:p>
-        </p:txBody>
-      </p:sp>
-      <p:sp>
-        <p:nvSpPr>
-          <p:cNvPr id="10" name="Text 8"/>
-          <p:cNvSpPr/>
-          <p:nvPr/>
-        </p:nvSpPr>
-        <p:spPr>
-          <a:xfrm>
-            <a:off x="4535424" y="2249424"/>
-            <a:ext cx="2962656" cy="914400"/>
-          </a:xfrm>
-          <a:prstGeom prst="rect">
-            <a:avLst/>
-          </a:prstGeom>
-          <a:noFill/>
-          <a:ln/>
-        </p:spPr>
-        <p:txBody>
-          <a:bodyPr wrap="square" lIns="0" tIns="0" rIns="0" bIns="0" rtlCol="0" anchor="ctr"/>
-          <a:lstStyle/>
-          <a:p>
-            <a:pPr indent="0" marL="0">
-              <a:lnSpc>
-                <a:spcPts val="1600"/>
-              </a:lnSpc>
-              <a:buNone/>
-            </a:pPr>
-            <a:r>
-              <a:rPr lang="en-US" sz="1150" dirty="0">
+              <a:rPr lang="en-US" sz="1200" dirty="0">
                 <a:solidFill>
                   <a:srgbClr val="34525E"/>
                 </a:solidFill>
@@ -14001,26 +16358,65 @@
                 <a:ea typeface="Calibri" pitchFamily="34" charset="-122"/>
                 <a:cs typeface="Calibri" pitchFamily="34" charset="-120"/>
               </a:rPr>
-              <a:t>FastAPI service — /score returns risk, flag, band and disclaimer. Sub-millisecond tree inference.</a:t>
-            </a:r>
-            <a:endParaRPr lang="en-US" sz="1150" dirty="0"/>
-          </a:p>
-        </p:txBody>
-      </p:sp>
-      <p:sp>
-        <p:nvSpPr>
-          <p:cNvPr id="11" name="Shape 9"/>
-          <p:cNvSpPr/>
-          <p:nvPr/>
-        </p:nvSpPr>
-        <p:spPr>
-          <a:xfrm>
-            <a:off x="7991856" y="1737360"/>
-            <a:ext cx="3474720" cy="1591056"/>
+              <a:t>Sample weight ×3</a:t>
+            </a:r>
+            <a:endParaRPr lang="en-US" sz="1200" dirty="0"/>
+          </a:p>
+        </p:txBody>
+      </p:sp>
+      <p:sp>
+        <p:nvSpPr>
+          <p:cNvPr id="17" name="Text 14"/>
+          <p:cNvSpPr/>
+          <p:nvPr/>
+        </p:nvSpPr>
+        <p:spPr>
+          <a:xfrm>
+            <a:off x="10332720" y="3145536"/>
+            <a:ext cx="1060704" cy="420624"/>
+          </a:xfrm>
+          <a:prstGeom prst="rect">
+            <a:avLst/>
+          </a:prstGeom>
+          <a:noFill/>
+          <a:ln/>
+        </p:spPr>
+        <p:txBody>
+          <a:bodyPr wrap="square" lIns="0" tIns="0" rIns="0" bIns="0" rtlCol="0" anchor="ctr"/>
+          <a:lstStyle/>
+          <a:p>
+            <a:pPr algn="r" indent="0" marL="0">
+              <a:buNone/>
+            </a:pPr>
+            <a:r>
+              <a:rPr lang="en-US" sz="1200" b="1" dirty="0">
+                <a:solidFill>
+                  <a:srgbClr val="34525E"/>
+                </a:solidFill>
+                <a:latin typeface="Calibri" pitchFamily="34" charset="0"/>
+                <a:ea typeface="Calibri" pitchFamily="34" charset="-122"/>
+                <a:cs typeface="Calibri" pitchFamily="34" charset="-120"/>
+              </a:rPr>
+              <a:t>0.6087</a:t>
+            </a:r>
+            <a:endParaRPr lang="en-US" sz="1200" dirty="0"/>
+          </a:p>
+        </p:txBody>
+      </p:sp>
+      <p:sp>
+        <p:nvSpPr>
+          <p:cNvPr id="18" name="Shape 15"/>
+          <p:cNvSpPr/>
+          <p:nvPr/>
+        </p:nvSpPr>
+        <p:spPr>
+          <a:xfrm>
+            <a:off x="7223760" y="3657600"/>
+            <a:ext cx="4407408" cy="420624"/>
           </a:xfrm>
           <a:prstGeom prst="roundRect">
             <a:avLst>
-              <a:gd name="adj" fmla="val 4598"/>
+              <a:gd name="adj" fmla="val 17391"/>
             </a:avLst>
           </a:prstGeom>
           <a:solidFill>
@@ -14036,14 +16432,14 @@
       </p:sp>
       <p:sp>
         <p:nvSpPr>
-          <p:cNvPr id="12" name="Text 10"/>
-          <p:cNvSpPr/>
-          <p:nvPr/>
-        </p:nvSpPr>
-        <p:spPr>
-          <a:xfrm>
-            <a:off x="8247888" y="1901952"/>
-            <a:ext cx="2962656" cy="310896"/>
+          <p:cNvPr id="19" name="Text 16"/>
+          <p:cNvSpPr/>
+          <p:nvPr/>
+        </p:nvSpPr>
+        <p:spPr>
+          <a:xfrm>
+            <a:off x="7443216" y="3657600"/>
+            <a:ext cx="2834640" cy="420624"/>
           </a:xfrm>
           <a:prstGeom prst="rect">
             <a:avLst/>
@@ -14059,235 +16455,174 @@
               <a:buNone/>
             </a:pPr>
             <a:r>
-              <a:rPr lang="en-US" sz="1500" b="1" dirty="0">
-                <a:solidFill>
-                  <a:srgbClr val="0B2E3B"/>
+              <a:rPr lang="en-US" sz="1200" dirty="0">
+                <a:solidFill>
+                  <a:srgbClr val="34525E"/>
+                </a:solidFill>
+                <a:latin typeface="Calibri" pitchFamily="34" charset="0"/>
+                <a:ea typeface="Calibri" pitchFamily="34" charset="-122"/>
+                <a:cs typeface="Calibri" pitchFamily="34" charset="-120"/>
+              </a:rPr>
+              <a:t>Sample weight ×6</a:t>
+            </a:r>
+            <a:endParaRPr lang="en-US" sz="1200" dirty="0"/>
+          </a:p>
+        </p:txBody>
+      </p:sp>
+      <p:sp>
+        <p:nvSpPr>
+          <p:cNvPr id="20" name="Text 17"/>
+          <p:cNvSpPr/>
+          <p:nvPr/>
+        </p:nvSpPr>
+        <p:spPr>
+          <a:xfrm>
+            <a:off x="10332720" y="3657600"/>
+            <a:ext cx="1060704" cy="420624"/>
+          </a:xfrm>
+          <a:prstGeom prst="rect">
+            <a:avLst/>
+          </a:prstGeom>
+          <a:noFill/>
+          <a:ln/>
+        </p:spPr>
+        <p:txBody>
+          <a:bodyPr wrap="square" lIns="0" tIns="0" rIns="0" bIns="0" rtlCol="0" anchor="ctr"/>
+          <a:lstStyle/>
+          <a:p>
+            <a:pPr algn="r" indent="0" marL="0">
+              <a:buNone/>
+            </a:pPr>
+            <a:r>
+              <a:rPr lang="en-US" sz="1200" b="1" dirty="0">
+                <a:solidFill>
+                  <a:srgbClr val="34525E"/>
+                </a:solidFill>
+                <a:latin typeface="Calibri" pitchFamily="34" charset="0"/>
+                <a:ea typeface="Calibri" pitchFamily="34" charset="-122"/>
+                <a:cs typeface="Calibri" pitchFamily="34" charset="-120"/>
+              </a:rPr>
+              <a:t>0.6003</a:t>
+            </a:r>
+            <a:endParaRPr lang="en-US" sz="1200" dirty="0"/>
+          </a:p>
+        </p:txBody>
+      </p:sp>
+      <p:sp>
+        <p:nvSpPr>
+          <p:cNvPr id="21" name="Text 18"/>
+          <p:cNvSpPr/>
+          <p:nvPr/>
+        </p:nvSpPr>
+        <p:spPr>
+          <a:xfrm>
+            <a:off x="7223760" y="4224528"/>
+            <a:ext cx="4407408" cy="256032"/>
+          </a:xfrm>
+          <a:prstGeom prst="rect">
+            <a:avLst/>
+          </a:prstGeom>
+          <a:noFill/>
+          <a:ln/>
+        </p:spPr>
+        <p:txBody>
+          <a:bodyPr wrap="square" lIns="0" tIns="0" rIns="0" bIns="0" rtlCol="0" anchor="ctr"/>
+          <a:lstStyle/>
+          <a:p>
+            <a:pPr indent="0" marL="0">
+              <a:buNone/>
+            </a:pPr>
+            <a:r>
+              <a:rPr lang="en-US" sz="1050" i="1" dirty="0">
+                <a:solidFill>
+                  <a:srgbClr val="5A7683"/>
+                </a:solidFill>
+                <a:latin typeface="Calibri" pitchFamily="34" charset="0"/>
+                <a:ea typeface="Calibri" pitchFamily="34" charset="-122"/>
+                <a:cs typeface="Calibri" pitchFamily="34" charset="-120"/>
+              </a:rPr>
+              <a:t>ROC-AUC on the 3,831-encounter 80+ test slice.</a:t>
+            </a:r>
+            <a:endParaRPr lang="en-US" sz="1050" dirty="0"/>
+          </a:p>
+        </p:txBody>
+      </p:sp>
+      <p:sp>
+        <p:nvSpPr>
+          <p:cNvPr id="22" name="Shape 19"/>
+          <p:cNvSpPr/>
+          <p:nvPr/>
+        </p:nvSpPr>
+        <p:spPr>
+          <a:xfrm>
+            <a:off x="7223760" y="4572000"/>
+            <a:ext cx="4407408" cy="1371600"/>
+          </a:xfrm>
+          <a:prstGeom prst="roundRect">
+            <a:avLst>
+              <a:gd name="adj" fmla="val 5333"/>
+            </a:avLst>
+          </a:prstGeom>
+          <a:solidFill>
+            <a:srgbClr val="FBE4E0"/>
+          </a:solidFill>
+          <a:ln w="12700">
+            <a:solidFill>
+              <a:srgbClr val="FBE4E0"/>
+            </a:solidFill>
+            <a:prstDash val="solid"/>
+          </a:ln>
+        </p:spPr>
+      </p:sp>
+      <p:sp>
+        <p:nvSpPr>
+          <p:cNvPr id="23" name="Text 20"/>
+          <p:cNvSpPr/>
+          <p:nvPr/>
+        </p:nvSpPr>
+        <p:spPr>
+          <a:xfrm>
+            <a:off x="7443216" y="4718304"/>
+            <a:ext cx="3968496" cy="292608"/>
+          </a:xfrm>
+          <a:prstGeom prst="rect">
+            <a:avLst/>
+          </a:prstGeom>
+          <a:noFill/>
+          <a:ln/>
+        </p:spPr>
+        <p:txBody>
+          <a:bodyPr wrap="square" lIns="0" tIns="0" rIns="0" bIns="0" rtlCol="0" anchor="ctr"/>
+          <a:lstStyle/>
+          <a:p>
+            <a:pPr indent="0" marL="0">
+              <a:buNone/>
+            </a:pPr>
+            <a:r>
+              <a:rPr lang="en-US" sz="1400" b="1" dirty="0">
+                <a:solidFill>
+                  <a:srgbClr val="9E3423"/>
                 </a:solidFill>
                 <a:latin typeface="Cambria" pitchFamily="34" charset="0"/>
                 <a:ea typeface="Cambria" pitchFamily="34" charset="-122"/>
                 <a:cs typeface="Cambria" pitchFamily="34" charset="-120"/>
               </a:rPr>
-              <a:t>One 5 MB artefact</a:t>
-            </a:r>
-            <a:endParaRPr lang="en-US" sz="1500" dirty="0"/>
-          </a:p>
-        </p:txBody>
-      </p:sp>
-      <p:sp>
-        <p:nvSpPr>
-          <p:cNvPr id="13" name="Text 11"/>
-          <p:cNvSpPr/>
-          <p:nvPr/>
-        </p:nvSpPr>
-        <p:spPr>
-          <a:xfrm>
-            <a:off x="8247888" y="2249424"/>
-            <a:ext cx="2962656" cy="914400"/>
-          </a:xfrm>
-          <a:prstGeom prst="rect">
-            <a:avLst/>
-          </a:prstGeom>
-          <a:noFill/>
-          <a:ln/>
-        </p:spPr>
-        <p:txBody>
-          <a:bodyPr wrap="square" lIns="0" tIns="0" rIns="0" bIns="0" rtlCol="0" anchor="ctr"/>
-          <a:lstStyle/>
-          <a:p>
-            <a:pPr indent="0" marL="0">
-              <a:lnSpc>
-                <a:spcPts val="1600"/>
-              </a:lnSpc>
-              <a:buNone/>
-            </a:pPr>
-            <a:r>
-              <a:rPr lang="en-US" sz="1150" dirty="0">
-                <a:solidFill>
-                  <a:srgbClr val="34525E"/>
-                </a:solidFill>
-                <a:latin typeface="Calibri" pitchFamily="34" charset="0"/>
-                <a:ea typeface="Calibri" pitchFamily="34" charset="-122"/>
-                <a:cs typeface="Calibri" pitchFamily="34" charset="-120"/>
-              </a:rPr>
-              <a:t>Preprocessing, booster, calibrator and threshold travel together in a single joblib file.</a:t>
-            </a:r>
-            <a:endParaRPr lang="en-US" sz="1150" dirty="0"/>
-          </a:p>
-        </p:txBody>
-      </p:sp>
-      <p:sp>
-        <p:nvSpPr>
-          <p:cNvPr id="14" name="Shape 12"/>
-          <p:cNvSpPr/>
-          <p:nvPr/>
-        </p:nvSpPr>
-        <p:spPr>
-          <a:xfrm>
-            <a:off x="566928" y="3493008"/>
-            <a:ext cx="11057839" cy="1481328"/>
-          </a:xfrm>
-          <a:prstGeom prst="roundRect">
-            <a:avLst>
-              <a:gd name="adj" fmla="val 4938"/>
-            </a:avLst>
-          </a:prstGeom>
-          <a:solidFill>
-            <a:srgbClr val="0B2E3B"/>
-          </a:solidFill>
-          <a:ln w="12700">
-            <a:solidFill>
-              <a:srgbClr val="0B2E3B"/>
-            </a:solidFill>
-            <a:prstDash val="solid"/>
-          </a:ln>
-        </p:spPr>
-      </p:sp>
-      <p:sp>
-        <p:nvSpPr>
-          <p:cNvPr id="15" name="Text 13"/>
-          <p:cNvSpPr/>
-          <p:nvPr/>
-        </p:nvSpPr>
-        <p:spPr>
-          <a:xfrm>
-            <a:off x="877824" y="3639312"/>
-            <a:ext cx="10424160" cy="310896"/>
-          </a:xfrm>
-          <a:prstGeom prst="rect">
-            <a:avLst/>
-          </a:prstGeom>
-          <a:noFill/>
-          <a:ln/>
-        </p:spPr>
-        <p:txBody>
-          <a:bodyPr wrap="square" lIns="0" tIns="0" rIns="0" bIns="0" rtlCol="0" anchor="ctr"/>
-          <a:lstStyle/>
-          <a:p>
-            <a:pPr indent="0" marL="0">
-              <a:buNone/>
-            </a:pPr>
-            <a:r>
-              <a:rPr lang="en-US" sz="1500" b="1" dirty="0">
-                <a:solidFill>
-                  <a:srgbClr val="FFFFFF"/>
-                </a:solidFill>
-                <a:latin typeface="Cambria" pitchFamily="34" charset="0"/>
-                <a:ea typeface="Cambria" pitchFamily="34" charset="-122"/>
-                <a:cs typeface="Cambria" pitchFamily="34" charset="-120"/>
-              </a:rPr>
-              <a:t>Two serving bugs that offline metrics could never have caught</a:t>
-            </a:r>
-            <a:endParaRPr lang="en-US" sz="1500" dirty="0"/>
-          </a:p>
-        </p:txBody>
-      </p:sp>
-      <p:sp>
-        <p:nvSpPr>
-          <p:cNvPr id="16" name="Text 14"/>
-          <p:cNvSpPr/>
-          <p:nvPr/>
-        </p:nvSpPr>
-        <p:spPr>
-          <a:xfrm>
-            <a:off x="877824" y="3986784"/>
-            <a:ext cx="10424160" cy="859536"/>
-          </a:xfrm>
-          <a:prstGeom prst="rect">
-            <a:avLst/>
-          </a:prstGeom>
-          <a:noFill/>
-          <a:ln/>
-        </p:spPr>
-        <p:txBody>
-          <a:bodyPr wrap="square" lIns="0" tIns="0" rIns="0" bIns="0" rtlCol="0" anchor="ctr"/>
-          <a:lstStyle/>
-          <a:p>
-            <a:pPr marL="342900" indent="-342900">
-              <a:lnSpc>
-                <a:spcPts val="1600"/>
-              </a:lnSpc>
-              <a:spcAft>
-                <a:spcPts val="600"/>
-              </a:spcAft>
-              <a:buSzPct val="100000"/>
-              <a:buChar char="•"/>
-            </a:pPr>
-            <a:r>
-              <a:rPr lang="en-US" sz="1200" dirty="0">
-                <a:solidFill>
-                  <a:srgbClr val="C9DCE3"/>
-                </a:solidFill>
-                <a:latin typeface="Calibri" pitchFamily="34" charset="0"/>
-                <a:ea typeface="Calibri" pitchFamily="34" charset="-122"/>
-                <a:cs typeface="Calibri" pitchFamily="34" charset="-120"/>
-              </a:rPr>
-              <a:t>Feature engineering required the readmitted label — which does not exist at discharge.</a:t>
-            </a:r>
-            <a:endParaRPr lang="en-US" sz="1200" dirty="0"/>
-          </a:p>
-          <a:p>
-            <a:pPr marL="342900" indent="-342900">
-              <a:lnSpc>
-                <a:spcPts val="1600"/>
-              </a:lnSpc>
-              <a:spcAft>
-                <a:spcPts val="600"/>
-              </a:spcAft>
-              <a:buSzPct val="100000"/>
-              <a:buChar char="•"/>
-            </a:pPr>
-            <a:r>
-              <a:rPr lang="en-US" sz="1200" dirty="0">
-                <a:solidFill>
-                  <a:srgbClr val="C9DCE3"/>
-                </a:solidFill>
-                <a:latin typeface="Calibri" pitchFamily="34" charset="0"/>
-                <a:ea typeface="Calibri" pitchFamily="34" charset="-122"/>
-                <a:cs typeface="Calibri" pitchFamily="34" charset="-120"/>
-              </a:rPr>
-              <a:t>prior_encounters was counted within the batch, so a single-row request scored every patient as a first-ever admission — zeroing out the model's strongest feature.</a:t>
-            </a:r>
-            <a:endParaRPr lang="en-US" sz="1200" dirty="0"/>
-          </a:p>
-        </p:txBody>
-      </p:sp>
-      <p:sp>
-        <p:nvSpPr>
-          <p:cNvPr id="17" name="Shape 15"/>
-          <p:cNvSpPr/>
-          <p:nvPr/>
-        </p:nvSpPr>
-        <p:spPr>
-          <a:xfrm>
-            <a:off x="566928" y="5138928"/>
-            <a:ext cx="5358384" cy="896112"/>
-          </a:xfrm>
-          <a:prstGeom prst="roundRect">
-            <a:avLst>
-              <a:gd name="adj" fmla="val 8163"/>
-            </a:avLst>
-          </a:prstGeom>
-          <a:solidFill>
-            <a:srgbClr val="E2F0E9"/>
-          </a:solidFill>
-          <a:ln w="12700">
-            <a:solidFill>
-              <a:srgbClr val="E2F0E9"/>
-            </a:solidFill>
-            <a:prstDash val="solid"/>
-          </a:ln>
-        </p:spPr>
-      </p:sp>
-      <p:sp>
-        <p:nvSpPr>
-          <p:cNvPr id="18" name="Text 16"/>
-          <p:cNvSpPr/>
-          <p:nvPr/>
-        </p:nvSpPr>
-        <p:spPr>
-          <a:xfrm>
-            <a:off x="822960" y="5138928"/>
-            <a:ext cx="4846320" cy="896112"/>
+              <a:t>A data limit, not a modelling one</a:t>
+            </a:r>
+            <a:endParaRPr lang="en-US" sz="1400" dirty="0"/>
+          </a:p>
+        </p:txBody>
+      </p:sp>
+      <p:sp>
+        <p:nvSpPr>
+          <p:cNvPr id="24" name="Text 21"/>
+          <p:cNvSpPr/>
+          <p:nvPr/>
+        </p:nvSpPr>
+        <p:spPr>
+          <a:xfrm>
+            <a:off x="7443216" y="5029200"/>
+            <a:ext cx="3968496" cy="822960"/>
           </a:xfrm>
           <a:prstGeom prst="rect">
             <a:avLst/>
@@ -14306,15 +16641,15 @@
               <a:buNone/>
             </a:pPr>
             <a:r>
-              <a:rPr lang="en-US" sz="1150" b="1" dirty="0">
-                <a:solidFill>
-                  <a:srgbClr val="1D4D39"/>
+              <a:rPr lang="en-US" sz="1150" dirty="0">
+                <a:solidFill>
+                  <a:srgbClr val="7A2A1C"/>
                 </a:solidFill>
                 <a:latin typeface="Calibri" pitchFamily="34" charset="0"/>
                 <a:ea typeface="Calibri" pitchFamily="34" charset="-122"/>
                 <a:cs typeface="Calibri" pitchFamily="34" charset="-120"/>
               </a:rPr>
-              <a:t>Serving reuses data_prep.py directly — a second copy of the feature logic is how models quietly degrade in production.</a:t>
+              <a:t>Closing this needs variables the dataset does not carry — frailty index, functional status, cognition, social support at home.</a:t>
             </a:r>
             <a:endParaRPr lang="en-US" sz="1150" dirty="0"/>
           </a:p>
@@ -14322,41 +16657,14 @@
       </p:sp>
       <p:sp>
         <p:nvSpPr>
-          <p:cNvPr id="19" name="Shape 17"/>
-          <p:cNvSpPr/>
-          <p:nvPr/>
-        </p:nvSpPr>
-        <p:spPr>
-          <a:xfrm>
-            <a:off x="6263640" y="5138928"/>
-            <a:ext cx="5358384" cy="896112"/>
-          </a:xfrm>
-          <a:prstGeom prst="roundRect">
-            <a:avLst>
-              <a:gd name="adj" fmla="val 8163"/>
-            </a:avLst>
-          </a:prstGeom>
-          <a:solidFill>
-            <a:srgbClr val="EEF4F6"/>
-          </a:solidFill>
-          <a:ln w="12700">
-            <a:solidFill>
-              <a:srgbClr val="EEF4F6"/>
-            </a:solidFill>
-            <a:prstDash val="solid"/>
-          </a:ln>
-        </p:spPr>
-      </p:sp>
-      <p:sp>
-        <p:nvSpPr>
-          <p:cNvPr id="20" name="Text 18"/>
-          <p:cNvSpPr/>
-          <p:nvPr/>
-        </p:nvSpPr>
-        <p:spPr>
-          <a:xfrm>
-            <a:off x="6519672" y="5138928"/>
-            <a:ext cx="4846320" cy="896112"/>
+          <p:cNvPr id="25" name="Text 22"/>
+          <p:cNvSpPr/>
+          <p:nvPr/>
+        </p:nvSpPr>
+        <p:spPr>
+          <a:xfrm>
+            <a:off x="566928" y="6163056"/>
+            <a:ext cx="11057839" cy="237744"/>
           </a:xfrm>
           <a:prstGeom prst="rect">
             <a:avLst/>
@@ -14369,23 +16677,20 @@
           <a:lstStyle/>
           <a:p>
             <a:pPr indent="0" marL="0">
-              <a:lnSpc>
-                <a:spcPts val="1500"/>
-              </a:lnSpc>
               <a:buNone/>
             </a:pPr>
             <a:r>
-              <a:rPr lang="en-US" sz="1150" dirty="0">
-                <a:solidFill>
-                  <a:srgbClr val="34525E"/>
+              <a:rPr lang="en-US" sz="950" i="1" dirty="0">
+                <a:solidFill>
+                  <a:srgbClr val="9AB0B9"/>
                 </a:solidFill>
                 <a:latin typeface="Calibri" pitchFamily="34" charset="0"/>
                 <a:ea typeface="Calibri" pitchFamily="34" charset="-122"/>
                 <a:cs typeface="Calibri" pitchFamily="34" charset="-120"/>
               </a:rPr>
-              <a:t>Monitor flag rate, realised vs predicted readmission rate, calibration drift and the subgroup gaps — on a schedule, not once at launch.</a:t>
-            </a:r>
-            <a:endParaRPr lang="en-US" sz="1150" dirty="0"/>
+              <a:t>The dedicated model is the worst option: exposure to younger patients helps the global model rank older ones.</a:t>
+            </a:r>
+            <a:endParaRPr lang="en-US" sz="950" dirty="0"/>
           </a:p>
         </p:txBody>
       </p:sp>
@@ -14400,6 +16705,753 @@
 <file path=ppt/slides/slide18.xml><?xml version="1.0" encoding="utf-8"?>
 <p:sld xmlns:a="http://schemas.openxmlformats.org/drawingml/2006/main" xmlns:r="http://schemas.openxmlformats.org/officeDocument/2006/relationships" xmlns:p="http://schemas.openxmlformats.org/presentationml/2006/main">
   <p:cSld name="Slide 18">
+    <p:bg>
+      <p:bgPr>
+        <a:solidFill>
+          <a:srgbClr val="FFFFFF"/>
+        </a:solidFill>
+      </p:bgPr>
+    </p:bg>
+    <p:spTree>
+      <p:nvGrpSpPr>
+        <p:cNvPr id="1" name=""/>
+        <p:cNvGrpSpPr/>
+        <p:nvPr/>
+      </p:nvGrpSpPr>
+      <p:grpSpPr>
+        <a:xfrm>
+          <a:off x="0" y="0"/>
+          <a:ext cx="0" cy="0"/>
+          <a:chOff x="0" y="0"/>
+          <a:chExt cx="0" cy="0"/>
+        </a:xfrm>
+      </p:grpSpPr>
+      <p:sp>
+        <p:nvSpPr>
+          <p:cNvPr id="2" name="Text 0"/>
+          <p:cNvSpPr/>
+          <p:nvPr/>
+        </p:nvSpPr>
+        <p:spPr>
+          <a:xfrm>
+            <a:off x="566928" y="310896"/>
+            <a:ext cx="11057839" cy="237744"/>
+          </a:xfrm>
+          <a:prstGeom prst="rect">
+            <a:avLst/>
+          </a:prstGeom>
+          <a:noFill/>
+          <a:ln/>
+        </p:spPr>
+        <p:txBody>
+          <a:bodyPr wrap="square" lIns="0" tIns="0" rIns="0" bIns="0" rtlCol="0" anchor="ctr"/>
+          <a:lstStyle/>
+          <a:p>
+            <a:pPr indent="0" marL="0">
+              <a:buNone/>
+            </a:pPr>
+            <a:r>
+              <a:rPr lang="en-US" sz="1100" b="1" spc="200" kern="0" dirty="0">
+                <a:solidFill>
+                  <a:srgbClr val="2E8FA8"/>
+                </a:solidFill>
+                <a:latin typeface="Calibri" pitchFamily="34" charset="0"/>
+                <a:ea typeface="Calibri" pitchFamily="34" charset="-122"/>
+                <a:cs typeface="Calibri" pitchFamily="34" charset="-120"/>
+              </a:rPr>
+              <a:t>DEPLOYMENT</a:t>
+            </a:r>
+            <a:endParaRPr lang="en-US" sz="1100" dirty="0"/>
+          </a:p>
+        </p:txBody>
+      </p:sp>
+      <p:sp>
+        <p:nvSpPr>
+          <p:cNvPr id="3" name="Text 1"/>
+          <p:cNvSpPr/>
+          <p:nvPr/>
+        </p:nvSpPr>
+        <p:spPr>
+          <a:xfrm>
+            <a:off x="566928" y="566928"/>
+            <a:ext cx="11057839" cy="658368"/>
+          </a:xfrm>
+          <a:prstGeom prst="rect">
+            <a:avLst/>
+          </a:prstGeom>
+          <a:noFill/>
+          <a:ln/>
+        </p:spPr>
+        <p:txBody>
+          <a:bodyPr wrap="square" lIns="0" tIns="0" rIns="0" bIns="0" rtlCol="0" anchor="t"/>
+          <a:lstStyle/>
+          <a:p>
+            <a:pPr indent="0" marL="0">
+              <a:buNone/>
+            </a:pPr>
+            <a:r>
+              <a:rPr lang="en-US" sz="3200" b="1" dirty="0">
+                <a:solidFill>
+                  <a:srgbClr val="0B2E3B"/>
+                </a:solidFill>
+                <a:latin typeface="Cambria" pitchFamily="34" charset="0"/>
+                <a:ea typeface="Cambria" pitchFamily="34" charset="-122"/>
+                <a:cs typeface="Cambria" pitchFamily="34" charset="-120"/>
+              </a:rPr>
+              <a:t>Decision support, not an autonomous action</a:t>
+            </a:r>
+            <a:endParaRPr lang="en-US" sz="3200" dirty="0"/>
+          </a:p>
+        </p:txBody>
+      </p:sp>
+      <p:sp>
+        <p:nvSpPr>
+          <p:cNvPr id="4" name="Text 2"/>
+          <p:cNvSpPr/>
+          <p:nvPr/>
+        </p:nvSpPr>
+        <p:spPr>
+          <a:xfrm>
+            <a:off x="566928" y="1316736"/>
+            <a:ext cx="11057839" cy="274320"/>
+          </a:xfrm>
+          <a:prstGeom prst="rect">
+            <a:avLst/>
+          </a:prstGeom>
+          <a:noFill/>
+          <a:ln/>
+        </p:spPr>
+        <p:txBody>
+          <a:bodyPr wrap="square" lIns="0" tIns="0" rIns="0" bIns="0" rtlCol="0" anchor="ctr"/>
+          <a:lstStyle/>
+          <a:p>
+            <a:pPr indent="0" marL="0">
+              <a:buNone/>
+            </a:pPr>
+            <a:r>
+              <a:rPr lang="en-US" sz="1250" dirty="0">
+                <a:solidFill>
+                  <a:srgbClr val="5A7683"/>
+                </a:solidFill>
+                <a:latin typeface="Calibri" pitchFamily="34" charset="0"/>
+                <a:ea typeface="Calibri" pitchFamily="34" charset="-122"/>
+                <a:cs typeface="Calibri" pitchFamily="34" charset="-120"/>
+              </a:rPr>
+              <a:t>The model produces a ranked call list. A clinician decides what to do with it.</a:t>
+            </a:r>
+            <a:endParaRPr lang="en-US" sz="1250" dirty="0"/>
+          </a:p>
+        </p:txBody>
+      </p:sp>
+      <p:sp>
+        <p:nvSpPr>
+          <p:cNvPr id="5" name="Shape 3"/>
+          <p:cNvSpPr/>
+          <p:nvPr/>
+        </p:nvSpPr>
+        <p:spPr>
+          <a:xfrm>
+            <a:off x="566928" y="1737360"/>
+            <a:ext cx="3474720" cy="1591056"/>
+          </a:xfrm>
+          <a:prstGeom prst="roundRect">
+            <a:avLst>
+              <a:gd name="adj" fmla="val 4598"/>
+            </a:avLst>
+          </a:prstGeom>
+          <a:solidFill>
+            <a:srgbClr val="EEF4F6"/>
+          </a:solidFill>
+          <a:ln w="12700">
+            <a:solidFill>
+              <a:srgbClr val="EEF4F6"/>
+            </a:solidFill>
+            <a:prstDash val="solid"/>
+          </a:ln>
+        </p:spPr>
+      </p:sp>
+      <p:sp>
+        <p:nvSpPr>
+          <p:cNvPr id="6" name="Text 4"/>
+          <p:cNvSpPr/>
+          <p:nvPr/>
+        </p:nvSpPr>
+        <p:spPr>
+          <a:xfrm>
+            <a:off x="822960" y="1901952"/>
+            <a:ext cx="2962656" cy="310896"/>
+          </a:xfrm>
+          <a:prstGeom prst="rect">
+            <a:avLst/>
+          </a:prstGeom>
+          <a:noFill/>
+          <a:ln/>
+        </p:spPr>
+        <p:txBody>
+          <a:bodyPr wrap="square" lIns="0" tIns="0" rIns="0" bIns="0" rtlCol="0" anchor="ctr"/>
+          <a:lstStyle/>
+          <a:p>
+            <a:pPr indent="0" marL="0">
+              <a:buNone/>
+            </a:pPr>
+            <a:r>
+              <a:rPr lang="en-US" sz="1500" b="1" dirty="0">
+                <a:solidFill>
+                  <a:srgbClr val="0B2E3B"/>
+                </a:solidFill>
+                <a:latin typeface="Cambria" pitchFamily="34" charset="0"/>
+                <a:ea typeface="Cambria" pitchFamily="34" charset="-122"/>
+                <a:cs typeface="Cambria" pitchFamily="34" charset="-120"/>
+              </a:rPr>
+              <a:t>Nightly batch</a:t>
+            </a:r>
+            <a:endParaRPr lang="en-US" sz="1500" dirty="0"/>
+          </a:p>
+        </p:txBody>
+      </p:sp>
+      <p:sp>
+        <p:nvSpPr>
+          <p:cNvPr id="7" name="Text 5"/>
+          <p:cNvSpPr/>
+          <p:nvPr/>
+        </p:nvSpPr>
+        <p:spPr>
+          <a:xfrm>
+            <a:off x="822960" y="2249424"/>
+            <a:ext cx="2962656" cy="914400"/>
+          </a:xfrm>
+          <a:prstGeom prst="rect">
+            <a:avLst/>
+          </a:prstGeom>
+          <a:noFill/>
+          <a:ln/>
+        </p:spPr>
+        <p:txBody>
+          <a:bodyPr wrap="square" lIns="0" tIns="0" rIns="0" bIns="0" rtlCol="0" anchor="ctr"/>
+          <a:lstStyle/>
+          <a:p>
+            <a:pPr indent="0" marL="0">
+              <a:lnSpc>
+                <a:spcPts val="1600"/>
+              </a:lnSpc>
+              <a:buNone/>
+            </a:pPr>
+            <a:r>
+              <a:rPr lang="en-US" sz="1150" dirty="0">
+                <a:solidFill>
+                  <a:srgbClr val="34525E"/>
+                </a:solidFill>
+                <a:latin typeface="Calibri" pitchFamily="34" charset="0"/>
+                <a:ea typeface="Calibri" pitchFamily="34" charset="-122"/>
+                <a:cs typeface="Calibri" pitchFamily="34" charset="-120"/>
+              </a:rPr>
+              <a:t>The discharge list becomes a ranked worklist for the follow-up team, written straight into their queue.</a:t>
+            </a:r>
+            <a:endParaRPr lang="en-US" sz="1150" dirty="0"/>
+          </a:p>
+        </p:txBody>
+      </p:sp>
+      <p:sp>
+        <p:nvSpPr>
+          <p:cNvPr id="8" name="Shape 6"/>
+          <p:cNvSpPr/>
+          <p:nvPr/>
+        </p:nvSpPr>
+        <p:spPr>
+          <a:xfrm>
+            <a:off x="4279392" y="1737360"/>
+            <a:ext cx="3474720" cy="1591056"/>
+          </a:xfrm>
+          <a:prstGeom prst="roundRect">
+            <a:avLst>
+              <a:gd name="adj" fmla="val 4598"/>
+            </a:avLst>
+          </a:prstGeom>
+          <a:solidFill>
+            <a:srgbClr val="EEF4F6"/>
+          </a:solidFill>
+          <a:ln w="12700">
+            <a:solidFill>
+              <a:srgbClr val="EEF4F6"/>
+            </a:solidFill>
+            <a:prstDash val="solid"/>
+          </a:ln>
+        </p:spPr>
+      </p:sp>
+      <p:sp>
+        <p:nvSpPr>
+          <p:cNvPr id="9" name="Text 7"/>
+          <p:cNvSpPr/>
+          <p:nvPr/>
+        </p:nvSpPr>
+        <p:spPr>
+          <a:xfrm>
+            <a:off x="4535424" y="1901952"/>
+            <a:ext cx="2962656" cy="310896"/>
+          </a:xfrm>
+          <a:prstGeom prst="rect">
+            <a:avLst/>
+          </a:prstGeom>
+          <a:noFill/>
+          <a:ln/>
+        </p:spPr>
+        <p:txBody>
+          <a:bodyPr wrap="square" lIns="0" tIns="0" rIns="0" bIns="0" rtlCol="0" anchor="ctr"/>
+          <a:lstStyle/>
+          <a:p>
+            <a:pPr indent="0" marL="0">
+              <a:buNone/>
+            </a:pPr>
+            <a:r>
+              <a:rPr lang="en-US" sz="1500" b="1" dirty="0">
+                <a:solidFill>
+                  <a:srgbClr val="0B2E3B"/>
+                </a:solidFill>
+                <a:latin typeface="Cambria" pitchFamily="34" charset="0"/>
+                <a:ea typeface="Cambria" pitchFamily="34" charset="-122"/>
+                <a:cs typeface="Cambria" pitchFamily="34" charset="-120"/>
+              </a:rPr>
+              <a:t>Real-time endpoint</a:t>
+            </a:r>
+            <a:endParaRPr lang="en-US" sz="1500" dirty="0"/>
+          </a:p>
+        </p:txBody>
+      </p:sp>
+      <p:sp>
+        <p:nvSpPr>
+          <p:cNvPr id="10" name="Text 8"/>
+          <p:cNvSpPr/>
+          <p:nvPr/>
+        </p:nvSpPr>
+        <p:spPr>
+          <a:xfrm>
+            <a:off x="4535424" y="2249424"/>
+            <a:ext cx="2962656" cy="914400"/>
+          </a:xfrm>
+          <a:prstGeom prst="rect">
+            <a:avLst/>
+          </a:prstGeom>
+          <a:noFill/>
+          <a:ln/>
+        </p:spPr>
+        <p:txBody>
+          <a:bodyPr wrap="square" lIns="0" tIns="0" rIns="0" bIns="0" rtlCol="0" anchor="ctr"/>
+          <a:lstStyle/>
+          <a:p>
+            <a:pPr indent="0" marL="0">
+              <a:lnSpc>
+                <a:spcPts val="1600"/>
+              </a:lnSpc>
+              <a:buNone/>
+            </a:pPr>
+            <a:r>
+              <a:rPr lang="en-US" sz="1150" dirty="0">
+                <a:solidFill>
+                  <a:srgbClr val="34525E"/>
+                </a:solidFill>
+                <a:latin typeface="Calibri" pitchFamily="34" charset="0"/>
+                <a:ea typeface="Calibri" pitchFamily="34" charset="-122"/>
+                <a:cs typeface="Calibri" pitchFamily="34" charset="-120"/>
+              </a:rPr>
+              <a:t>FastAPI service — /score returns risk, flag, band and disclaimer. Sub-millisecond tree inference.</a:t>
+            </a:r>
+            <a:endParaRPr lang="en-US" sz="1150" dirty="0"/>
+          </a:p>
+        </p:txBody>
+      </p:sp>
+      <p:sp>
+        <p:nvSpPr>
+          <p:cNvPr id="11" name="Shape 9"/>
+          <p:cNvSpPr/>
+          <p:nvPr/>
+        </p:nvSpPr>
+        <p:spPr>
+          <a:xfrm>
+            <a:off x="7991856" y="1737360"/>
+            <a:ext cx="3474720" cy="1591056"/>
+          </a:xfrm>
+          <a:prstGeom prst="roundRect">
+            <a:avLst>
+              <a:gd name="adj" fmla="val 4598"/>
+            </a:avLst>
+          </a:prstGeom>
+          <a:solidFill>
+            <a:srgbClr val="EEF4F6"/>
+          </a:solidFill>
+          <a:ln w="12700">
+            <a:solidFill>
+              <a:srgbClr val="EEF4F6"/>
+            </a:solidFill>
+            <a:prstDash val="solid"/>
+          </a:ln>
+        </p:spPr>
+      </p:sp>
+      <p:sp>
+        <p:nvSpPr>
+          <p:cNvPr id="12" name="Text 10"/>
+          <p:cNvSpPr/>
+          <p:nvPr/>
+        </p:nvSpPr>
+        <p:spPr>
+          <a:xfrm>
+            <a:off x="8247888" y="1901952"/>
+            <a:ext cx="2962656" cy="310896"/>
+          </a:xfrm>
+          <a:prstGeom prst="rect">
+            <a:avLst/>
+          </a:prstGeom>
+          <a:noFill/>
+          <a:ln/>
+        </p:spPr>
+        <p:txBody>
+          <a:bodyPr wrap="square" lIns="0" tIns="0" rIns="0" bIns="0" rtlCol="0" anchor="ctr"/>
+          <a:lstStyle/>
+          <a:p>
+            <a:pPr indent="0" marL="0">
+              <a:buNone/>
+            </a:pPr>
+            <a:r>
+              <a:rPr lang="en-US" sz="1500" b="1" dirty="0">
+                <a:solidFill>
+                  <a:srgbClr val="0B2E3B"/>
+                </a:solidFill>
+                <a:latin typeface="Cambria" pitchFamily="34" charset="0"/>
+                <a:ea typeface="Cambria" pitchFamily="34" charset="-122"/>
+                <a:cs typeface="Cambria" pitchFamily="34" charset="-120"/>
+              </a:rPr>
+              <a:t>One 5 MB artefact</a:t>
+            </a:r>
+            <a:endParaRPr lang="en-US" sz="1500" dirty="0"/>
+          </a:p>
+        </p:txBody>
+      </p:sp>
+      <p:sp>
+        <p:nvSpPr>
+          <p:cNvPr id="13" name="Text 11"/>
+          <p:cNvSpPr/>
+          <p:nvPr/>
+        </p:nvSpPr>
+        <p:spPr>
+          <a:xfrm>
+            <a:off x="8247888" y="2249424"/>
+            <a:ext cx="2962656" cy="914400"/>
+          </a:xfrm>
+          <a:prstGeom prst="rect">
+            <a:avLst/>
+          </a:prstGeom>
+          <a:noFill/>
+          <a:ln/>
+        </p:spPr>
+        <p:txBody>
+          <a:bodyPr wrap="square" lIns="0" tIns="0" rIns="0" bIns="0" rtlCol="0" anchor="ctr"/>
+          <a:lstStyle/>
+          <a:p>
+            <a:pPr indent="0" marL="0">
+              <a:lnSpc>
+                <a:spcPts val="1600"/>
+              </a:lnSpc>
+              <a:buNone/>
+            </a:pPr>
+            <a:r>
+              <a:rPr lang="en-US" sz="1150" dirty="0">
+                <a:solidFill>
+                  <a:srgbClr val="34525E"/>
+                </a:solidFill>
+                <a:latin typeface="Calibri" pitchFamily="34" charset="0"/>
+                <a:ea typeface="Calibri" pitchFamily="34" charset="-122"/>
+                <a:cs typeface="Calibri" pitchFamily="34" charset="-120"/>
+              </a:rPr>
+              <a:t>Preprocessing, booster, calibrator and threshold travel together in a single joblib file.</a:t>
+            </a:r>
+            <a:endParaRPr lang="en-US" sz="1150" dirty="0"/>
+          </a:p>
+        </p:txBody>
+      </p:sp>
+      <p:sp>
+        <p:nvSpPr>
+          <p:cNvPr id="14" name="Shape 12"/>
+          <p:cNvSpPr/>
+          <p:nvPr/>
+        </p:nvSpPr>
+        <p:spPr>
+          <a:xfrm>
+            <a:off x="566928" y="3493008"/>
+            <a:ext cx="11057839" cy="1481328"/>
+          </a:xfrm>
+          <a:prstGeom prst="roundRect">
+            <a:avLst>
+              <a:gd name="adj" fmla="val 4938"/>
+            </a:avLst>
+          </a:prstGeom>
+          <a:solidFill>
+            <a:srgbClr val="0B2E3B"/>
+          </a:solidFill>
+          <a:ln w="12700">
+            <a:solidFill>
+              <a:srgbClr val="0B2E3B"/>
+            </a:solidFill>
+            <a:prstDash val="solid"/>
+          </a:ln>
+        </p:spPr>
+      </p:sp>
+      <p:sp>
+        <p:nvSpPr>
+          <p:cNvPr id="15" name="Text 13"/>
+          <p:cNvSpPr/>
+          <p:nvPr/>
+        </p:nvSpPr>
+        <p:spPr>
+          <a:xfrm>
+            <a:off x="877824" y="3639312"/>
+            <a:ext cx="10424160" cy="310896"/>
+          </a:xfrm>
+          <a:prstGeom prst="rect">
+            <a:avLst/>
+          </a:prstGeom>
+          <a:noFill/>
+          <a:ln/>
+        </p:spPr>
+        <p:txBody>
+          <a:bodyPr wrap="square" lIns="0" tIns="0" rIns="0" bIns="0" rtlCol="0" anchor="ctr"/>
+          <a:lstStyle/>
+          <a:p>
+            <a:pPr indent="0" marL="0">
+              <a:buNone/>
+            </a:pPr>
+            <a:r>
+              <a:rPr lang="en-US" sz="1500" b="1" dirty="0">
+                <a:solidFill>
+                  <a:srgbClr val="FFFFFF"/>
+                </a:solidFill>
+                <a:latin typeface="Cambria" pitchFamily="34" charset="0"/>
+                <a:ea typeface="Cambria" pitchFamily="34" charset="-122"/>
+                <a:cs typeface="Cambria" pitchFamily="34" charset="-120"/>
+              </a:rPr>
+              <a:t>Two serving bugs that offline metrics could never have caught</a:t>
+            </a:r>
+            <a:endParaRPr lang="en-US" sz="1500" dirty="0"/>
+          </a:p>
+        </p:txBody>
+      </p:sp>
+      <p:sp>
+        <p:nvSpPr>
+          <p:cNvPr id="16" name="Text 14"/>
+          <p:cNvSpPr/>
+          <p:nvPr/>
+        </p:nvSpPr>
+        <p:spPr>
+          <a:xfrm>
+            <a:off x="877824" y="3986784"/>
+            <a:ext cx="10424160" cy="859536"/>
+          </a:xfrm>
+          <a:prstGeom prst="rect">
+            <a:avLst/>
+          </a:prstGeom>
+          <a:noFill/>
+          <a:ln/>
+        </p:spPr>
+        <p:txBody>
+          <a:bodyPr wrap="square" lIns="0" tIns="0" rIns="0" bIns="0" rtlCol="0" anchor="ctr"/>
+          <a:lstStyle/>
+          <a:p>
+            <a:pPr marL="342900" indent="-342900">
+              <a:lnSpc>
+                <a:spcPts val="1600"/>
+              </a:lnSpc>
+              <a:spcAft>
+                <a:spcPts val="600"/>
+              </a:spcAft>
+              <a:buSzPct val="100000"/>
+              <a:buChar char="•"/>
+            </a:pPr>
+            <a:r>
+              <a:rPr lang="en-US" sz="1200" dirty="0">
+                <a:solidFill>
+                  <a:srgbClr val="C9DCE3"/>
+                </a:solidFill>
+                <a:latin typeface="Calibri" pitchFamily="34" charset="0"/>
+                <a:ea typeface="Calibri" pitchFamily="34" charset="-122"/>
+                <a:cs typeface="Calibri" pitchFamily="34" charset="-120"/>
+              </a:rPr>
+              <a:t>Feature engineering required the readmitted label — which does not exist at discharge.</a:t>
+            </a:r>
+            <a:endParaRPr lang="en-US" sz="1200" dirty="0"/>
+          </a:p>
+          <a:p>
+            <a:pPr marL="342900" indent="-342900">
+              <a:lnSpc>
+                <a:spcPts val="1600"/>
+              </a:lnSpc>
+              <a:spcAft>
+                <a:spcPts val="600"/>
+              </a:spcAft>
+              <a:buSzPct val="100000"/>
+              <a:buChar char="•"/>
+            </a:pPr>
+            <a:r>
+              <a:rPr lang="en-US" sz="1200" dirty="0">
+                <a:solidFill>
+                  <a:srgbClr val="C9DCE3"/>
+                </a:solidFill>
+                <a:latin typeface="Calibri" pitchFamily="34" charset="0"/>
+                <a:ea typeface="Calibri" pitchFamily="34" charset="-122"/>
+                <a:cs typeface="Calibri" pitchFamily="34" charset="-120"/>
+              </a:rPr>
+              <a:t>prior_encounters was counted within the batch, so a single-row request scored every patient as a first-ever admission — zeroing out the model's strongest feature.</a:t>
+            </a:r>
+            <a:endParaRPr lang="en-US" sz="1200" dirty="0"/>
+          </a:p>
+        </p:txBody>
+      </p:sp>
+      <p:sp>
+        <p:nvSpPr>
+          <p:cNvPr id="17" name="Shape 15"/>
+          <p:cNvSpPr/>
+          <p:nvPr/>
+        </p:nvSpPr>
+        <p:spPr>
+          <a:xfrm>
+            <a:off x="566928" y="5138928"/>
+            <a:ext cx="5358384" cy="896112"/>
+          </a:xfrm>
+          <a:prstGeom prst="roundRect">
+            <a:avLst>
+              <a:gd name="adj" fmla="val 8163"/>
+            </a:avLst>
+          </a:prstGeom>
+          <a:solidFill>
+            <a:srgbClr val="E2F0E9"/>
+          </a:solidFill>
+          <a:ln w="12700">
+            <a:solidFill>
+              <a:srgbClr val="E2F0E9"/>
+            </a:solidFill>
+            <a:prstDash val="solid"/>
+          </a:ln>
+        </p:spPr>
+      </p:sp>
+      <p:sp>
+        <p:nvSpPr>
+          <p:cNvPr id="18" name="Text 16"/>
+          <p:cNvSpPr/>
+          <p:nvPr/>
+        </p:nvSpPr>
+        <p:spPr>
+          <a:xfrm>
+            <a:off x="822960" y="5138928"/>
+            <a:ext cx="4846320" cy="896112"/>
+          </a:xfrm>
+          <a:prstGeom prst="rect">
+            <a:avLst/>
+          </a:prstGeom>
+          <a:noFill/>
+          <a:ln/>
+        </p:spPr>
+        <p:txBody>
+          <a:bodyPr wrap="square" lIns="0" tIns="0" rIns="0" bIns="0" rtlCol="0" anchor="ctr"/>
+          <a:lstStyle/>
+          <a:p>
+            <a:pPr indent="0" marL="0">
+              <a:lnSpc>
+                <a:spcPts val="1500"/>
+              </a:lnSpc>
+              <a:buNone/>
+            </a:pPr>
+            <a:r>
+              <a:rPr lang="en-US" sz="1150" b="1" dirty="0">
+                <a:solidFill>
+                  <a:srgbClr val="1D4D39"/>
+                </a:solidFill>
+                <a:latin typeface="Calibri" pitchFamily="34" charset="0"/>
+                <a:ea typeface="Calibri" pitchFamily="34" charset="-122"/>
+                <a:cs typeface="Calibri" pitchFamily="34" charset="-120"/>
+              </a:rPr>
+              <a:t>Serving reuses data_prep.py directly — a second copy of the feature logic is how models quietly degrade in production.</a:t>
+            </a:r>
+            <a:endParaRPr lang="en-US" sz="1150" dirty="0"/>
+          </a:p>
+        </p:txBody>
+      </p:sp>
+      <p:sp>
+        <p:nvSpPr>
+          <p:cNvPr id="19" name="Shape 17"/>
+          <p:cNvSpPr/>
+          <p:nvPr/>
+        </p:nvSpPr>
+        <p:spPr>
+          <a:xfrm>
+            <a:off x="6263640" y="5138928"/>
+            <a:ext cx="5358384" cy="896112"/>
+          </a:xfrm>
+          <a:prstGeom prst="roundRect">
+            <a:avLst>
+              <a:gd name="adj" fmla="val 8163"/>
+            </a:avLst>
+          </a:prstGeom>
+          <a:solidFill>
+            <a:srgbClr val="EEF4F6"/>
+          </a:solidFill>
+          <a:ln w="12700">
+            <a:solidFill>
+              <a:srgbClr val="EEF4F6"/>
+            </a:solidFill>
+            <a:prstDash val="solid"/>
+          </a:ln>
+        </p:spPr>
+      </p:sp>
+      <p:sp>
+        <p:nvSpPr>
+          <p:cNvPr id="20" name="Text 18"/>
+          <p:cNvSpPr/>
+          <p:nvPr/>
+        </p:nvSpPr>
+        <p:spPr>
+          <a:xfrm>
+            <a:off x="6519672" y="5138928"/>
+            <a:ext cx="4846320" cy="896112"/>
+          </a:xfrm>
+          <a:prstGeom prst="rect">
+            <a:avLst/>
+          </a:prstGeom>
+          <a:noFill/>
+          <a:ln/>
+        </p:spPr>
+        <p:txBody>
+          <a:bodyPr wrap="square" lIns="0" tIns="0" rIns="0" bIns="0" rtlCol="0" anchor="ctr"/>
+          <a:lstStyle/>
+          <a:p>
+            <a:pPr indent="0" marL="0">
+              <a:lnSpc>
+                <a:spcPts val="1500"/>
+              </a:lnSpc>
+              <a:buNone/>
+            </a:pPr>
+            <a:r>
+              <a:rPr lang="en-US" sz="1150" dirty="0">
+                <a:solidFill>
+                  <a:srgbClr val="34525E"/>
+                </a:solidFill>
+                <a:latin typeface="Calibri" pitchFamily="34" charset="0"/>
+                <a:ea typeface="Calibri" pitchFamily="34" charset="-122"/>
+                <a:cs typeface="Calibri" pitchFamily="34" charset="-120"/>
+              </a:rPr>
+              <a:t>Monitor flag rate, realised vs predicted readmission rate, calibration drift and the subgroup gaps — on a schedule, not once at launch.</a:t>
+            </a:r>
+            <a:endParaRPr lang="en-US" sz="1150" dirty="0"/>
+          </a:p>
+        </p:txBody>
+      </p:sp>
+    </p:spTree>
+  </p:cSld>
+  <p:clrMapOvr>
+    <a:masterClrMapping/>
+  </p:clrMapOvr>
+</p:sld>
+</file>
+
+<file path=ppt/slides/slide19.xml><?xml version="1.0" encoding="utf-8"?>
+<p:sld xmlns:a="http://schemas.openxmlformats.org/drawingml/2006/main" xmlns:r="http://schemas.openxmlformats.org/officeDocument/2006/relationships" xmlns:p="http://schemas.openxmlformats.org/presentationml/2006/main">
+  <p:cSld name="Slide 19">
     <p:bg>
       <p:bgPr>
         <a:solidFill>
@@ -14902,7 +17954,7 @@
                 <a:ea typeface="Calibri" pitchFamily="34" charset="-122"/>
                 <a:cs typeface="Calibri" pitchFamily="34" charset="-120"/>
               </a:rPr>
-              <a:t>59.8% of readmissions are missed at 20% capacity.</a:t>
+              <a:t>The oldest patients cannot be ranked well, and we know why.</a:t>
             </a:r>
             <a:endParaRPr lang="en-US" sz="1400" dirty="0"/>
           </a:p>
@@ -14944,7 +17996,7 @@
                 <a:ea typeface="Calibri" pitchFamily="34" charset="-122"/>
                 <a:cs typeface="Calibri" pitchFamily="34" charset="-120"/>
               </a:rPr>
-              <a:t>This reprioritises attention. An unflagged patient is not a safe patient.</a:t>
+              <a:t>Every feature's signal decays with age. Three fixes failed. It needs frailty data this dataset lacks.</a:t>
             </a:r>
             <a:endParaRPr lang="en-US" sz="1200" dirty="0"/>
           </a:p>
